--- a/slides/chapter_3.pptx
+++ b/slides/chapter_3.pptx
@@ -5,29 +5,53 @@
     <p:sldMasterId id="2147483660" r:id="rId1"/>
   </p:sldMasterIdLst>
   <p:sldIdLst>
-    <p:sldId id="256" r:id="rId2"/>
-    <p:sldId id="546" r:id="rId3"/>
-    <p:sldId id="547" r:id="rId4"/>
-    <p:sldId id="548" r:id="rId5"/>
-    <p:sldId id="549" r:id="rId6"/>
-    <p:sldId id="257" r:id="rId7"/>
-    <p:sldId id="273" r:id="rId8"/>
-    <p:sldId id="545" r:id="rId9"/>
-    <p:sldId id="260" r:id="rId10"/>
-    <p:sldId id="267" r:id="rId11"/>
-    <p:sldId id="261" r:id="rId12"/>
-    <p:sldId id="272" r:id="rId13"/>
-    <p:sldId id="262" r:id="rId14"/>
-    <p:sldId id="266" r:id="rId15"/>
-    <p:sldId id="263" r:id="rId16"/>
-    <p:sldId id="258" r:id="rId17"/>
-    <p:sldId id="259" r:id="rId18"/>
-    <p:sldId id="264" r:id="rId19"/>
-    <p:sldId id="265" r:id="rId20"/>
-    <p:sldId id="271" r:id="rId21"/>
-    <p:sldId id="269" r:id="rId22"/>
-    <p:sldId id="270" r:id="rId23"/>
-    <p:sldId id="268" r:id="rId24"/>
+    <p:sldId id="558" r:id="rId2"/>
+    <p:sldId id="256" r:id="rId3"/>
+    <p:sldId id="546" r:id="rId4"/>
+    <p:sldId id="547" r:id="rId5"/>
+    <p:sldId id="548" r:id="rId6"/>
+    <p:sldId id="549" r:id="rId7"/>
+    <p:sldId id="257" r:id="rId8"/>
+    <p:sldId id="273" r:id="rId9"/>
+    <p:sldId id="545" r:id="rId10"/>
+    <p:sldId id="260" r:id="rId11"/>
+    <p:sldId id="267" r:id="rId12"/>
+    <p:sldId id="261" r:id="rId13"/>
+    <p:sldId id="561" r:id="rId14"/>
+    <p:sldId id="272" r:id="rId15"/>
+    <p:sldId id="262" r:id="rId16"/>
+    <p:sldId id="266" r:id="rId17"/>
+    <p:sldId id="263" r:id="rId18"/>
+    <p:sldId id="258" r:id="rId19"/>
+    <p:sldId id="559" r:id="rId20"/>
+    <p:sldId id="259" r:id="rId21"/>
+    <p:sldId id="264" r:id="rId22"/>
+    <p:sldId id="265" r:id="rId23"/>
+    <p:sldId id="271" r:id="rId24"/>
+    <p:sldId id="269" r:id="rId25"/>
+    <p:sldId id="270" r:id="rId26"/>
+    <p:sldId id="268" r:id="rId27"/>
+    <p:sldId id="551" r:id="rId28"/>
+    <p:sldId id="360" r:id="rId29"/>
+    <p:sldId id="554" r:id="rId30"/>
+    <p:sldId id="555" r:id="rId31"/>
+    <p:sldId id="552" r:id="rId32"/>
+    <p:sldId id="392" r:id="rId33"/>
+    <p:sldId id="393" r:id="rId34"/>
+    <p:sldId id="556" r:id="rId35"/>
+    <p:sldId id="426" r:id="rId36"/>
+    <p:sldId id="560" r:id="rId37"/>
+    <p:sldId id="341" r:id="rId38"/>
+    <p:sldId id="438" r:id="rId39"/>
+    <p:sldId id="416" r:id="rId40"/>
+    <p:sldId id="387" r:id="rId41"/>
+    <p:sldId id="417" r:id="rId42"/>
+    <p:sldId id="394" r:id="rId43"/>
+    <p:sldId id="414" r:id="rId44"/>
+    <p:sldId id="429" r:id="rId45"/>
+    <p:sldId id="431" r:id="rId46"/>
+    <p:sldId id="415" r:id="rId47"/>
+    <p:sldId id="557" r:id="rId48"/>
   </p:sldIdLst>
   <p:sldSz cx="12192000" cy="6858000"/>
   <p:notesSz cx="6858000" cy="9144000"/>
@@ -131,6 +155,7 @@
       <p14:sectionLst xmlns:p14="http://schemas.microsoft.com/office/powerpoint/2010/main">
         <p14:section name="Default Section" id="{3E8E1D04-FFB7-A443-96E8-8EF43C6560A0}">
           <p14:sldIdLst>
+            <p14:sldId id="558"/>
             <p14:sldId id="256"/>
           </p14:sldIdLst>
         </p14:section>
@@ -154,11 +179,17 @@
             <p14:sldId id="260"/>
             <p14:sldId id="267"/>
             <p14:sldId id="261"/>
+            <p14:sldId id="561"/>
             <p14:sldId id="272"/>
             <p14:sldId id="262"/>
             <p14:sldId id="266"/>
             <p14:sldId id="263"/>
             <p14:sldId id="258"/>
+          </p14:sldIdLst>
+        </p14:section>
+        <p14:section name="Non-scatter" id="{48C5913D-336C-724C-B779-809999C4F817}">
+          <p14:sldIdLst>
+            <p14:sldId id="559"/>
           </p14:sldIdLst>
         </p14:section>
         <p14:section name="Mapping" id="{45BDE52D-7DFF-9E4C-9AE3-55BDCDE50100}">
@@ -182,6 +213,27 @@
         <p14:section name="Conclusion" id="{DF00E891-914E-4642-9CCF-7E0D8CEC5079}">
           <p14:sldIdLst>
             <p14:sldId id="268"/>
+            <p14:sldId id="551"/>
+            <p14:sldId id="360"/>
+            <p14:sldId id="554"/>
+            <p14:sldId id="555"/>
+            <p14:sldId id="552"/>
+            <p14:sldId id="392"/>
+            <p14:sldId id="393"/>
+            <p14:sldId id="556"/>
+            <p14:sldId id="426"/>
+            <p14:sldId id="560"/>
+            <p14:sldId id="341"/>
+            <p14:sldId id="438"/>
+            <p14:sldId id="416"/>
+            <p14:sldId id="387"/>
+            <p14:sldId id="417"/>
+            <p14:sldId id="394"/>
+            <p14:sldId id="414"/>
+            <p14:sldId id="429"/>
+            <p14:sldId id="431"/>
+            <p14:sldId id="415"/>
+            <p14:sldId id="557"/>
           </p14:sldIdLst>
         </p14:section>
       </p14:sectionLst>
@@ -332,7 +384,7 @@
           <a:p>
             <a:fld id="{32EAC488-0008-CA42-9496-D262A63F87EA}" type="datetimeFigureOut">
               <a:rPr lang="en-US" smtClean="0"/>
-              <a:t>8/29/25</a:t>
+              <a:t>9/3/25</a:t>
             </a:fld>
             <a:endParaRPr lang="en-US"/>
           </a:p>
@@ -543,7 +595,7 @@
           <a:p>
             <a:fld id="{32EAC488-0008-CA42-9496-D262A63F87EA}" type="datetimeFigureOut">
               <a:rPr lang="en-US" smtClean="0"/>
-              <a:t>8/29/25</a:t>
+              <a:t>9/3/25</a:t>
             </a:fld>
             <a:endParaRPr lang="en-US"/>
           </a:p>
@@ -758,7 +810,7 @@
           <a:p>
             <a:fld id="{32EAC488-0008-CA42-9496-D262A63F87EA}" type="datetimeFigureOut">
               <a:rPr lang="en-US" smtClean="0"/>
-              <a:t>8/29/25</a:t>
+              <a:t>9/3/25</a:t>
             </a:fld>
             <a:endParaRPr lang="en-US"/>
           </a:p>
@@ -850,6 +902,204 @@
 </p:sldLayout>
 </file>
 
+<file path=ppt/slideLayouts/slideLayout12.xml><?xml version="1.0" encoding="utf-8"?>
+<p:sldLayout xmlns:a="http://schemas.openxmlformats.org/drawingml/2006/main" xmlns:r="http://schemas.openxmlformats.org/officeDocument/2006/relationships" xmlns:p="http://schemas.openxmlformats.org/presentationml/2006/main" userDrawn="1">
+  <p:cSld name="Progress Check_O">
+    <p:spTree>
+      <p:nvGrpSpPr>
+        <p:cNvPr id="1" name=""/>
+        <p:cNvGrpSpPr/>
+        <p:nvPr/>
+      </p:nvGrpSpPr>
+      <p:grpSpPr>
+        <a:xfrm>
+          <a:off x="0" y="0"/>
+          <a:ext cx="0" cy="0"/>
+          <a:chOff x="0" y="0"/>
+          <a:chExt cx="0" cy="0"/>
+        </a:xfrm>
+      </p:grpSpPr>
+      <p:sp>
+        <p:nvSpPr>
+          <p:cNvPr id="4" name="Date Placeholder 3"/>
+          <p:cNvSpPr>
+            <a:spLocks noGrp="1"/>
+          </p:cNvSpPr>
+          <p:nvPr>
+            <p:ph type="dt" sz="half" idx="10"/>
+          </p:nvPr>
+        </p:nvSpPr>
+        <p:spPr/>
+        <p:txBody>
+          <a:bodyPr/>
+          <a:lstStyle/>
+          <a:p>
+            <a:fld id="{B8C1A91B-89D1-4439-B203-39C7360BA7E9}" type="datetime1">
+              <a:rPr lang="en-US" smtClean="0"/>
+              <a:t>9/10/25</a:t>
+            </a:fld>
+            <a:endParaRPr lang="en-US" dirty="0"/>
+          </a:p>
+        </p:txBody>
+      </p:sp>
+      <p:sp>
+        <p:nvSpPr>
+          <p:cNvPr id="6" name="Slide Number Placeholder 5"/>
+          <p:cNvSpPr>
+            <a:spLocks noGrp="1"/>
+          </p:cNvSpPr>
+          <p:nvPr>
+            <p:ph type="sldNum" sz="quarter" idx="12"/>
+          </p:nvPr>
+        </p:nvSpPr>
+        <p:spPr/>
+        <p:txBody>
+          <a:bodyPr/>
+          <a:lstStyle/>
+          <a:p>
+            <a:fld id="{E555C569-B112-4D8C-B1B2-EEE93146C0F6}" type="slidenum">
+              <a:rPr lang="en-US" smtClean="0"/>
+              <a:t>‹#›</a:t>
+            </a:fld>
+            <a:endParaRPr lang="en-US" dirty="0"/>
+          </a:p>
+        </p:txBody>
+      </p:sp>
+      <p:sp>
+        <p:nvSpPr>
+          <p:cNvPr id="7" name="Title 1">
+            <a:extLst>
+              <a:ext uri="{FF2B5EF4-FFF2-40B4-BE49-F238E27FC236}">
+                <a16:creationId xmlns:a16="http://schemas.microsoft.com/office/drawing/2014/main" id="{CD0C05DD-EBDD-493C-852D-9C8145ABB6FF}"/>
+              </a:ext>
+            </a:extLst>
+          </p:cNvPr>
+          <p:cNvSpPr>
+            <a:spLocks noGrp="1"/>
+          </p:cNvSpPr>
+          <p:nvPr>
+            <p:ph type="title" hasCustomPrompt="1"/>
+          </p:nvPr>
+        </p:nvSpPr>
+        <p:spPr>
+          <a:xfrm>
+            <a:off x="3869268" y="873253"/>
+            <a:ext cx="7315200" cy="1088070"/>
+          </a:xfrm>
+        </p:spPr>
+        <p:txBody>
+          <a:bodyPr/>
+          <a:lstStyle>
+            <a:lvl1pPr>
+              <a:defRPr/>
+            </a:lvl1pPr>
+          </a:lstStyle>
+          <a:p>
+            <a:r>
+              <a:rPr lang="en-US" dirty="0"/>
+              <a:t>Progress Check</a:t>
+            </a:r>
+          </a:p>
+        </p:txBody>
+      </p:sp>
+      <p:sp>
+        <p:nvSpPr>
+          <p:cNvPr id="8" name="Content Placeholder 2">
+            <a:extLst>
+              <a:ext uri="{FF2B5EF4-FFF2-40B4-BE49-F238E27FC236}">
+                <a16:creationId xmlns:a16="http://schemas.microsoft.com/office/drawing/2014/main" id="{832EE0AC-6DF6-4F86-AC83-FDAEFF22CD6E}"/>
+              </a:ext>
+            </a:extLst>
+          </p:cNvPr>
+          <p:cNvSpPr>
+            <a:spLocks noGrp="1"/>
+          </p:cNvSpPr>
+          <p:nvPr>
+            <p:ph idx="1"/>
+          </p:nvPr>
+        </p:nvSpPr>
+        <p:spPr>
+          <a:xfrm>
+            <a:off x="3869268" y="2093842"/>
+            <a:ext cx="7315200" cy="3890905"/>
+          </a:xfrm>
+        </p:spPr>
+        <p:txBody>
+          <a:bodyPr>
+            <a:noAutofit/>
+          </a:bodyPr>
+          <a:lstStyle>
+            <a:lvl1pPr marL="0" indent="0">
+              <a:buNone/>
+              <a:defRPr sz="3600"/>
+            </a:lvl1pPr>
+            <a:lvl2pPr marL="502920" indent="0">
+              <a:buNone/>
+              <a:defRPr sz="3600"/>
+            </a:lvl2pPr>
+            <a:lvl3pPr marL="960120" indent="0">
+              <a:buNone/>
+              <a:defRPr sz="3600"/>
+            </a:lvl3pPr>
+            <a:lvl4pPr marL="1417320" indent="0">
+              <a:buNone/>
+              <a:defRPr sz="3600"/>
+            </a:lvl4pPr>
+            <a:lvl5pPr marL="1874520" indent="0">
+              <a:buNone/>
+              <a:defRPr sz="3600"/>
+            </a:lvl5pPr>
+          </a:lstStyle>
+          <a:p>
+            <a:pPr lvl="0"/>
+            <a:r>
+              <a:rPr lang="en-US" dirty="0"/>
+              <a:t>Click to edit Master text styles</a:t>
+            </a:r>
+          </a:p>
+          <a:p>
+            <a:pPr lvl="1"/>
+            <a:r>
+              <a:rPr lang="en-US" dirty="0"/>
+              <a:t>Second level</a:t>
+            </a:r>
+          </a:p>
+          <a:p>
+            <a:pPr lvl="2"/>
+            <a:r>
+              <a:rPr lang="en-US" dirty="0"/>
+              <a:t>Third level</a:t>
+            </a:r>
+          </a:p>
+          <a:p>
+            <a:pPr lvl="3"/>
+            <a:r>
+              <a:rPr lang="en-US" dirty="0"/>
+              <a:t>Fourth level</a:t>
+            </a:r>
+          </a:p>
+          <a:p>
+            <a:pPr lvl="4"/>
+            <a:r>
+              <a:rPr lang="en-US" dirty="0"/>
+              <a:t>Fifth level</a:t>
+            </a:r>
+          </a:p>
+        </p:txBody>
+      </p:sp>
+    </p:spTree>
+    <p:extLst>
+      <p:ext uri="{BB962C8B-B14F-4D97-AF65-F5344CB8AC3E}">
+        <p14:creationId xmlns:p14="http://schemas.microsoft.com/office/powerpoint/2010/main" val="2883973787"/>
+      </p:ext>
+    </p:extLst>
+  </p:cSld>
+  <p:clrMapOvr>
+    <a:masterClrMapping/>
+  </p:clrMapOvr>
+</p:sldLayout>
+</file>
+
 <file path=ppt/slideLayouts/slideLayout2.xml><?xml version="1.0" encoding="utf-8"?>
 <p:sldLayout xmlns:a="http://schemas.openxmlformats.org/drawingml/2006/main" xmlns:r="http://schemas.openxmlformats.org/officeDocument/2006/relationships" xmlns:p="http://schemas.openxmlformats.org/presentationml/2006/main" type="obj" preserve="1">
   <p:cSld name="Title and Content">
@@ -959,7 +1209,7 @@
           <a:p>
             <a:fld id="{32EAC488-0008-CA42-9496-D262A63F87EA}" type="datetimeFigureOut">
               <a:rPr lang="en-US" smtClean="0"/>
-              <a:t>8/29/25</a:t>
+              <a:t>9/3/25</a:t>
             </a:fld>
             <a:endParaRPr lang="en-US"/>
           </a:p>
@@ -1238,7 +1488,7 @@
           <a:p>
             <a:fld id="{32EAC488-0008-CA42-9496-D262A63F87EA}" type="datetimeFigureOut">
               <a:rPr lang="en-US" smtClean="0"/>
-              <a:t>8/29/25</a:t>
+              <a:t>9/3/25</a:t>
             </a:fld>
             <a:endParaRPr lang="en-US"/>
           </a:p>
@@ -1506,7 +1756,7 @@
           <a:p>
             <a:fld id="{32EAC488-0008-CA42-9496-D262A63F87EA}" type="datetimeFigureOut">
               <a:rPr lang="en-US" smtClean="0"/>
-              <a:t>8/29/25</a:t>
+              <a:t>9/3/25</a:t>
             </a:fld>
             <a:endParaRPr lang="en-US"/>
           </a:p>
@@ -1922,7 +2172,7 @@
           <a:p>
             <a:fld id="{32EAC488-0008-CA42-9496-D262A63F87EA}" type="datetimeFigureOut">
               <a:rPr lang="en-US" smtClean="0"/>
-              <a:t>8/29/25</a:t>
+              <a:t>9/3/25</a:t>
             </a:fld>
             <a:endParaRPr lang="en-US"/>
           </a:p>
@@ -2071,7 +2321,7 @@
           <a:p>
             <a:fld id="{32EAC488-0008-CA42-9496-D262A63F87EA}" type="datetimeFigureOut">
               <a:rPr lang="en-US" smtClean="0"/>
-              <a:t>8/29/25</a:t>
+              <a:t>9/3/25</a:t>
             </a:fld>
             <a:endParaRPr lang="en-US"/>
           </a:p>
@@ -2197,7 +2447,7 @@
           <a:p>
             <a:fld id="{32EAC488-0008-CA42-9496-D262A63F87EA}" type="datetimeFigureOut">
               <a:rPr lang="en-US" smtClean="0"/>
-              <a:t>8/29/25</a:t>
+              <a:t>9/3/25</a:t>
             </a:fld>
             <a:endParaRPr lang="en-US"/>
           </a:p>
@@ -2448,7 +2698,7 @@
           <a:p>
             <a:fld id="{32EAC488-0008-CA42-9496-D262A63F87EA}" type="datetimeFigureOut">
               <a:rPr lang="en-US" smtClean="0"/>
-              <a:t>8/29/25</a:t>
+              <a:t>9/3/25</a:t>
             </a:fld>
             <a:endParaRPr lang="en-US"/>
           </a:p>
@@ -2893,7 +3143,7 @@
           <a:p>
             <a:fld id="{32EAC488-0008-CA42-9496-D262A63F87EA}" type="datetimeFigureOut">
               <a:rPr lang="en-US" smtClean="0"/>
-              <a:t>8/29/25</a:t>
+              <a:t>9/3/25</a:t>
             </a:fld>
             <a:endParaRPr lang="en-US"/>
           </a:p>
@@ -3070,7 +3320,7 @@
           <p:nvPr/>
         </p:nvPicPr>
         <p:blipFill rotWithShape="1">
-          <a:blip r:embed="rId13">
+          <a:blip r:embed="rId14">
             <a:extLst>
               <a:ext uri="{28A0092B-C50C-407E-A947-70E740481C1C}">
                 <a14:useLocalDpi xmlns:a14="http://schemas.microsoft.com/office/drawing/2010/main" val="0"/>
@@ -3220,7 +3470,7 @@
           <a:p>
             <a:fld id="{32EAC488-0008-CA42-9496-D262A63F87EA}" type="datetimeFigureOut">
               <a:rPr lang="en-US" smtClean="0"/>
-              <a:t>8/29/25</a:t>
+              <a:t>9/3/25</a:t>
             </a:fld>
             <a:endParaRPr lang="en-US"/>
           </a:p>
@@ -3359,6 +3609,7 @@
     <p:sldLayoutId id="2147483669" r:id="rId9"/>
     <p:sldLayoutId id="2147483670" r:id="rId10"/>
     <p:sldLayoutId id="2147483671" r:id="rId11"/>
+    <p:sldLayoutId id="2147483673" r:id="rId12"/>
   </p:sldLayoutIdLst>
   <p:txStyles>
     <p:titleStyle>
@@ -3711,7 +3962,7 @@
           <p:cNvPr id="2" name="Title 1">
             <a:extLst>
               <a:ext uri="{FF2B5EF4-FFF2-40B4-BE49-F238E27FC236}">
-                <a16:creationId xmlns:a16="http://schemas.microsoft.com/office/drawing/2014/main" id="{00EBD5C1-6153-57DF-62BD-0312F52DA2CC}"/>
+                <a16:creationId xmlns:a16="http://schemas.microsoft.com/office/drawing/2014/main" id="{C8F3C8C7-2926-CB89-A984-BE336BADD8A7}"/>
               </a:ext>
             </a:extLst>
           </p:cNvPr>
@@ -3719,7 +3970,7 @@
             <a:spLocks noGrp="1"/>
           </p:cNvSpPr>
           <p:nvPr>
-            <p:ph type="ctrTitle"/>
+            <p:ph type="title"/>
           </p:nvPr>
         </p:nvSpPr>
         <p:spPr/>
@@ -3729,17 +3980,17 @@
           <a:p>
             <a:r>
               <a:rPr lang="en-US" dirty="0"/>
-              <a:t>Coordinate Systems and Axes</a:t>
-            </a:r>
-          </a:p>
-        </p:txBody>
-      </p:sp>
-      <p:sp>
-        <p:nvSpPr>
-          <p:cNvPr id="3" name="Subtitle 2">
+              <a:t>Housekeeping</a:t>
+            </a:r>
+          </a:p>
+        </p:txBody>
+      </p:sp>
+      <p:sp>
+        <p:nvSpPr>
+          <p:cNvPr id="3" name="Content Placeholder 2">
             <a:extLst>
               <a:ext uri="{FF2B5EF4-FFF2-40B4-BE49-F238E27FC236}">
-                <a16:creationId xmlns:a16="http://schemas.microsoft.com/office/drawing/2014/main" id="{76F370B5-F879-F8C0-56BA-2555EF993B23}"/>
+                <a16:creationId xmlns:a16="http://schemas.microsoft.com/office/drawing/2014/main" id="{9CB82266-51D1-6C01-8A74-5C7C8D2559A8}"/>
               </a:ext>
             </a:extLst>
           </p:cNvPr>
@@ -3747,22 +3998,78 @@
             <a:spLocks noGrp="1"/>
           </p:cNvSpPr>
           <p:nvPr>
-            <p:ph type="subTitle" idx="1"/>
-          </p:nvPr>
-        </p:nvSpPr>
-        <p:spPr/>
+            <p:ph idx="1"/>
+          </p:nvPr>
+        </p:nvSpPr>
+        <p:spPr>
+          <a:xfrm>
+            <a:off x="1451579" y="2015732"/>
+            <a:ext cx="9603275" cy="4037749"/>
+          </a:xfrm>
+        </p:spPr>
         <p:txBody>
           <a:bodyPr/>
           <a:lstStyle/>
           <a:p>
-            <a:endParaRPr lang="en-US"/>
+            <a:r>
+              <a:rPr lang="en-US" dirty="0"/>
+              <a:t>Today:</a:t>
+            </a:r>
+          </a:p>
+          <a:p>
+            <a:pPr lvl="1"/>
+            <a:r>
+              <a:rPr lang="en-US" dirty="0"/>
+              <a:t>Chapter 3 – coordinate systems. Short and pretty simple. </a:t>
+            </a:r>
+          </a:p>
+          <a:p>
+            <a:pPr lvl="1"/>
+            <a:r>
+              <a:rPr lang="en-US" dirty="0"/>
+              <a:t>Database structure basics – part 1 of 2. Datasheets, tables, structure, keys. </a:t>
+            </a:r>
+          </a:p>
+          <a:p>
+            <a:pPr lvl="2"/>
+            <a:r>
+              <a:rPr lang="en-US" dirty="0"/>
+              <a:t>Reading:</a:t>
+            </a:r>
+          </a:p>
+          <a:p>
+            <a:r>
+              <a:rPr lang="en-US" dirty="0"/>
+              <a:t>Dashboards:</a:t>
+            </a:r>
+          </a:p>
+          <a:p>
+            <a:pPr lvl="1"/>
+            <a:r>
+              <a:rPr lang="en-US" dirty="0"/>
+              <a:t>More dashboarding. </a:t>
+            </a:r>
+          </a:p>
+          <a:p>
+            <a:pPr lvl="1"/>
+            <a:r>
+              <a:rPr lang="en-US" dirty="0"/>
+              <a:t>Actions and interactivity. </a:t>
+            </a:r>
+          </a:p>
+          <a:p>
+            <a:pPr lvl="1"/>
+            <a:r>
+              <a:rPr lang="en-US" dirty="0"/>
+              <a:t>Filters and such. </a:t>
+            </a:r>
           </a:p>
         </p:txBody>
       </p:sp>
     </p:spTree>
     <p:extLst>
       <p:ext uri="{BB962C8B-B14F-4D97-AF65-F5344CB8AC3E}">
-        <p14:creationId xmlns:p14="http://schemas.microsoft.com/office/powerpoint/2010/main" val="2883178912"/>
+        <p14:creationId xmlns:p14="http://schemas.microsoft.com/office/powerpoint/2010/main" val="2352366941"/>
       </p:ext>
     </p:extLst>
   </p:cSld>
@@ -3773,467 +4080,6 @@
 </file>
 
 <file path=ppt/slides/slide10.xml><?xml version="1.0" encoding="utf-8"?>
-<p:sld xmlns:a="http://schemas.openxmlformats.org/drawingml/2006/main" xmlns:r="http://schemas.openxmlformats.org/officeDocument/2006/relationships" xmlns:p="http://schemas.openxmlformats.org/presentationml/2006/main">
-  <p:cSld>
-    <p:spTree>
-      <p:nvGrpSpPr>
-        <p:cNvPr id="1" name=""/>
-        <p:cNvGrpSpPr/>
-        <p:nvPr/>
-      </p:nvGrpSpPr>
-      <p:grpSpPr>
-        <a:xfrm>
-          <a:off x="0" y="0"/>
-          <a:ext cx="0" cy="0"/>
-          <a:chOff x="0" y="0"/>
-          <a:chExt cx="0" cy="0"/>
-        </a:xfrm>
-      </p:grpSpPr>
-      <p:sp>
-        <p:nvSpPr>
-          <p:cNvPr id="2" name="Title 1">
-            <a:extLst>
-              <a:ext uri="{FF2B5EF4-FFF2-40B4-BE49-F238E27FC236}">
-                <a16:creationId xmlns:a16="http://schemas.microsoft.com/office/drawing/2014/main" id="{3370EB8B-8CA0-5240-D4E8-2F73AE16798F}"/>
-              </a:ext>
-            </a:extLst>
-          </p:cNvPr>
-          <p:cNvSpPr>
-            <a:spLocks noGrp="1"/>
-          </p:cNvSpPr>
-          <p:nvPr>
-            <p:ph type="title"/>
-          </p:nvPr>
-        </p:nvSpPr>
-        <p:spPr/>
-        <p:txBody>
-          <a:bodyPr/>
-          <a:lstStyle/>
-          <a:p>
-            <a:r>
-              <a:rPr lang="en-US" dirty="0"/>
-              <a:t>Scatter Plots are Simple!</a:t>
-            </a:r>
-          </a:p>
-        </p:txBody>
-      </p:sp>
-      <p:sp>
-        <p:nvSpPr>
-          <p:cNvPr id="3" name="Content Placeholder 2">
-            <a:extLst>
-              <a:ext uri="{FF2B5EF4-FFF2-40B4-BE49-F238E27FC236}">
-                <a16:creationId xmlns:a16="http://schemas.microsoft.com/office/drawing/2014/main" id="{25C274CA-B5A2-0141-A4EB-F6B67297F4BD}"/>
-              </a:ext>
-            </a:extLst>
-          </p:cNvPr>
-          <p:cNvSpPr>
-            <a:spLocks noGrp="1"/>
-          </p:cNvSpPr>
-          <p:nvPr>
-            <p:ph idx="1"/>
-          </p:nvPr>
-        </p:nvSpPr>
-        <p:spPr>
-          <a:xfrm>
-            <a:off x="1451579" y="2015732"/>
-            <a:ext cx="6533827" cy="3952102"/>
-          </a:xfrm>
-        </p:spPr>
-        <p:txBody>
-          <a:bodyPr/>
-          <a:lstStyle/>
-          <a:p>
-            <a:r>
-              <a:rPr lang="en-US" dirty="0"/>
-              <a:t>Scatter plots are very simple, yet powerful. </a:t>
-            </a:r>
-          </a:p>
-          <a:p>
-            <a:r>
-              <a:rPr lang="en-US" dirty="0"/>
-              <a:t>Generally, we just use quadrant 1. </a:t>
-            </a:r>
-          </a:p>
-          <a:p>
-            <a:r>
-              <a:rPr lang="en-US" dirty="0"/>
-              <a:t>Require two numeric measures. </a:t>
-            </a:r>
-          </a:p>
-          <a:p>
-            <a:pPr lvl="1"/>
-            <a:r>
-              <a:rPr lang="en-US" dirty="0"/>
-              <a:t>One is X, one is Y. </a:t>
-            </a:r>
-          </a:p>
-          <a:p>
-            <a:pPr lvl="1"/>
-            <a:r>
-              <a:rPr lang="en-US" dirty="0"/>
-              <a:t>Think – if one is categorical, what is the result?</a:t>
-            </a:r>
-          </a:p>
-          <a:p>
-            <a:r>
-              <a:rPr lang="en-US" dirty="0"/>
-              <a:t>Can show relationships between variables. </a:t>
-            </a:r>
-          </a:p>
-          <a:p>
-            <a:r>
-              <a:rPr lang="en-US" dirty="0"/>
-              <a:t>Basis of predictive analytics – linear regression (best fit). </a:t>
-            </a:r>
-          </a:p>
-        </p:txBody>
-      </p:sp>
-      <p:pic>
-        <p:nvPicPr>
-          <p:cNvPr id="1026" name="Picture 2" descr="History of Scatterplots: A Timeline – Information Visualization">
-            <a:extLst>
-              <a:ext uri="{FF2B5EF4-FFF2-40B4-BE49-F238E27FC236}">
-                <a16:creationId xmlns:a16="http://schemas.microsoft.com/office/drawing/2014/main" id="{64570A20-80BC-9FA9-9CF0-EB1E3AF85349}"/>
-              </a:ext>
-            </a:extLst>
-          </p:cNvPr>
-          <p:cNvPicPr>
-            <a:picLocks noChangeAspect="1" noChangeArrowheads="1"/>
-          </p:cNvPicPr>
-          <p:nvPr/>
-        </p:nvPicPr>
-        <p:blipFill>
-          <a:blip r:embed="rId2">
-            <a:extLst>
-              <a:ext uri="{28A0092B-C50C-407E-A947-70E740481C1C}">
-                <a14:useLocalDpi xmlns:a14="http://schemas.microsoft.com/office/drawing/2010/main" val="0"/>
-              </a:ext>
-            </a:extLst>
-          </a:blip>
-          <a:srcRect/>
-          <a:stretch>
-            <a:fillRect/>
-          </a:stretch>
-        </p:blipFill>
-        <p:spPr bwMode="auto">
-          <a:xfrm>
-            <a:off x="7985406" y="2119914"/>
-            <a:ext cx="4206594" cy="3952102"/>
-          </a:xfrm>
-          <a:prstGeom prst="rect">
-            <a:avLst/>
-          </a:prstGeom>
-          <a:noFill/>
-          <a:extLst>
-            <a:ext uri="{909E8E84-426E-40DD-AFC4-6F175D3DCCD1}">
-              <a14:hiddenFill xmlns:a14="http://schemas.microsoft.com/office/drawing/2010/main">
-                <a:solidFill>
-                  <a:srgbClr val="FFFFFF"/>
-                </a:solidFill>
-              </a14:hiddenFill>
-            </a:ext>
-          </a:extLst>
-        </p:spPr>
-      </p:pic>
-    </p:spTree>
-    <p:extLst>
-      <p:ext uri="{BB962C8B-B14F-4D97-AF65-F5344CB8AC3E}">
-        <p14:creationId xmlns:p14="http://schemas.microsoft.com/office/powerpoint/2010/main" val="3602456681"/>
-      </p:ext>
-    </p:extLst>
-  </p:cSld>
-  <p:clrMapOvr>
-    <a:masterClrMapping/>
-  </p:clrMapOvr>
-</p:sld>
-</file>
-
-<file path=ppt/slides/slide11.xml><?xml version="1.0" encoding="utf-8"?>
-<p:sld xmlns:a="http://schemas.openxmlformats.org/drawingml/2006/main" xmlns:r="http://schemas.openxmlformats.org/officeDocument/2006/relationships" xmlns:p="http://schemas.openxmlformats.org/presentationml/2006/main">
-  <p:cSld>
-    <p:spTree>
-      <p:nvGrpSpPr>
-        <p:cNvPr id="1" name=""/>
-        <p:cNvGrpSpPr/>
-        <p:nvPr/>
-      </p:nvGrpSpPr>
-      <p:grpSpPr>
-        <a:xfrm>
-          <a:off x="0" y="0"/>
-          <a:ext cx="0" cy="0"/>
-          <a:chOff x="0" y="0"/>
-          <a:chExt cx="0" cy="0"/>
-        </a:xfrm>
-      </p:grpSpPr>
-      <p:sp>
-        <p:nvSpPr>
-          <p:cNvPr id="2" name="Title 1">
-            <a:extLst>
-              <a:ext uri="{FF2B5EF4-FFF2-40B4-BE49-F238E27FC236}">
-                <a16:creationId xmlns:a16="http://schemas.microsoft.com/office/drawing/2014/main" id="{C0732F91-0526-1606-584D-0DE7C75F7F50}"/>
-              </a:ext>
-            </a:extLst>
-          </p:cNvPr>
-          <p:cNvSpPr>
-            <a:spLocks noGrp="1"/>
-          </p:cNvSpPr>
-          <p:nvPr>
-            <p:ph type="title"/>
-          </p:nvPr>
-        </p:nvSpPr>
-        <p:spPr/>
-        <p:txBody>
-          <a:bodyPr/>
-          <a:lstStyle/>
-          <a:p>
-            <a:r>
-              <a:rPr lang="en-US" dirty="0"/>
-              <a:t>Using Coordinate Planes</a:t>
-            </a:r>
-          </a:p>
-        </p:txBody>
-      </p:sp>
-      <p:sp>
-        <p:nvSpPr>
-          <p:cNvPr id="3" name="Content Placeholder 2">
-            <a:extLst>
-              <a:ext uri="{FF2B5EF4-FFF2-40B4-BE49-F238E27FC236}">
-                <a16:creationId xmlns:a16="http://schemas.microsoft.com/office/drawing/2014/main" id="{BAB8E0A5-6884-3608-1957-1D9CCBD30B93}"/>
-              </a:ext>
-            </a:extLst>
-          </p:cNvPr>
-          <p:cNvSpPr>
-            <a:spLocks noGrp="1"/>
-          </p:cNvSpPr>
-          <p:nvPr>
-            <p:ph idx="1"/>
-          </p:nvPr>
-        </p:nvSpPr>
-        <p:spPr>
-          <a:xfrm>
-            <a:off x="1451579" y="1853754"/>
-            <a:ext cx="10088780" cy="4199727"/>
-          </a:xfrm>
-        </p:spPr>
-        <p:txBody>
-          <a:bodyPr>
-            <a:normAutofit/>
-          </a:bodyPr>
-          <a:lstStyle/>
-          <a:p>
-            <a:r>
-              <a:rPr lang="en-US" dirty="0"/>
-              <a:t>Coordinate planes are useful for visualization because we can encode any position. </a:t>
-            </a:r>
-          </a:p>
-          <a:p>
-            <a:pPr lvl="1"/>
-            <a:r>
-              <a:rPr lang="en-US" dirty="0"/>
-              <a:t>I.e. we have a specific number (</a:t>
-            </a:r>
-            <a:r>
-              <a:rPr lang="en-US" dirty="0" err="1"/>
-              <a:t>x,y</a:t>
-            </a:r>
-            <a:r>
-              <a:rPr lang="en-US" dirty="0"/>
-              <a:t>) for any point on the plane. </a:t>
-            </a:r>
-          </a:p>
-          <a:p>
-            <a:pPr lvl="1"/>
-            <a:r>
-              <a:rPr lang="en-US" dirty="0"/>
-              <a:t>We can position things at any point. </a:t>
-            </a:r>
-          </a:p>
-          <a:p>
-            <a:r>
-              <a:rPr lang="en-US" dirty="0"/>
-              <a:t>When plotting, Tableau generates and uses these positions to plot stuff (sometime invisibly). </a:t>
-            </a:r>
-          </a:p>
-          <a:p>
-            <a:pPr lvl="1"/>
-            <a:r>
-              <a:rPr lang="en-US" dirty="0"/>
-              <a:t>E.g. the x (or y) is used with a number to generate the length of bar charts. </a:t>
-            </a:r>
-          </a:p>
-          <a:p>
-            <a:pPr lvl="1"/>
-            <a:r>
-              <a:rPr lang="en-US" dirty="0"/>
-              <a:t>A line chart is a bunch of points, connected. </a:t>
-            </a:r>
-          </a:p>
-          <a:p>
-            <a:r>
-              <a:rPr lang="en-US" dirty="0"/>
-              <a:t>With a coordinate plane as a background, we can create pretty much any chart. </a:t>
-            </a:r>
-          </a:p>
-          <a:p>
-            <a:pPr lvl="1"/>
-            <a:r>
-              <a:rPr lang="en-US" dirty="0"/>
-              <a:t>We are showing values, the plane gives a visual representation of value, we can choose any way to visualize our values on the plane. </a:t>
-            </a:r>
-          </a:p>
-          <a:p>
-            <a:pPr lvl="1"/>
-            <a:r>
-              <a:rPr lang="en-US" dirty="0"/>
-              <a:t>Different chart types or styles just maps the data on the plane differently. </a:t>
-            </a:r>
-          </a:p>
-        </p:txBody>
-      </p:sp>
-    </p:spTree>
-    <p:extLst>
-      <p:ext uri="{BB962C8B-B14F-4D97-AF65-F5344CB8AC3E}">
-        <p14:creationId xmlns:p14="http://schemas.microsoft.com/office/powerpoint/2010/main" val="3994089537"/>
-      </p:ext>
-    </p:extLst>
-  </p:cSld>
-  <p:clrMapOvr>
-    <a:masterClrMapping/>
-  </p:clrMapOvr>
-</p:sld>
-</file>
-
-<file path=ppt/slides/slide12.xml><?xml version="1.0" encoding="utf-8"?>
-<p:sld xmlns:a="http://schemas.openxmlformats.org/drawingml/2006/main" xmlns:r="http://schemas.openxmlformats.org/officeDocument/2006/relationships" xmlns:p="http://schemas.openxmlformats.org/presentationml/2006/main">
-  <p:cSld>
-    <p:spTree>
-      <p:nvGrpSpPr>
-        <p:cNvPr id="1" name=""/>
-        <p:cNvGrpSpPr/>
-        <p:nvPr/>
-      </p:nvGrpSpPr>
-      <p:grpSpPr>
-        <a:xfrm>
-          <a:off x="0" y="0"/>
-          <a:ext cx="0" cy="0"/>
-          <a:chOff x="0" y="0"/>
-          <a:chExt cx="0" cy="0"/>
-        </a:xfrm>
-      </p:grpSpPr>
-      <p:sp>
-        <p:nvSpPr>
-          <p:cNvPr id="2" name="Title 1">
-            <a:extLst>
-              <a:ext uri="{FF2B5EF4-FFF2-40B4-BE49-F238E27FC236}">
-                <a16:creationId xmlns:a16="http://schemas.microsoft.com/office/drawing/2014/main" id="{E134463A-9079-2CB6-84B0-9BA8D293160D}"/>
-              </a:ext>
-            </a:extLst>
-          </p:cNvPr>
-          <p:cNvSpPr>
-            <a:spLocks noGrp="1"/>
-          </p:cNvSpPr>
-          <p:nvPr>
-            <p:ph type="title"/>
-          </p:nvPr>
-        </p:nvSpPr>
-        <p:spPr/>
-        <p:txBody>
-          <a:bodyPr/>
-          <a:lstStyle/>
-          <a:p>
-            <a:r>
-              <a:rPr lang="en-US" dirty="0"/>
-              <a:t>Coordinate planes Behind the Scenes</a:t>
-            </a:r>
-          </a:p>
-        </p:txBody>
-      </p:sp>
-      <p:sp>
-        <p:nvSpPr>
-          <p:cNvPr id="3" name="Content Placeholder 2">
-            <a:extLst>
-              <a:ext uri="{FF2B5EF4-FFF2-40B4-BE49-F238E27FC236}">
-                <a16:creationId xmlns:a16="http://schemas.microsoft.com/office/drawing/2014/main" id="{8216F9EE-F4DF-747F-C7CA-A3C5591E8695}"/>
-              </a:ext>
-            </a:extLst>
-          </p:cNvPr>
-          <p:cNvSpPr>
-            <a:spLocks noGrp="1"/>
-          </p:cNvSpPr>
-          <p:nvPr>
-            <p:ph idx="1"/>
-          </p:nvPr>
-        </p:nvSpPr>
-        <p:spPr/>
-        <p:txBody>
-          <a:bodyPr/>
-          <a:lstStyle/>
-          <a:p>
-            <a:endParaRPr lang="en-US"/>
-          </a:p>
-        </p:txBody>
-      </p:sp>
-      <p:pic>
-        <p:nvPicPr>
-          <p:cNvPr id="6146" name="Picture 2" descr="Bar and line graph in Excel | Excelchat">
-            <a:extLst>
-              <a:ext uri="{FF2B5EF4-FFF2-40B4-BE49-F238E27FC236}">
-                <a16:creationId xmlns:a16="http://schemas.microsoft.com/office/drawing/2014/main" id="{16B74DE3-6A5B-FA63-EE36-F26EAC651DA5}"/>
-              </a:ext>
-            </a:extLst>
-          </p:cNvPr>
-          <p:cNvPicPr>
-            <a:picLocks noChangeAspect="1" noChangeArrowheads="1"/>
-          </p:cNvPicPr>
-          <p:nvPr/>
-        </p:nvPicPr>
-        <p:blipFill>
-          <a:blip r:embed="rId2">
-            <a:extLst>
-              <a:ext uri="{28A0092B-C50C-407E-A947-70E740481C1C}">
-                <a14:useLocalDpi xmlns:a14="http://schemas.microsoft.com/office/drawing/2010/main" val="0"/>
-              </a:ext>
-            </a:extLst>
-          </a:blip>
-          <a:srcRect/>
-          <a:stretch>
-            <a:fillRect/>
-          </a:stretch>
-        </p:blipFill>
-        <p:spPr bwMode="auto">
-          <a:xfrm>
-            <a:off x="1958881" y="1760743"/>
-            <a:ext cx="8588670" cy="5097257"/>
-          </a:xfrm>
-          <a:prstGeom prst="rect">
-            <a:avLst/>
-          </a:prstGeom>
-          <a:noFill/>
-          <a:extLst>
-            <a:ext uri="{909E8E84-426E-40DD-AFC4-6F175D3DCCD1}">
-              <a14:hiddenFill xmlns:a14="http://schemas.microsoft.com/office/drawing/2010/main">
-                <a:solidFill>
-                  <a:srgbClr val="FFFFFF"/>
-                </a:solidFill>
-              </a14:hiddenFill>
-            </a:ext>
-          </a:extLst>
-        </p:spPr>
-      </p:pic>
-    </p:spTree>
-    <p:extLst>
-      <p:ext uri="{BB962C8B-B14F-4D97-AF65-F5344CB8AC3E}">
-        <p14:creationId xmlns:p14="http://schemas.microsoft.com/office/powerpoint/2010/main" val="3263342710"/>
-      </p:ext>
-    </p:extLst>
-  </p:cSld>
-  <p:clrMapOvr>
-    <a:masterClrMapping/>
-  </p:clrMapOvr>
-</p:sld>
-</file>
-
-<file path=ppt/slides/slide13.xml><?xml version="1.0" encoding="utf-8"?>
 <p:sld xmlns:a="http://schemas.openxmlformats.org/drawingml/2006/main" xmlns:r="http://schemas.openxmlformats.org/officeDocument/2006/relationships" xmlns:p="http://schemas.openxmlformats.org/presentationml/2006/main">
   <p:cSld>
     <p:bg>
@@ -4279,6 +4125,951 @@
           <p:cNvPr id="2" name="Title 1">
             <a:extLst>
               <a:ext uri="{FF2B5EF4-FFF2-40B4-BE49-F238E27FC236}">
+                <a16:creationId xmlns:a16="http://schemas.microsoft.com/office/drawing/2014/main" id="{F720A923-5539-D86F-D258-F7C4AC458EC8}"/>
+              </a:ext>
+            </a:extLst>
+          </p:cNvPr>
+          <p:cNvSpPr>
+            <a:spLocks noGrp="1"/>
+          </p:cNvSpPr>
+          <p:nvPr>
+            <p:ph type="title"/>
+          </p:nvPr>
+        </p:nvSpPr>
+        <p:spPr>
+          <a:xfrm>
+            <a:off x="1451579" y="804519"/>
+            <a:ext cx="9603275" cy="1049235"/>
+          </a:xfrm>
+        </p:spPr>
+        <p:txBody>
+          <a:bodyPr>
+            <a:normAutofit/>
+          </a:bodyPr>
+          <a:lstStyle/>
+          <a:p>
+            <a:r>
+              <a:rPr lang="en-US" dirty="0"/>
+              <a:t>Scatter Plots</a:t>
+            </a:r>
+          </a:p>
+        </p:txBody>
+      </p:sp>
+      <p:pic>
+        <p:nvPicPr>
+          <p:cNvPr id="3074" name="Picture 2" descr="how to make a scatter plot in Excel — storytelling with data">
+            <a:extLst>
+              <a:ext uri="{FF2B5EF4-FFF2-40B4-BE49-F238E27FC236}">
+                <a16:creationId xmlns:a16="http://schemas.microsoft.com/office/drawing/2014/main" id="{AB6A9B96-8D79-4155-508E-3086838C4A07}"/>
+              </a:ext>
+            </a:extLst>
+          </p:cNvPr>
+          <p:cNvPicPr>
+            <a:picLocks noChangeAspect="1" noChangeArrowheads="1"/>
+          </p:cNvPicPr>
+          <p:nvPr/>
+        </p:nvPicPr>
+        <p:blipFill>
+          <a:blip r:embed="rId2">
+            <a:extLst>
+              <a:ext uri="{28A0092B-C50C-407E-A947-70E740481C1C}">
+                <a14:useLocalDpi xmlns:a14="http://schemas.microsoft.com/office/drawing/2010/main" val="0"/>
+              </a:ext>
+            </a:extLst>
+          </a:blip>
+          <a:stretch>
+            <a:fillRect/>
+          </a:stretch>
+        </p:blipFill>
+        <p:spPr bwMode="auto">
+          <a:xfrm>
+            <a:off x="275544" y="1896061"/>
+            <a:ext cx="5820455" cy="4961939"/>
+          </a:xfrm>
+          <a:prstGeom prst="rect">
+            <a:avLst/>
+          </a:prstGeom>
+          <a:noFill/>
+          <a:extLst>
+            <a:ext uri="{909E8E84-426E-40DD-AFC4-6F175D3DCCD1}">
+              <a14:hiddenFill xmlns:a14="http://schemas.microsoft.com/office/drawing/2010/main">
+                <a:solidFill>
+                  <a:srgbClr val="FFFFFF"/>
+                </a:solidFill>
+              </a14:hiddenFill>
+            </a:ext>
+          </a:extLst>
+        </p:spPr>
+      </p:pic>
+      <p:sp>
+        <p:nvSpPr>
+          <p:cNvPr id="3" name="Content Placeholder 2">
+            <a:extLst>
+              <a:ext uri="{FF2B5EF4-FFF2-40B4-BE49-F238E27FC236}">
+                <a16:creationId xmlns:a16="http://schemas.microsoft.com/office/drawing/2014/main" id="{328F0408-8EF6-ECA4-E367-8FF3A0F3FA90}"/>
+              </a:ext>
+            </a:extLst>
+          </p:cNvPr>
+          <p:cNvSpPr>
+            <a:spLocks noGrp="1"/>
+          </p:cNvSpPr>
+          <p:nvPr>
+            <p:ph idx="1"/>
+          </p:nvPr>
+        </p:nvSpPr>
+        <p:spPr>
+          <a:xfrm>
+            <a:off x="6095999" y="2015734"/>
+            <a:ext cx="5602015" cy="4037747"/>
+          </a:xfrm>
+        </p:spPr>
+        <p:txBody>
+          <a:bodyPr>
+            <a:normAutofit/>
+          </a:bodyPr>
+          <a:lstStyle/>
+          <a:p>
+            <a:pPr>
+              <a:lnSpc>
+                <a:spcPct val="110000"/>
+              </a:lnSpc>
+            </a:pPr>
+            <a:r>
+              <a:rPr lang="en-US" dirty="0"/>
+              <a:t>Scatter plots are the most coordinate plane-</a:t>
+            </a:r>
+            <a:r>
+              <a:rPr lang="en-US" dirty="0" err="1"/>
+              <a:t>ish</a:t>
+            </a:r>
+            <a:r>
+              <a:rPr lang="en-US" dirty="0"/>
+              <a:t> type of plot. </a:t>
+            </a:r>
+          </a:p>
+          <a:p>
+            <a:pPr>
+              <a:lnSpc>
+                <a:spcPct val="110000"/>
+              </a:lnSpc>
+            </a:pPr>
+            <a:r>
+              <a:rPr lang="en-US" dirty="0"/>
+              <a:t>Scatter plots are most commonly used to show relationships between numeric variables. </a:t>
+            </a:r>
+          </a:p>
+          <a:p>
+            <a:pPr>
+              <a:lnSpc>
+                <a:spcPct val="110000"/>
+              </a:lnSpc>
+            </a:pPr>
+            <a:r>
+              <a:rPr lang="en-US" dirty="0"/>
+              <a:t>Scatter plots easily allow other attributes to add density:</a:t>
+            </a:r>
+          </a:p>
+          <a:p>
+            <a:pPr lvl="1">
+              <a:lnSpc>
+                <a:spcPct val="110000"/>
+              </a:lnSpc>
+            </a:pPr>
+            <a:r>
+              <a:rPr lang="en-US" sz="2000" dirty="0"/>
+              <a:t>We can use shape/color/size/pattern to encode other data in addition to position. </a:t>
+            </a:r>
+          </a:p>
+          <a:p>
+            <a:pPr lvl="1">
+              <a:lnSpc>
+                <a:spcPct val="110000"/>
+              </a:lnSpc>
+            </a:pPr>
+            <a:r>
+              <a:rPr lang="en-US" sz="2000" dirty="0"/>
+              <a:t>This makes a plot more dense – same # of charts, more information. </a:t>
+            </a:r>
+          </a:p>
+        </p:txBody>
+      </p:sp>
+    </p:spTree>
+    <p:extLst>
+      <p:ext uri="{BB962C8B-B14F-4D97-AF65-F5344CB8AC3E}">
+        <p14:creationId xmlns:p14="http://schemas.microsoft.com/office/powerpoint/2010/main" val="2132236388"/>
+      </p:ext>
+    </p:extLst>
+  </p:cSld>
+  <p:clrMapOvr>
+    <a:masterClrMapping/>
+  </p:clrMapOvr>
+</p:sld>
+</file>
+
+<file path=ppt/slides/slide11.xml><?xml version="1.0" encoding="utf-8"?>
+<p:sld xmlns:a="http://schemas.openxmlformats.org/drawingml/2006/main" xmlns:r="http://schemas.openxmlformats.org/officeDocument/2006/relationships" xmlns:p="http://schemas.openxmlformats.org/presentationml/2006/main">
+  <p:cSld>
+    <p:spTree>
+      <p:nvGrpSpPr>
+        <p:cNvPr id="1" name=""/>
+        <p:cNvGrpSpPr/>
+        <p:nvPr/>
+      </p:nvGrpSpPr>
+      <p:grpSpPr>
+        <a:xfrm>
+          <a:off x="0" y="0"/>
+          <a:ext cx="0" cy="0"/>
+          <a:chOff x="0" y="0"/>
+          <a:chExt cx="0" cy="0"/>
+        </a:xfrm>
+      </p:grpSpPr>
+      <p:sp>
+        <p:nvSpPr>
+          <p:cNvPr id="2" name="Title 1">
+            <a:extLst>
+              <a:ext uri="{FF2B5EF4-FFF2-40B4-BE49-F238E27FC236}">
+                <a16:creationId xmlns:a16="http://schemas.microsoft.com/office/drawing/2014/main" id="{3370EB8B-8CA0-5240-D4E8-2F73AE16798F}"/>
+              </a:ext>
+            </a:extLst>
+          </p:cNvPr>
+          <p:cNvSpPr>
+            <a:spLocks noGrp="1"/>
+          </p:cNvSpPr>
+          <p:nvPr>
+            <p:ph type="title"/>
+          </p:nvPr>
+        </p:nvSpPr>
+        <p:spPr/>
+        <p:txBody>
+          <a:bodyPr/>
+          <a:lstStyle/>
+          <a:p>
+            <a:r>
+              <a:rPr lang="en-US" dirty="0"/>
+              <a:t>Scatter Plots are Simple!</a:t>
+            </a:r>
+          </a:p>
+        </p:txBody>
+      </p:sp>
+      <p:sp>
+        <p:nvSpPr>
+          <p:cNvPr id="3" name="Content Placeholder 2">
+            <a:extLst>
+              <a:ext uri="{FF2B5EF4-FFF2-40B4-BE49-F238E27FC236}">
+                <a16:creationId xmlns:a16="http://schemas.microsoft.com/office/drawing/2014/main" id="{25C274CA-B5A2-0141-A4EB-F6B67297F4BD}"/>
+              </a:ext>
+            </a:extLst>
+          </p:cNvPr>
+          <p:cNvSpPr>
+            <a:spLocks noGrp="1"/>
+          </p:cNvSpPr>
+          <p:nvPr>
+            <p:ph idx="1"/>
+          </p:nvPr>
+        </p:nvSpPr>
+        <p:spPr>
+          <a:xfrm>
+            <a:off x="1451579" y="2015732"/>
+            <a:ext cx="6533827" cy="3952102"/>
+          </a:xfrm>
+        </p:spPr>
+        <p:txBody>
+          <a:bodyPr/>
+          <a:lstStyle/>
+          <a:p>
+            <a:r>
+              <a:rPr lang="en-US" dirty="0"/>
+              <a:t>Scatter plots are very simple, yet powerful. </a:t>
+            </a:r>
+          </a:p>
+          <a:p>
+            <a:r>
+              <a:rPr lang="en-US" dirty="0"/>
+              <a:t>Generally, we just use quadrant 1. </a:t>
+            </a:r>
+          </a:p>
+          <a:p>
+            <a:r>
+              <a:rPr lang="en-US" dirty="0"/>
+              <a:t>Require two numeric measures. </a:t>
+            </a:r>
+          </a:p>
+          <a:p>
+            <a:pPr lvl="1"/>
+            <a:r>
+              <a:rPr lang="en-US" dirty="0"/>
+              <a:t>One is X, one is Y. (Whatever you pick maps to these). </a:t>
+            </a:r>
+          </a:p>
+          <a:p>
+            <a:pPr lvl="1"/>
+            <a:r>
+              <a:rPr lang="en-US" dirty="0"/>
+              <a:t>Think – if one is categorical, what is the result?</a:t>
+            </a:r>
+          </a:p>
+          <a:p>
+            <a:r>
+              <a:rPr lang="en-US" dirty="0"/>
+              <a:t>Can show relationships between variables. </a:t>
+            </a:r>
+          </a:p>
+          <a:p>
+            <a:r>
+              <a:rPr lang="en-US" dirty="0"/>
+              <a:t>Basis of predictive analytics – linear regression (best fit). </a:t>
+            </a:r>
+          </a:p>
+        </p:txBody>
+      </p:sp>
+      <p:pic>
+        <p:nvPicPr>
+          <p:cNvPr id="1026" name="Picture 2" descr="History of Scatterplots: A Timeline – Information Visualization">
+            <a:extLst>
+              <a:ext uri="{FF2B5EF4-FFF2-40B4-BE49-F238E27FC236}">
+                <a16:creationId xmlns:a16="http://schemas.microsoft.com/office/drawing/2014/main" id="{64570A20-80BC-9FA9-9CF0-EB1E3AF85349}"/>
+              </a:ext>
+            </a:extLst>
+          </p:cNvPr>
+          <p:cNvPicPr>
+            <a:picLocks noChangeAspect="1" noChangeArrowheads="1"/>
+          </p:cNvPicPr>
+          <p:nvPr/>
+        </p:nvPicPr>
+        <p:blipFill>
+          <a:blip r:embed="rId2">
+            <a:extLst>
+              <a:ext uri="{28A0092B-C50C-407E-A947-70E740481C1C}">
+                <a14:useLocalDpi xmlns:a14="http://schemas.microsoft.com/office/drawing/2010/main" val="0"/>
+              </a:ext>
+            </a:extLst>
+          </a:blip>
+          <a:srcRect/>
+          <a:stretch>
+            <a:fillRect/>
+          </a:stretch>
+        </p:blipFill>
+        <p:spPr bwMode="auto">
+          <a:xfrm>
+            <a:off x="7985406" y="2119914"/>
+            <a:ext cx="4206594" cy="3952102"/>
+          </a:xfrm>
+          <a:prstGeom prst="rect">
+            <a:avLst/>
+          </a:prstGeom>
+          <a:noFill/>
+          <a:extLst>
+            <a:ext uri="{909E8E84-426E-40DD-AFC4-6F175D3DCCD1}">
+              <a14:hiddenFill xmlns:a14="http://schemas.microsoft.com/office/drawing/2010/main">
+                <a:solidFill>
+                  <a:srgbClr val="FFFFFF"/>
+                </a:solidFill>
+              </a14:hiddenFill>
+            </a:ext>
+          </a:extLst>
+        </p:spPr>
+      </p:pic>
+    </p:spTree>
+    <p:extLst>
+      <p:ext uri="{BB962C8B-B14F-4D97-AF65-F5344CB8AC3E}">
+        <p14:creationId xmlns:p14="http://schemas.microsoft.com/office/powerpoint/2010/main" val="3602456681"/>
+      </p:ext>
+    </p:extLst>
+  </p:cSld>
+  <p:clrMapOvr>
+    <a:masterClrMapping/>
+  </p:clrMapOvr>
+</p:sld>
+</file>
+
+<file path=ppt/slides/slide12.xml><?xml version="1.0" encoding="utf-8"?>
+<p:sld xmlns:a="http://schemas.openxmlformats.org/drawingml/2006/main" xmlns:r="http://schemas.openxmlformats.org/officeDocument/2006/relationships" xmlns:p="http://schemas.openxmlformats.org/presentationml/2006/main">
+  <p:cSld>
+    <p:spTree>
+      <p:nvGrpSpPr>
+        <p:cNvPr id="1" name=""/>
+        <p:cNvGrpSpPr/>
+        <p:nvPr/>
+      </p:nvGrpSpPr>
+      <p:grpSpPr>
+        <a:xfrm>
+          <a:off x="0" y="0"/>
+          <a:ext cx="0" cy="0"/>
+          <a:chOff x="0" y="0"/>
+          <a:chExt cx="0" cy="0"/>
+        </a:xfrm>
+      </p:grpSpPr>
+      <p:sp>
+        <p:nvSpPr>
+          <p:cNvPr id="2" name="Title 1">
+            <a:extLst>
+              <a:ext uri="{FF2B5EF4-FFF2-40B4-BE49-F238E27FC236}">
+                <a16:creationId xmlns:a16="http://schemas.microsoft.com/office/drawing/2014/main" id="{C0732F91-0526-1606-584D-0DE7C75F7F50}"/>
+              </a:ext>
+            </a:extLst>
+          </p:cNvPr>
+          <p:cNvSpPr>
+            <a:spLocks noGrp="1"/>
+          </p:cNvSpPr>
+          <p:nvPr>
+            <p:ph type="title"/>
+          </p:nvPr>
+        </p:nvSpPr>
+        <p:spPr/>
+        <p:txBody>
+          <a:bodyPr/>
+          <a:lstStyle/>
+          <a:p>
+            <a:r>
+              <a:rPr lang="en-US" dirty="0"/>
+              <a:t>Using Coordinate Planes</a:t>
+            </a:r>
+          </a:p>
+        </p:txBody>
+      </p:sp>
+      <p:sp>
+        <p:nvSpPr>
+          <p:cNvPr id="3" name="Content Placeholder 2">
+            <a:extLst>
+              <a:ext uri="{FF2B5EF4-FFF2-40B4-BE49-F238E27FC236}">
+                <a16:creationId xmlns:a16="http://schemas.microsoft.com/office/drawing/2014/main" id="{BAB8E0A5-6884-3608-1957-1D9CCBD30B93}"/>
+              </a:ext>
+            </a:extLst>
+          </p:cNvPr>
+          <p:cNvSpPr>
+            <a:spLocks noGrp="1"/>
+          </p:cNvSpPr>
+          <p:nvPr>
+            <p:ph idx="1"/>
+          </p:nvPr>
+        </p:nvSpPr>
+        <p:spPr>
+          <a:xfrm>
+            <a:off x="1451579" y="1853754"/>
+            <a:ext cx="10088780" cy="4199727"/>
+          </a:xfrm>
+        </p:spPr>
+        <p:txBody>
+          <a:bodyPr>
+            <a:normAutofit/>
+          </a:bodyPr>
+          <a:lstStyle/>
+          <a:p>
+            <a:r>
+              <a:rPr lang="en-US" dirty="0"/>
+              <a:t>Coordinate planes are useful for visualization because we can encode any position. </a:t>
+            </a:r>
+          </a:p>
+          <a:p>
+            <a:pPr lvl="1"/>
+            <a:r>
+              <a:rPr lang="en-US" dirty="0"/>
+              <a:t>I.e. we have a specific number (</a:t>
+            </a:r>
+            <a:r>
+              <a:rPr lang="en-US" dirty="0" err="1"/>
+              <a:t>x,y</a:t>
+            </a:r>
+            <a:r>
+              <a:rPr lang="en-US" dirty="0"/>
+              <a:t>) for any point on the plane. </a:t>
+            </a:r>
+          </a:p>
+          <a:p>
+            <a:pPr lvl="1"/>
+            <a:r>
+              <a:rPr lang="en-US" dirty="0"/>
+              <a:t>We can position things at any point. </a:t>
+            </a:r>
+          </a:p>
+          <a:p>
+            <a:r>
+              <a:rPr lang="en-US" dirty="0"/>
+              <a:t>When plotting, Tableau generates and uses these positions to plot stuff (sometime invisibly). </a:t>
+            </a:r>
+          </a:p>
+          <a:p>
+            <a:pPr lvl="1"/>
+            <a:r>
+              <a:rPr lang="en-US" dirty="0"/>
+              <a:t>E.g. the x (or y) is used with a number to generate the length of bar charts. </a:t>
+            </a:r>
+          </a:p>
+          <a:p>
+            <a:pPr lvl="1"/>
+            <a:r>
+              <a:rPr lang="en-US" dirty="0"/>
+              <a:t>A line chart is a bunch of points, connected. </a:t>
+            </a:r>
+          </a:p>
+          <a:p>
+            <a:r>
+              <a:rPr lang="en-US" dirty="0"/>
+              <a:t>With a coordinate plane as a background, we can create pretty much any chart. </a:t>
+            </a:r>
+          </a:p>
+          <a:p>
+            <a:pPr lvl="1"/>
+            <a:r>
+              <a:rPr lang="en-US" dirty="0"/>
+              <a:t>We are showing values, the plane gives a visual representation of value, we can choose any way to visualize our values on the plane. </a:t>
+            </a:r>
+          </a:p>
+          <a:p>
+            <a:pPr lvl="1"/>
+            <a:r>
+              <a:rPr lang="en-US" dirty="0"/>
+              <a:t>Different chart types or styles just maps the data on the plane differently. </a:t>
+            </a:r>
+          </a:p>
+        </p:txBody>
+      </p:sp>
+    </p:spTree>
+    <p:extLst>
+      <p:ext uri="{BB962C8B-B14F-4D97-AF65-F5344CB8AC3E}">
+        <p14:creationId xmlns:p14="http://schemas.microsoft.com/office/powerpoint/2010/main" val="3994089537"/>
+      </p:ext>
+    </p:extLst>
+  </p:cSld>
+  <p:clrMapOvr>
+    <a:masterClrMapping/>
+  </p:clrMapOvr>
+</p:sld>
+</file>
+
+<file path=ppt/slides/slide13.xml><?xml version="1.0" encoding="utf-8"?>
+<p:sld xmlns:a="http://schemas.openxmlformats.org/drawingml/2006/main" xmlns:r="http://schemas.openxmlformats.org/officeDocument/2006/relationships" xmlns:p="http://schemas.openxmlformats.org/presentationml/2006/main">
+  <p:cSld>
+    <p:spTree>
+      <p:nvGrpSpPr>
+        <p:cNvPr id="1" name=""/>
+        <p:cNvGrpSpPr/>
+        <p:nvPr/>
+      </p:nvGrpSpPr>
+      <p:grpSpPr>
+        <a:xfrm>
+          <a:off x="0" y="0"/>
+          <a:ext cx="0" cy="0"/>
+          <a:chOff x="0" y="0"/>
+          <a:chExt cx="0" cy="0"/>
+        </a:xfrm>
+      </p:grpSpPr>
+      <p:sp>
+        <p:nvSpPr>
+          <p:cNvPr id="2" name="Title 1">
+            <a:extLst>
+              <a:ext uri="{FF2B5EF4-FFF2-40B4-BE49-F238E27FC236}">
+                <a16:creationId xmlns:a16="http://schemas.microsoft.com/office/drawing/2014/main" id="{24E1A9E5-1AE6-A320-EAB0-CEF3DB64634D}"/>
+              </a:ext>
+            </a:extLst>
+          </p:cNvPr>
+          <p:cNvSpPr>
+            <a:spLocks noGrp="1"/>
+          </p:cNvSpPr>
+          <p:nvPr>
+            <p:ph type="title"/>
+          </p:nvPr>
+        </p:nvSpPr>
+        <p:spPr/>
+        <p:txBody>
+          <a:bodyPr/>
+          <a:lstStyle/>
+          <a:p>
+            <a:r>
+              <a:rPr lang="en-US" dirty="0"/>
+              <a:t>the Shelf</a:t>
+            </a:r>
+          </a:p>
+        </p:txBody>
+      </p:sp>
+      <p:sp>
+        <p:nvSpPr>
+          <p:cNvPr id="3" name="Content Placeholder 2">
+            <a:extLst>
+              <a:ext uri="{FF2B5EF4-FFF2-40B4-BE49-F238E27FC236}">
+                <a16:creationId xmlns:a16="http://schemas.microsoft.com/office/drawing/2014/main" id="{AF1BE4D0-A1EE-0717-6AE6-2062EB51C983}"/>
+              </a:ext>
+            </a:extLst>
+          </p:cNvPr>
+          <p:cNvSpPr>
+            <a:spLocks noGrp="1"/>
+          </p:cNvSpPr>
+          <p:nvPr>
+            <p:ph idx="1"/>
+          </p:nvPr>
+        </p:nvSpPr>
+        <p:spPr>
+          <a:xfrm>
+            <a:off x="1451579" y="1853754"/>
+            <a:ext cx="9603275" cy="1919593"/>
+          </a:xfrm>
+        </p:spPr>
+        <p:txBody>
+          <a:bodyPr/>
+          <a:lstStyle/>
+          <a:p>
+            <a:r>
+              <a:rPr lang="en-US" dirty="0"/>
+              <a:t>Whatever is in the shelf will be mapped to the x and y axis. </a:t>
+            </a:r>
+          </a:p>
+          <a:p>
+            <a:pPr lvl="1"/>
+            <a:r>
+              <a:rPr lang="en-US" dirty="0"/>
+              <a:t>Columns will be the X axis. If there’s an independent variable, it should probably be here. </a:t>
+            </a:r>
+          </a:p>
+          <a:p>
+            <a:pPr lvl="1"/>
+            <a:r>
+              <a:rPr lang="en-US" dirty="0"/>
+              <a:t>Rows will be in the Y axis. </a:t>
+            </a:r>
+          </a:p>
+          <a:p>
+            <a:r>
+              <a:rPr lang="en-US" dirty="0"/>
+              <a:t>Other charts are similar – things are scaled (num) or grouped </a:t>
+            </a:r>
+            <a:r>
+              <a:rPr lang="en-US"/>
+              <a:t>(cat) along </a:t>
+            </a:r>
+            <a:r>
+              <a:rPr lang="en-US" dirty="0"/>
+              <a:t>that axis. </a:t>
+            </a:r>
+          </a:p>
+        </p:txBody>
+      </p:sp>
+      <p:pic>
+        <p:nvPicPr>
+          <p:cNvPr id="4" name="Picture 3">
+            <a:extLst>
+              <a:ext uri="{FF2B5EF4-FFF2-40B4-BE49-F238E27FC236}">
+                <a16:creationId xmlns:a16="http://schemas.microsoft.com/office/drawing/2014/main" id="{6CCE23EA-ABAD-5D8A-01B5-464777919D45}"/>
+              </a:ext>
+            </a:extLst>
+          </p:cNvPr>
+          <p:cNvPicPr>
+            <a:picLocks noChangeAspect="1"/>
+          </p:cNvPicPr>
+          <p:nvPr/>
+        </p:nvPicPr>
+        <p:blipFill>
+          <a:blip r:embed="rId2"/>
+          <a:stretch>
+            <a:fillRect/>
+          </a:stretch>
+        </p:blipFill>
+        <p:spPr>
+          <a:xfrm>
+            <a:off x="6419354" y="181417"/>
+            <a:ext cx="4635500" cy="1587500"/>
+          </a:xfrm>
+          <a:prstGeom prst="rect">
+            <a:avLst/>
+          </a:prstGeom>
+        </p:spPr>
+      </p:pic>
+      <p:pic>
+        <p:nvPicPr>
+          <p:cNvPr id="3076" name="Picture 4" descr="how to make a scatter plot in Excel — storytelling with data">
+            <a:extLst>
+              <a:ext uri="{FF2B5EF4-FFF2-40B4-BE49-F238E27FC236}">
+                <a16:creationId xmlns:a16="http://schemas.microsoft.com/office/drawing/2014/main" id="{3E7F5CEC-83DC-0F64-B198-E20399198E67}"/>
+              </a:ext>
+            </a:extLst>
+          </p:cNvPr>
+          <p:cNvPicPr>
+            <a:picLocks noChangeAspect="1" noChangeArrowheads="1"/>
+          </p:cNvPicPr>
+          <p:nvPr/>
+        </p:nvPicPr>
+        <p:blipFill>
+          <a:blip r:embed="rId3">
+            <a:extLst>
+              <a:ext uri="{28A0092B-C50C-407E-A947-70E740481C1C}">
+                <a14:useLocalDpi xmlns:a14="http://schemas.microsoft.com/office/drawing/2010/main" val="0"/>
+              </a:ext>
+            </a:extLst>
+          </a:blip>
+          <a:srcRect/>
+          <a:stretch>
+            <a:fillRect/>
+          </a:stretch>
+        </p:blipFill>
+        <p:spPr bwMode="auto">
+          <a:xfrm>
+            <a:off x="717631" y="3607483"/>
+            <a:ext cx="3808070" cy="3250517"/>
+          </a:xfrm>
+          <a:prstGeom prst="rect">
+            <a:avLst/>
+          </a:prstGeom>
+          <a:noFill/>
+          <a:extLst>
+            <a:ext uri="{909E8E84-426E-40DD-AFC4-6F175D3DCCD1}">
+              <a14:hiddenFill xmlns:a14="http://schemas.microsoft.com/office/drawing/2010/main">
+                <a:solidFill>
+                  <a:srgbClr val="FFFFFF"/>
+                </a:solidFill>
+              </a14:hiddenFill>
+            </a:ext>
+          </a:extLst>
+        </p:spPr>
+      </p:pic>
+      <p:pic>
+        <p:nvPicPr>
+          <p:cNvPr id="3078" name="Picture 6" descr="Bar Charts — The Tableau Student Guide">
+            <a:extLst>
+              <a:ext uri="{FF2B5EF4-FFF2-40B4-BE49-F238E27FC236}">
+                <a16:creationId xmlns:a16="http://schemas.microsoft.com/office/drawing/2014/main" id="{2352B738-6381-39BF-0544-1856FC326AA4}"/>
+              </a:ext>
+            </a:extLst>
+          </p:cNvPr>
+          <p:cNvPicPr>
+            <a:picLocks noChangeAspect="1" noChangeArrowheads="1"/>
+          </p:cNvPicPr>
+          <p:nvPr/>
+        </p:nvPicPr>
+        <p:blipFill rotWithShape="1">
+          <a:blip r:embed="rId4">
+            <a:extLst>
+              <a:ext uri="{28A0092B-C50C-407E-A947-70E740481C1C}">
+                <a14:useLocalDpi xmlns:a14="http://schemas.microsoft.com/office/drawing/2010/main" val="0"/>
+              </a:ext>
+            </a:extLst>
+          </a:blip>
+          <a:srcRect l="29335" t="9520" r="13671" b="19338"/>
+          <a:stretch>
+            <a:fillRect/>
+          </a:stretch>
+        </p:blipFill>
+        <p:spPr bwMode="auto">
+          <a:xfrm>
+            <a:off x="5551253" y="3679260"/>
+            <a:ext cx="4788800" cy="3178740"/>
+          </a:xfrm>
+          <a:prstGeom prst="rect">
+            <a:avLst/>
+          </a:prstGeom>
+          <a:noFill/>
+          <a:extLst>
+            <a:ext uri="{909E8E84-426E-40DD-AFC4-6F175D3DCCD1}">
+              <a14:hiddenFill xmlns:a14="http://schemas.microsoft.com/office/drawing/2010/main">
+                <a:solidFill>
+                  <a:srgbClr val="FFFFFF"/>
+                </a:solidFill>
+              </a14:hiddenFill>
+            </a:ext>
+          </a:extLst>
+        </p:spPr>
+      </p:pic>
+    </p:spTree>
+    <p:extLst>
+      <p:ext uri="{BB962C8B-B14F-4D97-AF65-F5344CB8AC3E}">
+        <p14:creationId xmlns:p14="http://schemas.microsoft.com/office/powerpoint/2010/main" val="4094586263"/>
+      </p:ext>
+    </p:extLst>
+  </p:cSld>
+  <p:clrMapOvr>
+    <a:masterClrMapping/>
+  </p:clrMapOvr>
+</p:sld>
+</file>
+
+<file path=ppt/slides/slide14.xml><?xml version="1.0" encoding="utf-8"?>
+<p:sld xmlns:a="http://schemas.openxmlformats.org/drawingml/2006/main" xmlns:r="http://schemas.openxmlformats.org/officeDocument/2006/relationships" xmlns:p="http://schemas.openxmlformats.org/presentationml/2006/main">
+  <p:cSld>
+    <p:spTree>
+      <p:nvGrpSpPr>
+        <p:cNvPr id="1" name=""/>
+        <p:cNvGrpSpPr/>
+        <p:nvPr/>
+      </p:nvGrpSpPr>
+      <p:grpSpPr>
+        <a:xfrm>
+          <a:off x="0" y="0"/>
+          <a:ext cx="0" cy="0"/>
+          <a:chOff x="0" y="0"/>
+          <a:chExt cx="0" cy="0"/>
+        </a:xfrm>
+      </p:grpSpPr>
+      <p:sp>
+        <p:nvSpPr>
+          <p:cNvPr id="2" name="Title 1">
+            <a:extLst>
+              <a:ext uri="{FF2B5EF4-FFF2-40B4-BE49-F238E27FC236}">
+                <a16:creationId xmlns:a16="http://schemas.microsoft.com/office/drawing/2014/main" id="{E134463A-9079-2CB6-84B0-9BA8D293160D}"/>
+              </a:ext>
+            </a:extLst>
+          </p:cNvPr>
+          <p:cNvSpPr>
+            <a:spLocks noGrp="1"/>
+          </p:cNvSpPr>
+          <p:nvPr>
+            <p:ph type="title"/>
+          </p:nvPr>
+        </p:nvSpPr>
+        <p:spPr/>
+        <p:txBody>
+          <a:bodyPr/>
+          <a:lstStyle/>
+          <a:p>
+            <a:r>
+              <a:rPr lang="en-US" dirty="0"/>
+              <a:t>Coordinate planes Behind the Scenes</a:t>
+            </a:r>
+          </a:p>
+        </p:txBody>
+      </p:sp>
+      <p:sp>
+        <p:nvSpPr>
+          <p:cNvPr id="3" name="Content Placeholder 2">
+            <a:extLst>
+              <a:ext uri="{FF2B5EF4-FFF2-40B4-BE49-F238E27FC236}">
+                <a16:creationId xmlns:a16="http://schemas.microsoft.com/office/drawing/2014/main" id="{8216F9EE-F4DF-747F-C7CA-A3C5591E8695}"/>
+              </a:ext>
+            </a:extLst>
+          </p:cNvPr>
+          <p:cNvSpPr>
+            <a:spLocks noGrp="1"/>
+          </p:cNvSpPr>
+          <p:nvPr>
+            <p:ph idx="1"/>
+          </p:nvPr>
+        </p:nvSpPr>
+        <p:spPr>
+          <a:xfrm>
+            <a:off x="8588670" y="1933903"/>
+            <a:ext cx="3487716" cy="4119577"/>
+          </a:xfrm>
+        </p:spPr>
+        <p:txBody>
+          <a:bodyPr/>
+          <a:lstStyle/>
+          <a:p>
+            <a:r>
+              <a:rPr lang="en-US" dirty="0"/>
+              <a:t>We can sometimes layer charts on top of each other. </a:t>
+            </a:r>
+          </a:p>
+          <a:p>
+            <a:r>
+              <a:rPr lang="en-US" dirty="0"/>
+              <a:t>The coord. Plane is the same, just reused to draw more than one chart. </a:t>
+            </a:r>
+          </a:p>
+        </p:txBody>
+      </p:sp>
+      <p:pic>
+        <p:nvPicPr>
+          <p:cNvPr id="6146" name="Picture 2" descr="Bar and line graph in Excel | Excelchat">
+            <a:extLst>
+              <a:ext uri="{FF2B5EF4-FFF2-40B4-BE49-F238E27FC236}">
+                <a16:creationId xmlns:a16="http://schemas.microsoft.com/office/drawing/2014/main" id="{16B74DE3-6A5B-FA63-EE36-F26EAC651DA5}"/>
+              </a:ext>
+            </a:extLst>
+          </p:cNvPr>
+          <p:cNvPicPr>
+            <a:picLocks noChangeAspect="1" noChangeArrowheads="1"/>
+          </p:cNvPicPr>
+          <p:nvPr/>
+        </p:nvPicPr>
+        <p:blipFill>
+          <a:blip r:embed="rId2">
+            <a:extLst>
+              <a:ext uri="{28A0092B-C50C-407E-A947-70E740481C1C}">
+                <a14:useLocalDpi xmlns:a14="http://schemas.microsoft.com/office/drawing/2010/main" val="0"/>
+              </a:ext>
+            </a:extLst>
+          </a:blip>
+          <a:srcRect/>
+          <a:stretch>
+            <a:fillRect/>
+          </a:stretch>
+        </p:blipFill>
+        <p:spPr bwMode="auto">
+          <a:xfrm>
+            <a:off x="0" y="1760743"/>
+            <a:ext cx="8588670" cy="5097257"/>
+          </a:xfrm>
+          <a:prstGeom prst="rect">
+            <a:avLst/>
+          </a:prstGeom>
+          <a:noFill/>
+          <a:extLst>
+            <a:ext uri="{909E8E84-426E-40DD-AFC4-6F175D3DCCD1}">
+              <a14:hiddenFill xmlns:a14="http://schemas.microsoft.com/office/drawing/2010/main">
+                <a:solidFill>
+                  <a:srgbClr val="FFFFFF"/>
+                </a:solidFill>
+              </a14:hiddenFill>
+            </a:ext>
+          </a:extLst>
+        </p:spPr>
+      </p:pic>
+    </p:spTree>
+    <p:extLst>
+      <p:ext uri="{BB962C8B-B14F-4D97-AF65-F5344CB8AC3E}">
+        <p14:creationId xmlns:p14="http://schemas.microsoft.com/office/powerpoint/2010/main" val="3263342710"/>
+      </p:ext>
+    </p:extLst>
+  </p:cSld>
+  <p:clrMapOvr>
+    <a:masterClrMapping/>
+  </p:clrMapOvr>
+</p:sld>
+</file>
+
+<file path=ppt/slides/slide15.xml><?xml version="1.0" encoding="utf-8"?>
+<p:sld xmlns:a="http://schemas.openxmlformats.org/drawingml/2006/main" xmlns:r="http://schemas.openxmlformats.org/officeDocument/2006/relationships" xmlns:p="http://schemas.openxmlformats.org/presentationml/2006/main" show="0">
+  <p:cSld>
+    <p:bg>
+      <p:bgPr>
+        <a:gradFill rotWithShape="1">
+          <a:gsLst>
+            <a:gs pos="0">
+              <a:schemeClr val="bg2">
+                <a:tint val="94000"/>
+                <a:satMod val="80000"/>
+                <a:lumMod val="106000"/>
+              </a:schemeClr>
+            </a:gs>
+            <a:gs pos="100000">
+              <a:schemeClr val="bg2">
+                <a:shade val="80000"/>
+              </a:schemeClr>
+            </a:gs>
+          </a:gsLst>
+          <a:path path="circle">
+            <a:fillToRect l="43000" r="43000" b="100000"/>
+          </a:path>
+        </a:gradFill>
+        <a:effectLst/>
+      </p:bgPr>
+    </p:bg>
+    <p:spTree>
+      <p:nvGrpSpPr>
+        <p:cNvPr id="1" name=""/>
+        <p:cNvGrpSpPr/>
+        <p:nvPr/>
+      </p:nvGrpSpPr>
+      <p:grpSpPr>
+        <a:xfrm>
+          <a:off x="0" y="0"/>
+          <a:ext cx="0" cy="0"/>
+          <a:chOff x="0" y="0"/>
+          <a:chExt cx="0" cy="0"/>
+        </a:xfrm>
+      </p:grpSpPr>
+      <p:sp>
+        <p:nvSpPr>
+          <p:cNvPr id="2" name="Title 1">
+            <a:extLst>
+              <a:ext uri="{FF2B5EF4-FFF2-40B4-BE49-F238E27FC236}">
                 <a16:creationId xmlns:a16="http://schemas.microsoft.com/office/drawing/2014/main" id="{3A32D259-6020-07B0-6700-49F92D7854B1}"/>
               </a:ext>
             </a:extLst>
@@ -4504,7 +5295,7 @@
 </p:sld>
 </file>
 
-<file path=ppt/slides/slide14.xml><?xml version="1.0" encoding="utf-8"?>
+<file path=ppt/slides/slide16.xml><?xml version="1.0" encoding="utf-8"?>
 <p:sld xmlns:a="http://schemas.openxmlformats.org/drawingml/2006/main" xmlns:r="http://schemas.openxmlformats.org/officeDocument/2006/relationships" xmlns:p="http://schemas.openxmlformats.org/presentationml/2006/main" show="0">
   <p:cSld>
     <p:spTree>
@@ -4631,8 +5422,8 @@
 </p:sld>
 </file>
 
-<file path=ppt/slides/slide15.xml><?xml version="1.0" encoding="utf-8"?>
-<p:sld xmlns:a="http://schemas.openxmlformats.org/drawingml/2006/main" xmlns:r="http://schemas.openxmlformats.org/officeDocument/2006/relationships" xmlns:p="http://schemas.openxmlformats.org/presentationml/2006/main">
+<file path=ppt/slides/slide17.xml><?xml version="1.0" encoding="utf-8"?>
+<p:sld xmlns:a="http://schemas.openxmlformats.org/drawingml/2006/main" xmlns:r="http://schemas.openxmlformats.org/officeDocument/2006/relationships" xmlns:p="http://schemas.openxmlformats.org/presentationml/2006/main" show="0">
   <p:cSld>
     <p:spTree>
       <p:nvGrpSpPr>
@@ -4766,8 +5557,8 @@
 </p:sld>
 </file>
 
-<file path=ppt/slides/slide16.xml><?xml version="1.0" encoding="utf-8"?>
-<p:sld xmlns:a="http://schemas.openxmlformats.org/drawingml/2006/main" xmlns:r="http://schemas.openxmlformats.org/officeDocument/2006/relationships" xmlns:p="http://schemas.openxmlformats.org/presentationml/2006/main">
+<file path=ppt/slides/slide18.xml><?xml version="1.0" encoding="utf-8"?>
+<p:sld xmlns:a="http://schemas.openxmlformats.org/drawingml/2006/main" xmlns:r="http://schemas.openxmlformats.org/officeDocument/2006/relationships" xmlns:p="http://schemas.openxmlformats.org/presentationml/2006/main" show="0">
   <p:cSld>
     <p:spTree>
       <p:nvGrpSpPr>
@@ -4901,7 +5692,173 @@
 </p:sld>
 </file>
 
-<file path=ppt/slides/slide17.xml><?xml version="1.0" encoding="utf-8"?>
+<file path=ppt/slides/slide19.xml><?xml version="1.0" encoding="utf-8"?>
+<p:sld xmlns:a="http://schemas.openxmlformats.org/drawingml/2006/main" xmlns:r="http://schemas.openxmlformats.org/officeDocument/2006/relationships" xmlns:p="http://schemas.openxmlformats.org/presentationml/2006/main">
+  <p:cSld>
+    <p:spTree>
+      <p:nvGrpSpPr>
+        <p:cNvPr id="1" name=""/>
+        <p:cNvGrpSpPr/>
+        <p:nvPr/>
+      </p:nvGrpSpPr>
+      <p:grpSpPr>
+        <a:xfrm>
+          <a:off x="0" y="0"/>
+          <a:ext cx="0" cy="0"/>
+          <a:chOff x="0" y="0"/>
+          <a:chExt cx="0" cy="0"/>
+        </a:xfrm>
+      </p:grpSpPr>
+      <p:sp>
+        <p:nvSpPr>
+          <p:cNvPr id="2" name="Title 1">
+            <a:extLst>
+              <a:ext uri="{FF2B5EF4-FFF2-40B4-BE49-F238E27FC236}">
+                <a16:creationId xmlns:a16="http://schemas.microsoft.com/office/drawing/2014/main" id="{0139A253-561D-4728-E66A-00FD1F500DCD}"/>
+              </a:ext>
+            </a:extLst>
+          </p:cNvPr>
+          <p:cNvSpPr>
+            <a:spLocks noGrp="1"/>
+          </p:cNvSpPr>
+          <p:nvPr>
+            <p:ph type="title"/>
+          </p:nvPr>
+        </p:nvSpPr>
+        <p:spPr/>
+        <p:txBody>
+          <a:bodyPr/>
+          <a:lstStyle/>
+          <a:p>
+            <a:r>
+              <a:rPr lang="en-US" dirty="0"/>
+              <a:t>Non Scatter Plot Plane uses</a:t>
+            </a:r>
+          </a:p>
+        </p:txBody>
+      </p:sp>
+      <p:sp>
+        <p:nvSpPr>
+          <p:cNvPr id="3" name="Content Placeholder 2">
+            <a:extLst>
+              <a:ext uri="{FF2B5EF4-FFF2-40B4-BE49-F238E27FC236}">
+                <a16:creationId xmlns:a16="http://schemas.microsoft.com/office/drawing/2014/main" id="{36DC037D-BCFE-7AC9-B229-9A5C8E8EF6E7}"/>
+              </a:ext>
+            </a:extLst>
+          </p:cNvPr>
+          <p:cNvSpPr>
+            <a:spLocks noGrp="1"/>
+          </p:cNvSpPr>
+          <p:nvPr>
+            <p:ph idx="1"/>
+          </p:nvPr>
+        </p:nvSpPr>
+        <p:spPr/>
+        <p:txBody>
+          <a:bodyPr/>
+          <a:lstStyle/>
+          <a:p>
+            <a:endParaRPr lang="en-US"/>
+          </a:p>
+        </p:txBody>
+      </p:sp>
+    </p:spTree>
+    <p:extLst>
+      <p:ext uri="{BB962C8B-B14F-4D97-AF65-F5344CB8AC3E}">
+        <p14:creationId xmlns:p14="http://schemas.microsoft.com/office/powerpoint/2010/main" val="3368224786"/>
+      </p:ext>
+    </p:extLst>
+  </p:cSld>
+  <p:clrMapOvr>
+    <a:masterClrMapping/>
+  </p:clrMapOvr>
+</p:sld>
+</file>
+
+<file path=ppt/slides/slide2.xml><?xml version="1.0" encoding="utf-8"?>
+<p:sld xmlns:a="http://schemas.openxmlformats.org/drawingml/2006/main" xmlns:r="http://schemas.openxmlformats.org/officeDocument/2006/relationships" xmlns:p="http://schemas.openxmlformats.org/presentationml/2006/main">
+  <p:cSld>
+    <p:spTree>
+      <p:nvGrpSpPr>
+        <p:cNvPr id="1" name=""/>
+        <p:cNvGrpSpPr/>
+        <p:nvPr/>
+      </p:nvGrpSpPr>
+      <p:grpSpPr>
+        <a:xfrm>
+          <a:off x="0" y="0"/>
+          <a:ext cx="0" cy="0"/>
+          <a:chOff x="0" y="0"/>
+          <a:chExt cx="0" cy="0"/>
+        </a:xfrm>
+      </p:grpSpPr>
+      <p:sp>
+        <p:nvSpPr>
+          <p:cNvPr id="2" name="Title 1">
+            <a:extLst>
+              <a:ext uri="{FF2B5EF4-FFF2-40B4-BE49-F238E27FC236}">
+                <a16:creationId xmlns:a16="http://schemas.microsoft.com/office/drawing/2014/main" id="{00EBD5C1-6153-57DF-62BD-0312F52DA2CC}"/>
+              </a:ext>
+            </a:extLst>
+          </p:cNvPr>
+          <p:cNvSpPr>
+            <a:spLocks noGrp="1"/>
+          </p:cNvSpPr>
+          <p:nvPr>
+            <p:ph type="ctrTitle"/>
+          </p:nvPr>
+        </p:nvSpPr>
+        <p:spPr/>
+        <p:txBody>
+          <a:bodyPr/>
+          <a:lstStyle/>
+          <a:p>
+            <a:r>
+              <a:rPr lang="en-US" dirty="0"/>
+              <a:t>Coordinate Systems and Axes</a:t>
+            </a:r>
+          </a:p>
+        </p:txBody>
+      </p:sp>
+      <p:sp>
+        <p:nvSpPr>
+          <p:cNvPr id="3" name="Subtitle 2">
+            <a:extLst>
+              <a:ext uri="{FF2B5EF4-FFF2-40B4-BE49-F238E27FC236}">
+                <a16:creationId xmlns:a16="http://schemas.microsoft.com/office/drawing/2014/main" id="{76F370B5-F879-F8C0-56BA-2555EF993B23}"/>
+              </a:ext>
+            </a:extLst>
+          </p:cNvPr>
+          <p:cNvSpPr>
+            <a:spLocks noGrp="1"/>
+          </p:cNvSpPr>
+          <p:nvPr>
+            <p:ph type="subTitle" idx="1"/>
+          </p:nvPr>
+        </p:nvSpPr>
+        <p:spPr/>
+        <p:txBody>
+          <a:bodyPr/>
+          <a:lstStyle/>
+          <a:p>
+            <a:endParaRPr lang="en-US"/>
+          </a:p>
+        </p:txBody>
+      </p:sp>
+    </p:spTree>
+    <p:extLst>
+      <p:ext uri="{BB962C8B-B14F-4D97-AF65-F5344CB8AC3E}">
+        <p14:creationId xmlns:p14="http://schemas.microsoft.com/office/powerpoint/2010/main" val="2883178912"/>
+      </p:ext>
+    </p:extLst>
+  </p:cSld>
+  <p:clrMapOvr>
+    <a:masterClrMapping/>
+  </p:clrMapOvr>
+</p:sld>
+</file>
+
+<file path=ppt/slides/slide20.xml><?xml version="1.0" encoding="utf-8"?>
 <p:sld xmlns:a="http://schemas.openxmlformats.org/drawingml/2006/main" xmlns:r="http://schemas.openxmlformats.org/officeDocument/2006/relationships" xmlns:p="http://schemas.openxmlformats.org/presentationml/2006/main">
   <p:cSld>
     <p:bg>
@@ -5129,7 +6086,7 @@
 </p:sld>
 </file>
 
-<file path=ppt/slides/slide18.xml><?xml version="1.0" encoding="utf-8"?>
+<file path=ppt/slides/slide21.xml><?xml version="1.0" encoding="utf-8"?>
 <p:sld xmlns:a="http://schemas.openxmlformats.org/drawingml/2006/main" xmlns:r="http://schemas.openxmlformats.org/officeDocument/2006/relationships" xmlns:p="http://schemas.openxmlformats.org/presentationml/2006/main">
   <p:cSld>
     <p:spTree>
@@ -5325,7 +6282,7 @@
 </p:sld>
 </file>
 
-<file path=ppt/slides/slide19.xml><?xml version="1.0" encoding="utf-8"?>
+<file path=ppt/slides/slide22.xml><?xml version="1.0" encoding="utf-8"?>
 <p:sld xmlns:a="http://schemas.openxmlformats.org/drawingml/2006/main" xmlns:r="http://schemas.openxmlformats.org/officeDocument/2006/relationships" xmlns:p="http://schemas.openxmlformats.org/presentationml/2006/main">
   <p:cSld>
     <p:spTree>
@@ -5524,8 +6481,976 @@
 </p:sld>
 </file>
 
-<file path=ppt/slides/slide2.xml><?xml version="1.0" encoding="utf-8"?>
+<file path=ppt/slides/slide23.xml><?xml version="1.0" encoding="utf-8"?>
 <p:sld xmlns:a="http://schemas.openxmlformats.org/drawingml/2006/main" xmlns:r="http://schemas.openxmlformats.org/officeDocument/2006/relationships" xmlns:p="http://schemas.openxmlformats.org/presentationml/2006/main">
+  <p:cSld>
+    <p:spTree>
+      <p:nvGrpSpPr>
+        <p:cNvPr id="1" name=""/>
+        <p:cNvGrpSpPr/>
+        <p:nvPr/>
+      </p:nvGrpSpPr>
+      <p:grpSpPr>
+        <a:xfrm>
+          <a:off x="0" y="0"/>
+          <a:ext cx="0" cy="0"/>
+          <a:chOff x="0" y="0"/>
+          <a:chExt cx="0" cy="0"/>
+        </a:xfrm>
+      </p:grpSpPr>
+      <p:sp>
+        <p:nvSpPr>
+          <p:cNvPr id="2" name="Title 1">
+            <a:extLst>
+              <a:ext uri="{FF2B5EF4-FFF2-40B4-BE49-F238E27FC236}">
+                <a16:creationId xmlns:a16="http://schemas.microsoft.com/office/drawing/2014/main" id="{41EC2875-91C7-D1F9-C439-7F97C4520B40}"/>
+              </a:ext>
+            </a:extLst>
+          </p:cNvPr>
+          <p:cNvSpPr>
+            <a:spLocks noGrp="1"/>
+          </p:cNvSpPr>
+          <p:nvPr>
+            <p:ph type="title"/>
+          </p:nvPr>
+        </p:nvSpPr>
+        <p:spPr/>
+        <p:txBody>
+          <a:bodyPr/>
+          <a:lstStyle/>
+          <a:p>
+            <a:r>
+              <a:rPr lang="en-US" dirty="0"/>
+              <a:t>Example – Parliament Chart</a:t>
+            </a:r>
+          </a:p>
+        </p:txBody>
+      </p:sp>
+      <p:sp>
+        <p:nvSpPr>
+          <p:cNvPr id="3" name="Content Placeholder 2">
+            <a:extLst>
+              <a:ext uri="{FF2B5EF4-FFF2-40B4-BE49-F238E27FC236}">
+                <a16:creationId xmlns:a16="http://schemas.microsoft.com/office/drawing/2014/main" id="{59E27ED1-3DF7-6400-B163-2F81FB7598D1}"/>
+              </a:ext>
+            </a:extLst>
+          </p:cNvPr>
+          <p:cNvSpPr>
+            <a:spLocks noGrp="1"/>
+          </p:cNvSpPr>
+          <p:nvPr>
+            <p:ph idx="1"/>
+          </p:nvPr>
+        </p:nvSpPr>
+        <p:spPr>
+          <a:xfrm>
+            <a:off x="1" y="1853754"/>
+            <a:ext cx="7164370" cy="4199727"/>
+          </a:xfrm>
+        </p:spPr>
+        <p:txBody>
+          <a:bodyPr>
+            <a:normAutofit/>
+          </a:bodyPr>
+          <a:lstStyle/>
+          <a:p>
+            <a:r>
+              <a:rPr lang="en-US" dirty="0"/>
+              <a:t>Each block is one mark, and it has an x and y coordinate set. </a:t>
+            </a:r>
+          </a:p>
+          <a:p>
+            <a:pPr lvl="1"/>
+            <a:r>
+              <a:rPr lang="en-US" dirty="0"/>
+              <a:t>Each mark is one representative in parliament in this case. </a:t>
+            </a:r>
+          </a:p>
+          <a:p>
+            <a:r>
+              <a:rPr lang="en-US" dirty="0"/>
+              <a:t>X and y are transformed through trig to create new x and y. </a:t>
+            </a:r>
+          </a:p>
+          <a:p>
+            <a:pPr lvl="1"/>
+            <a:r>
+              <a:rPr lang="en-US" dirty="0"/>
+              <a:t>These new values are what are actually plotted. </a:t>
+            </a:r>
+          </a:p>
+          <a:p>
+            <a:pPr lvl="1"/>
+            <a:r>
+              <a:rPr lang="en-US" dirty="0"/>
+              <a:t>These are in a curve due to the trig-ness of the calculation. </a:t>
+            </a:r>
+          </a:p>
+          <a:p>
+            <a:r>
+              <a:rPr lang="en-US" dirty="0"/>
+              <a:t>This type of thing isn’t easy to do off the top of your head. </a:t>
+            </a:r>
+          </a:p>
+          <a:p>
+            <a:pPr lvl="1"/>
+            <a:r>
+              <a:rPr lang="en-US" dirty="0"/>
+              <a:t>May require manual, custom data to be added. </a:t>
+            </a:r>
+          </a:p>
+          <a:p>
+            <a:pPr lvl="1"/>
+            <a:r>
+              <a:rPr lang="en-US" dirty="0"/>
+              <a:t>We can follow guides and adapt to our data. </a:t>
+            </a:r>
+          </a:p>
+          <a:p>
+            <a:pPr lvl="1"/>
+            <a:r>
+              <a:rPr lang="en-US" dirty="0"/>
+              <a:t>Trying to adapt things to yours is a very good way to get good. </a:t>
+            </a:r>
+          </a:p>
+        </p:txBody>
+      </p:sp>
+      <p:pic>
+        <p:nvPicPr>
+          <p:cNvPr id="5122" name="Picture 2" descr="Workbook: Automated Parliament Chart">
+            <a:extLst>
+              <a:ext uri="{FF2B5EF4-FFF2-40B4-BE49-F238E27FC236}">
+                <a16:creationId xmlns:a16="http://schemas.microsoft.com/office/drawing/2014/main" id="{05820A2A-D7A7-D4D3-00D4-88DA7FDA98B0}"/>
+              </a:ext>
+            </a:extLst>
+          </p:cNvPr>
+          <p:cNvPicPr>
+            <a:picLocks noChangeAspect="1" noChangeArrowheads="1"/>
+          </p:cNvPicPr>
+          <p:nvPr/>
+        </p:nvPicPr>
+        <p:blipFill>
+          <a:blip r:embed="rId2">
+            <a:extLst>
+              <a:ext uri="{28A0092B-C50C-407E-A947-70E740481C1C}">
+                <a14:useLocalDpi xmlns:a14="http://schemas.microsoft.com/office/drawing/2010/main" val="0"/>
+              </a:ext>
+            </a:extLst>
+          </a:blip>
+          <a:srcRect/>
+          <a:stretch>
+            <a:fillRect/>
+          </a:stretch>
+        </p:blipFill>
+        <p:spPr bwMode="auto">
+          <a:xfrm>
+            <a:off x="6901042" y="2348913"/>
+            <a:ext cx="5290958" cy="3263716"/>
+          </a:xfrm>
+          <a:prstGeom prst="rect">
+            <a:avLst/>
+          </a:prstGeom>
+          <a:noFill/>
+          <a:extLst>
+            <a:ext uri="{909E8E84-426E-40DD-AFC4-6F175D3DCCD1}">
+              <a14:hiddenFill xmlns:a14="http://schemas.microsoft.com/office/drawing/2010/main">
+                <a:solidFill>
+                  <a:srgbClr val="FFFFFF"/>
+                </a:solidFill>
+              </a14:hiddenFill>
+            </a:ext>
+          </a:extLst>
+        </p:spPr>
+      </p:pic>
+    </p:spTree>
+    <p:extLst>
+      <p:ext uri="{BB962C8B-B14F-4D97-AF65-F5344CB8AC3E}">
+        <p14:creationId xmlns:p14="http://schemas.microsoft.com/office/powerpoint/2010/main" val="3515400123"/>
+      </p:ext>
+    </p:extLst>
+  </p:cSld>
+  <p:clrMapOvr>
+    <a:masterClrMapping/>
+  </p:clrMapOvr>
+</p:sld>
+</file>
+
+<file path=ppt/slides/slide24.xml><?xml version="1.0" encoding="utf-8"?>
+<p:sld xmlns:a="http://schemas.openxmlformats.org/drawingml/2006/main" xmlns:r="http://schemas.openxmlformats.org/officeDocument/2006/relationships" xmlns:p="http://schemas.openxmlformats.org/presentationml/2006/main">
+  <p:cSld>
+    <p:spTree>
+      <p:nvGrpSpPr>
+        <p:cNvPr id="1" name=""/>
+        <p:cNvGrpSpPr/>
+        <p:nvPr/>
+      </p:nvGrpSpPr>
+      <p:grpSpPr>
+        <a:xfrm>
+          <a:off x="0" y="0"/>
+          <a:ext cx="0" cy="0"/>
+          <a:chOff x="0" y="0"/>
+          <a:chExt cx="0" cy="0"/>
+        </a:xfrm>
+      </p:grpSpPr>
+      <p:sp>
+        <p:nvSpPr>
+          <p:cNvPr id="2" name="Title 1">
+            <a:extLst>
+              <a:ext uri="{FF2B5EF4-FFF2-40B4-BE49-F238E27FC236}">
+                <a16:creationId xmlns:a16="http://schemas.microsoft.com/office/drawing/2014/main" id="{D4BC257F-BF74-AAB3-3920-382826CA1641}"/>
+              </a:ext>
+            </a:extLst>
+          </p:cNvPr>
+          <p:cNvSpPr>
+            <a:spLocks noGrp="1"/>
+          </p:cNvSpPr>
+          <p:nvPr>
+            <p:ph type="title"/>
+          </p:nvPr>
+        </p:nvSpPr>
+        <p:spPr/>
+        <p:txBody>
+          <a:bodyPr/>
+          <a:lstStyle/>
+          <a:p>
+            <a:r>
+              <a:rPr lang="en-US" dirty="0"/>
+              <a:t>Chart Axis</a:t>
+            </a:r>
+          </a:p>
+        </p:txBody>
+      </p:sp>
+      <p:sp>
+        <p:nvSpPr>
+          <p:cNvPr id="3" name="Content Placeholder 2">
+            <a:extLst>
+              <a:ext uri="{FF2B5EF4-FFF2-40B4-BE49-F238E27FC236}">
+                <a16:creationId xmlns:a16="http://schemas.microsoft.com/office/drawing/2014/main" id="{7DA5445B-B3E7-3511-B788-88E41AB498DC}"/>
+              </a:ext>
+            </a:extLst>
+          </p:cNvPr>
+          <p:cNvSpPr>
+            <a:spLocks noGrp="1"/>
+          </p:cNvSpPr>
+          <p:nvPr>
+            <p:ph idx="1"/>
+          </p:nvPr>
+        </p:nvSpPr>
+        <p:spPr>
+          <a:xfrm>
+            <a:off x="1451579" y="2015732"/>
+            <a:ext cx="9603275" cy="3960862"/>
+          </a:xfrm>
+        </p:spPr>
+        <p:txBody>
+          <a:bodyPr/>
+          <a:lstStyle/>
+          <a:p>
+            <a:r>
+              <a:rPr lang="en-US" dirty="0"/>
+              <a:t>Our axis define the scale and layout of a coordinate plane. </a:t>
+            </a:r>
+          </a:p>
+          <a:p>
+            <a:r>
+              <a:rPr lang="en-US" dirty="0"/>
+              <a:t>Tick marks show intervals:</a:t>
+            </a:r>
+          </a:p>
+          <a:p>
+            <a:pPr lvl="1"/>
+            <a:r>
+              <a:rPr lang="en-US" dirty="0"/>
+              <a:t>Major tick marks are typically labeled. </a:t>
+            </a:r>
+          </a:p>
+          <a:p>
+            <a:pPr lvl="1"/>
+            <a:r>
+              <a:rPr lang="en-US" dirty="0"/>
+              <a:t>Minor tick marks are not. </a:t>
+            </a:r>
+          </a:p>
+          <a:p>
+            <a:r>
+              <a:rPr lang="en-US" dirty="0"/>
+              <a:t>Right click -&gt; edit in Tableau. If not available, you don’t have an axis…</a:t>
+            </a:r>
+          </a:p>
+          <a:p>
+            <a:pPr lvl="1"/>
+            <a:r>
+              <a:rPr lang="en-US" dirty="0"/>
+              <a:t>Hint: what does a scatter plot require? </a:t>
+            </a:r>
+          </a:p>
+        </p:txBody>
+      </p:sp>
+    </p:spTree>
+    <p:extLst>
+      <p:ext uri="{BB962C8B-B14F-4D97-AF65-F5344CB8AC3E}">
+        <p14:creationId xmlns:p14="http://schemas.microsoft.com/office/powerpoint/2010/main" val="718169465"/>
+      </p:ext>
+    </p:extLst>
+  </p:cSld>
+  <p:clrMapOvr>
+    <a:masterClrMapping/>
+  </p:clrMapOvr>
+</p:sld>
+</file>
+
+<file path=ppt/slides/slide25.xml><?xml version="1.0" encoding="utf-8"?>
+<p:sld xmlns:a="http://schemas.openxmlformats.org/drawingml/2006/main" xmlns:r="http://schemas.openxmlformats.org/officeDocument/2006/relationships" xmlns:p="http://schemas.openxmlformats.org/presentationml/2006/main">
+  <p:cSld>
+    <p:spTree>
+      <p:nvGrpSpPr>
+        <p:cNvPr id="1" name=""/>
+        <p:cNvGrpSpPr/>
+        <p:nvPr/>
+      </p:nvGrpSpPr>
+      <p:grpSpPr>
+        <a:xfrm>
+          <a:off x="0" y="0"/>
+          <a:ext cx="0" cy="0"/>
+          <a:chOff x="0" y="0"/>
+          <a:chExt cx="0" cy="0"/>
+        </a:xfrm>
+      </p:grpSpPr>
+      <p:sp>
+        <p:nvSpPr>
+          <p:cNvPr id="2" name="Title 1">
+            <a:extLst>
+              <a:ext uri="{FF2B5EF4-FFF2-40B4-BE49-F238E27FC236}">
+                <a16:creationId xmlns:a16="http://schemas.microsoft.com/office/drawing/2014/main" id="{F8B55E14-2E03-03F5-E19C-D5667BDDC8BC}"/>
+              </a:ext>
+            </a:extLst>
+          </p:cNvPr>
+          <p:cNvSpPr>
+            <a:spLocks noGrp="1"/>
+          </p:cNvSpPr>
+          <p:nvPr>
+            <p:ph type="title"/>
+          </p:nvPr>
+        </p:nvSpPr>
+        <p:spPr/>
+        <p:txBody>
+          <a:bodyPr/>
+          <a:lstStyle/>
+          <a:p>
+            <a:r>
+              <a:rPr lang="en-US" dirty="0"/>
+              <a:t>Axis Scales</a:t>
+            </a:r>
+          </a:p>
+        </p:txBody>
+      </p:sp>
+      <p:sp>
+        <p:nvSpPr>
+          <p:cNvPr id="3" name="Content Placeholder 2">
+            <a:extLst>
+              <a:ext uri="{FF2B5EF4-FFF2-40B4-BE49-F238E27FC236}">
+                <a16:creationId xmlns:a16="http://schemas.microsoft.com/office/drawing/2014/main" id="{35E238C0-4902-6BB6-806C-B8E1CCA18469}"/>
+              </a:ext>
+            </a:extLst>
+          </p:cNvPr>
+          <p:cNvSpPr>
+            <a:spLocks noGrp="1"/>
+          </p:cNvSpPr>
+          <p:nvPr>
+            <p:ph idx="1"/>
+          </p:nvPr>
+        </p:nvSpPr>
+        <p:spPr>
+          <a:xfrm>
+            <a:off x="1451579" y="1853754"/>
+            <a:ext cx="9603275" cy="2236331"/>
+          </a:xfrm>
+        </p:spPr>
+        <p:txBody>
+          <a:bodyPr/>
+          <a:lstStyle/>
+          <a:p>
+            <a:r>
+              <a:rPr lang="en-US" dirty="0"/>
+              <a:t>Sometimes the scales on an axis are transformed from linear. </a:t>
+            </a:r>
+          </a:p>
+          <a:p>
+            <a:r>
+              <a:rPr lang="en-US" dirty="0"/>
+              <a:t>Common changes:</a:t>
+            </a:r>
+          </a:p>
+          <a:p>
+            <a:pPr lvl="1"/>
+            <a:r>
+              <a:rPr lang="en-US" dirty="0"/>
+              <a:t>Reversed. </a:t>
+            </a:r>
+          </a:p>
+          <a:p>
+            <a:pPr lvl="1"/>
+            <a:r>
+              <a:rPr lang="en-US" dirty="0"/>
+              <a:t>Logarithmic – shows linear with exponential data. </a:t>
+            </a:r>
+          </a:p>
+          <a:p>
+            <a:r>
+              <a:rPr lang="en-US" dirty="0"/>
+              <a:t>In Tableau – right click on axis to edit details. </a:t>
+            </a:r>
+          </a:p>
+        </p:txBody>
+      </p:sp>
+      <p:pic>
+        <p:nvPicPr>
+          <p:cNvPr id="3074" name="Picture 2" descr="GraphPad Prism 10 User Guide - When to use a logarithmic axis">
+            <a:extLst>
+              <a:ext uri="{FF2B5EF4-FFF2-40B4-BE49-F238E27FC236}">
+                <a16:creationId xmlns:a16="http://schemas.microsoft.com/office/drawing/2014/main" id="{8E54C168-ABEC-0F06-399A-5CBBBE6CFEB8}"/>
+              </a:ext>
+            </a:extLst>
+          </p:cNvPr>
+          <p:cNvPicPr>
+            <a:picLocks noChangeAspect="1" noChangeArrowheads="1"/>
+          </p:cNvPicPr>
+          <p:nvPr/>
+        </p:nvPicPr>
+        <p:blipFill rotWithShape="1">
+          <a:blip r:embed="rId2">
+            <a:extLst>
+              <a:ext uri="{28A0092B-C50C-407E-A947-70E740481C1C}">
+                <a14:useLocalDpi xmlns:a14="http://schemas.microsoft.com/office/drawing/2010/main" val="0"/>
+              </a:ext>
+            </a:extLst>
+          </a:blip>
+          <a:srcRect t="6653" b="6168"/>
+          <a:stretch>
+            <a:fillRect/>
+          </a:stretch>
+        </p:blipFill>
+        <p:spPr bwMode="auto">
+          <a:xfrm>
+            <a:off x="0" y="4090085"/>
+            <a:ext cx="7975600" cy="2767915"/>
+          </a:xfrm>
+          <a:prstGeom prst="rect">
+            <a:avLst/>
+          </a:prstGeom>
+          <a:noFill/>
+          <a:extLst>
+            <a:ext uri="{909E8E84-426E-40DD-AFC4-6F175D3DCCD1}">
+              <a14:hiddenFill xmlns:a14="http://schemas.microsoft.com/office/drawing/2010/main">
+                <a:solidFill>
+                  <a:srgbClr val="FFFFFF"/>
+                </a:solidFill>
+              </a14:hiddenFill>
+            </a:ext>
+          </a:extLst>
+        </p:spPr>
+      </p:pic>
+      <p:pic>
+        <p:nvPicPr>
+          <p:cNvPr id="3076" name="Picture 4" descr="Understanding the Richter Scale">
+            <a:extLst>
+              <a:ext uri="{FF2B5EF4-FFF2-40B4-BE49-F238E27FC236}">
+                <a16:creationId xmlns:a16="http://schemas.microsoft.com/office/drawing/2014/main" id="{573898B5-2E60-513C-C26B-2CF5E7D2BCF8}"/>
+              </a:ext>
+            </a:extLst>
+          </p:cNvPr>
+          <p:cNvPicPr>
+            <a:picLocks noChangeAspect="1" noChangeArrowheads="1"/>
+          </p:cNvPicPr>
+          <p:nvPr/>
+        </p:nvPicPr>
+        <p:blipFill rotWithShape="1">
+          <a:blip r:embed="rId3">
+            <a:extLst>
+              <a:ext uri="{28A0092B-C50C-407E-A947-70E740481C1C}">
+                <a14:useLocalDpi xmlns:a14="http://schemas.microsoft.com/office/drawing/2010/main" val="0"/>
+              </a:ext>
+            </a:extLst>
+          </a:blip>
+          <a:srcRect l="31367" r="7652"/>
+          <a:stretch>
+            <a:fillRect/>
+          </a:stretch>
+        </p:blipFill>
+        <p:spPr bwMode="auto">
+          <a:xfrm>
+            <a:off x="7975600" y="2434279"/>
+            <a:ext cx="4219515" cy="3892137"/>
+          </a:xfrm>
+          <a:prstGeom prst="rect">
+            <a:avLst/>
+          </a:prstGeom>
+          <a:noFill/>
+          <a:extLst>
+            <a:ext uri="{909E8E84-426E-40DD-AFC4-6F175D3DCCD1}">
+              <a14:hiddenFill xmlns:a14="http://schemas.microsoft.com/office/drawing/2010/main">
+                <a:solidFill>
+                  <a:srgbClr val="FFFFFF"/>
+                </a:solidFill>
+              </a14:hiddenFill>
+            </a:ext>
+          </a:extLst>
+        </p:spPr>
+      </p:pic>
+    </p:spTree>
+    <p:extLst>
+      <p:ext uri="{BB962C8B-B14F-4D97-AF65-F5344CB8AC3E}">
+        <p14:creationId xmlns:p14="http://schemas.microsoft.com/office/powerpoint/2010/main" val="3362070243"/>
+      </p:ext>
+    </p:extLst>
+  </p:cSld>
+  <p:clrMapOvr>
+    <a:masterClrMapping/>
+  </p:clrMapOvr>
+</p:sld>
+</file>
+
+<file path=ppt/slides/slide26.xml><?xml version="1.0" encoding="utf-8"?>
+<p:sld xmlns:a="http://schemas.openxmlformats.org/drawingml/2006/main" xmlns:r="http://schemas.openxmlformats.org/officeDocument/2006/relationships" xmlns:p="http://schemas.openxmlformats.org/presentationml/2006/main">
+  <p:cSld>
+    <p:spTree>
+      <p:nvGrpSpPr>
+        <p:cNvPr id="1" name=""/>
+        <p:cNvGrpSpPr/>
+        <p:nvPr/>
+      </p:nvGrpSpPr>
+      <p:grpSpPr>
+        <a:xfrm>
+          <a:off x="0" y="0"/>
+          <a:ext cx="0" cy="0"/>
+          <a:chOff x="0" y="0"/>
+          <a:chExt cx="0" cy="0"/>
+        </a:xfrm>
+      </p:grpSpPr>
+      <p:sp>
+        <p:nvSpPr>
+          <p:cNvPr id="2" name="Title 1">
+            <a:extLst>
+              <a:ext uri="{FF2B5EF4-FFF2-40B4-BE49-F238E27FC236}">
+                <a16:creationId xmlns:a16="http://schemas.microsoft.com/office/drawing/2014/main" id="{FFD77A72-D188-A819-4009-282413334096}"/>
+              </a:ext>
+            </a:extLst>
+          </p:cNvPr>
+          <p:cNvSpPr>
+            <a:spLocks noGrp="1"/>
+          </p:cNvSpPr>
+          <p:nvPr>
+            <p:ph type="title"/>
+          </p:nvPr>
+        </p:nvSpPr>
+        <p:spPr/>
+        <p:txBody>
+          <a:bodyPr/>
+          <a:lstStyle/>
+          <a:p>
+            <a:r>
+              <a:rPr lang="en-US" dirty="0"/>
+              <a:t>Conclusion</a:t>
+            </a:r>
+          </a:p>
+        </p:txBody>
+      </p:sp>
+      <p:sp>
+        <p:nvSpPr>
+          <p:cNvPr id="3" name="Content Placeholder 2">
+            <a:extLst>
+              <a:ext uri="{FF2B5EF4-FFF2-40B4-BE49-F238E27FC236}">
+                <a16:creationId xmlns:a16="http://schemas.microsoft.com/office/drawing/2014/main" id="{FDD1E98E-AE55-6CAE-AA74-89849FF8AE85}"/>
+              </a:ext>
+            </a:extLst>
+          </p:cNvPr>
+          <p:cNvSpPr>
+            <a:spLocks noGrp="1"/>
+          </p:cNvSpPr>
+          <p:nvPr>
+            <p:ph idx="1"/>
+          </p:nvPr>
+        </p:nvSpPr>
+        <p:spPr/>
+        <p:txBody>
+          <a:bodyPr/>
+          <a:lstStyle/>
+          <a:p>
+            <a:r>
+              <a:rPr lang="en-US" dirty="0"/>
+              <a:t>Coordinates are a foundational feature that define visualizations. </a:t>
+            </a:r>
+          </a:p>
+          <a:p>
+            <a:r>
+              <a:rPr lang="en-US" dirty="0"/>
+              <a:t>We can use coordinates to place items in an exact spot – defined by data or custom. </a:t>
+            </a:r>
+          </a:p>
+          <a:p>
+            <a:r>
+              <a:rPr lang="en-US" dirty="0"/>
+              <a:t>Alignment, scale, and comparison all flow from coordinates. </a:t>
+            </a:r>
+          </a:p>
+          <a:p>
+            <a:r>
+              <a:rPr lang="en-US" dirty="0"/>
+              <a:t>We use coordinates to encode information. </a:t>
+            </a:r>
+          </a:p>
+          <a:p>
+            <a:pPr lvl="1"/>
+            <a:r>
+              <a:rPr lang="en-US" dirty="0"/>
+              <a:t>E.g. the </a:t>
+            </a:r>
+          </a:p>
+        </p:txBody>
+      </p:sp>
+    </p:spTree>
+    <p:extLst>
+      <p:ext uri="{BB962C8B-B14F-4D97-AF65-F5344CB8AC3E}">
+        <p14:creationId xmlns:p14="http://schemas.microsoft.com/office/powerpoint/2010/main" val="1960139384"/>
+      </p:ext>
+    </p:extLst>
+  </p:cSld>
+  <p:clrMapOvr>
+    <a:masterClrMapping/>
+  </p:clrMapOvr>
+</p:sld>
+</file>
+
+<file path=ppt/slides/slide27.xml><?xml version="1.0" encoding="utf-8"?>
+<p:sld xmlns:a="http://schemas.openxmlformats.org/drawingml/2006/main" xmlns:r="http://schemas.openxmlformats.org/officeDocument/2006/relationships" xmlns:p="http://schemas.openxmlformats.org/presentationml/2006/main">
+  <p:cSld>
+    <p:spTree>
+      <p:nvGrpSpPr>
+        <p:cNvPr id="1" name=""/>
+        <p:cNvGrpSpPr/>
+        <p:nvPr/>
+      </p:nvGrpSpPr>
+      <p:grpSpPr>
+        <a:xfrm>
+          <a:off x="0" y="0"/>
+          <a:ext cx="0" cy="0"/>
+          <a:chOff x="0" y="0"/>
+          <a:chExt cx="0" cy="0"/>
+        </a:xfrm>
+      </p:grpSpPr>
+      <p:sp>
+        <p:nvSpPr>
+          <p:cNvPr id="2" name="Title 1">
+            <a:extLst>
+              <a:ext uri="{FF2B5EF4-FFF2-40B4-BE49-F238E27FC236}">
+                <a16:creationId xmlns:a16="http://schemas.microsoft.com/office/drawing/2014/main" id="{E58279E5-7DE1-B5EB-5117-E6495D1E3E4C}"/>
+              </a:ext>
+            </a:extLst>
+          </p:cNvPr>
+          <p:cNvSpPr>
+            <a:spLocks noGrp="1"/>
+          </p:cNvSpPr>
+          <p:nvPr>
+            <p:ph type="title"/>
+          </p:nvPr>
+        </p:nvSpPr>
+        <p:spPr/>
+        <p:txBody>
+          <a:bodyPr/>
+          <a:lstStyle/>
+          <a:p>
+            <a:endParaRPr lang="en-US"/>
+          </a:p>
+        </p:txBody>
+      </p:sp>
+      <p:sp>
+        <p:nvSpPr>
+          <p:cNvPr id="3" name="Content Placeholder 2">
+            <a:extLst>
+              <a:ext uri="{FF2B5EF4-FFF2-40B4-BE49-F238E27FC236}">
+                <a16:creationId xmlns:a16="http://schemas.microsoft.com/office/drawing/2014/main" id="{82D61ABA-E1A5-6F76-E5C1-2E3388415438}"/>
+              </a:ext>
+            </a:extLst>
+          </p:cNvPr>
+          <p:cNvSpPr>
+            <a:spLocks noGrp="1"/>
+          </p:cNvSpPr>
+          <p:nvPr>
+            <p:ph idx="1"/>
+          </p:nvPr>
+        </p:nvSpPr>
+        <p:spPr/>
+        <p:txBody>
+          <a:bodyPr/>
+          <a:lstStyle/>
+          <a:p>
+            <a:endParaRPr lang="en-US"/>
+          </a:p>
+        </p:txBody>
+      </p:sp>
+    </p:spTree>
+    <p:extLst>
+      <p:ext uri="{BB962C8B-B14F-4D97-AF65-F5344CB8AC3E}">
+        <p14:creationId xmlns:p14="http://schemas.microsoft.com/office/powerpoint/2010/main" val="2524480485"/>
+      </p:ext>
+    </p:extLst>
+  </p:cSld>
+  <p:clrMapOvr>
+    <a:masterClrMapping/>
+  </p:clrMapOvr>
+</p:sld>
+</file>
+
+<file path=ppt/slides/slide28.xml><?xml version="1.0" encoding="utf-8"?>
+<p:sld xmlns:a="http://schemas.openxmlformats.org/drawingml/2006/main" xmlns:r="http://schemas.openxmlformats.org/officeDocument/2006/relationships" xmlns:p="http://schemas.openxmlformats.org/presentationml/2006/main">
+  <p:cSld>
+    <p:spTree>
+      <p:nvGrpSpPr>
+        <p:cNvPr id="1" name=""/>
+        <p:cNvGrpSpPr/>
+        <p:nvPr/>
+      </p:nvGrpSpPr>
+      <p:grpSpPr>
+        <a:xfrm>
+          <a:off x="0" y="0"/>
+          <a:ext cx="0" cy="0"/>
+          <a:chOff x="0" y="0"/>
+          <a:chExt cx="0" cy="0"/>
+        </a:xfrm>
+      </p:grpSpPr>
+      <p:sp>
+        <p:nvSpPr>
+          <p:cNvPr id="3" name="Title 2">
+            <a:extLst>
+              <a:ext uri="{FF2B5EF4-FFF2-40B4-BE49-F238E27FC236}">
+                <a16:creationId xmlns:a16="http://schemas.microsoft.com/office/drawing/2014/main" id="{54B141E4-5EF5-40F0-AD72-0097561A274A}"/>
+              </a:ext>
+            </a:extLst>
+          </p:cNvPr>
+          <p:cNvSpPr>
+            <a:spLocks noGrp="1"/>
+          </p:cNvSpPr>
+          <p:nvPr>
+            <p:ph type="ctrTitle"/>
+          </p:nvPr>
+        </p:nvSpPr>
+        <p:spPr/>
+        <p:txBody>
+          <a:bodyPr>
+            <a:normAutofit fontScale="90000"/>
+          </a:bodyPr>
+          <a:lstStyle/>
+          <a:p>
+            <a:r>
+              <a:rPr lang="en-US" dirty="0"/>
+              <a:t>Datasheets, Databases, and Data Structure</a:t>
+            </a:r>
+          </a:p>
+        </p:txBody>
+      </p:sp>
+      <p:sp>
+        <p:nvSpPr>
+          <p:cNvPr id="6" name="Subtitle 5">
+            <a:extLst>
+              <a:ext uri="{FF2B5EF4-FFF2-40B4-BE49-F238E27FC236}">
+                <a16:creationId xmlns:a16="http://schemas.microsoft.com/office/drawing/2014/main" id="{53F2DD73-494E-F6A6-E1C8-EE8012D14864}"/>
+              </a:ext>
+            </a:extLst>
+          </p:cNvPr>
+          <p:cNvSpPr>
+            <a:spLocks noGrp="1"/>
+          </p:cNvSpPr>
+          <p:nvPr>
+            <p:ph type="subTitle" idx="1"/>
+          </p:nvPr>
+        </p:nvSpPr>
+        <p:spPr/>
+        <p:txBody>
+          <a:bodyPr/>
+          <a:lstStyle/>
+          <a:p>
+            <a:endParaRPr lang="en-US"/>
+          </a:p>
+        </p:txBody>
+      </p:sp>
+    </p:spTree>
+    <p:extLst>
+      <p:ext uri="{BB962C8B-B14F-4D97-AF65-F5344CB8AC3E}">
+        <p14:creationId xmlns:p14="http://schemas.microsoft.com/office/powerpoint/2010/main" val="255967503"/>
+      </p:ext>
+    </p:extLst>
+  </p:cSld>
+  <p:clrMapOvr>
+    <a:masterClrMapping/>
+  </p:clrMapOvr>
+  <mc:AlternateContent xmlns:mc="http://schemas.openxmlformats.org/markup-compatibility/2006" xmlns:p14="http://schemas.microsoft.com/office/powerpoint/2010/main">
+    <mc:Choice Requires="p14">
+      <p:transition spd="slow" p14:dur="2000" advTm="6482"/>
+    </mc:Choice>
+    <mc:Fallback xmlns="">
+      <p:transition spd="slow" advTm="6482"/>
+    </mc:Fallback>
+  </mc:AlternateContent>
+</p:sld>
+</file>
+
+<file path=ppt/slides/slide29.xml><?xml version="1.0" encoding="utf-8"?>
+<p:sld xmlns:a="http://schemas.openxmlformats.org/drawingml/2006/main" xmlns:r="http://schemas.openxmlformats.org/officeDocument/2006/relationships" xmlns:p="http://schemas.openxmlformats.org/presentationml/2006/main">
+  <p:cSld>
+    <p:spTree>
+      <p:nvGrpSpPr>
+        <p:cNvPr id="1" name=""/>
+        <p:cNvGrpSpPr/>
+        <p:nvPr/>
+      </p:nvGrpSpPr>
+      <p:grpSpPr>
+        <a:xfrm>
+          <a:off x="0" y="0"/>
+          <a:ext cx="0" cy="0"/>
+          <a:chOff x="0" y="0"/>
+          <a:chExt cx="0" cy="0"/>
+        </a:xfrm>
+      </p:grpSpPr>
+      <p:sp>
+        <p:nvSpPr>
+          <p:cNvPr id="2" name="Title 1">
+            <a:extLst>
+              <a:ext uri="{FF2B5EF4-FFF2-40B4-BE49-F238E27FC236}">
+                <a16:creationId xmlns:a16="http://schemas.microsoft.com/office/drawing/2014/main" id="{3F2EF96A-C8CE-8FB4-7D6A-B99B1D76AF65}"/>
+              </a:ext>
+            </a:extLst>
+          </p:cNvPr>
+          <p:cNvSpPr>
+            <a:spLocks noGrp="1"/>
+          </p:cNvSpPr>
+          <p:nvPr>
+            <p:ph type="title"/>
+          </p:nvPr>
+        </p:nvSpPr>
+        <p:spPr/>
+        <p:txBody>
+          <a:bodyPr/>
+          <a:lstStyle/>
+          <a:p>
+            <a:r>
+              <a:rPr lang="en-US" dirty="0"/>
+              <a:t>Structure of Data</a:t>
+            </a:r>
+          </a:p>
+        </p:txBody>
+      </p:sp>
+      <p:sp>
+        <p:nvSpPr>
+          <p:cNvPr id="3" name="Content Placeholder 2">
+            <a:extLst>
+              <a:ext uri="{FF2B5EF4-FFF2-40B4-BE49-F238E27FC236}">
+                <a16:creationId xmlns:a16="http://schemas.microsoft.com/office/drawing/2014/main" id="{3F9490E0-D212-301D-6910-14CD7063EC6B}"/>
+              </a:ext>
+            </a:extLst>
+          </p:cNvPr>
+          <p:cNvSpPr>
+            <a:spLocks noGrp="1"/>
+          </p:cNvSpPr>
+          <p:nvPr>
+            <p:ph idx="1"/>
+          </p:nvPr>
+        </p:nvSpPr>
+        <p:spPr>
+          <a:xfrm>
+            <a:off x="1451579" y="2015732"/>
+            <a:ext cx="9603275" cy="4037749"/>
+          </a:xfrm>
+        </p:spPr>
+        <p:txBody>
+          <a:bodyPr>
+            <a:normAutofit lnSpcReduction="10000"/>
+          </a:bodyPr>
+          <a:lstStyle/>
+          <a:p>
+            <a:r>
+              <a:rPr lang="en-US" dirty="0"/>
+              <a:t>Many things in the data world are interoperable because things follow a set structure. </a:t>
+            </a:r>
+          </a:p>
+          <a:p>
+            <a:pPr lvl="1"/>
+            <a:r>
+              <a:rPr lang="en-US" dirty="0"/>
+              <a:t>You can open any text file in any text editor as long as the file is the correct type. </a:t>
+            </a:r>
+          </a:p>
+          <a:p>
+            <a:pPr lvl="1"/>
+            <a:r>
+              <a:rPr lang="en-US" dirty="0"/>
+              <a:t>In Tableau, we can load data from many sources as long as it is in the correct format. </a:t>
+            </a:r>
+          </a:p>
+          <a:p>
+            <a:r>
+              <a:rPr lang="en-US" dirty="0"/>
+              <a:t>For data, most structured data is stored in relational database tables. </a:t>
+            </a:r>
+          </a:p>
+          <a:p>
+            <a:pPr lvl="1"/>
+            <a:r>
+              <a:rPr lang="en-US" dirty="0"/>
+              <a:t>Any* program can manipulate the same data. </a:t>
+            </a:r>
+          </a:p>
+          <a:p>
+            <a:pPr lvl="1"/>
+            <a:r>
+              <a:rPr lang="en-US" dirty="0"/>
+              <a:t>E.g. Brightspace writes your grade data down after the semester, another system (</a:t>
+            </a:r>
+            <a:r>
+              <a:rPr lang="en-US" dirty="0" err="1"/>
+              <a:t>peoplesoft</a:t>
+            </a:r>
+            <a:r>
+              <a:rPr lang="en-US" dirty="0"/>
+              <a:t>?) reads that data to put you on academic parole, the honor roll, or let you graduate. </a:t>
+            </a:r>
+          </a:p>
+          <a:p>
+            <a:r>
+              <a:rPr lang="en-US" dirty="0"/>
+              <a:t>An individual table/extract is a datasheet. </a:t>
+            </a:r>
+          </a:p>
+          <a:p>
+            <a:pPr lvl="1"/>
+            <a:r>
+              <a:rPr lang="en-US" dirty="0"/>
+              <a:t>This is what we load in Tableau. </a:t>
+            </a:r>
+          </a:p>
+          <a:p>
+            <a:pPr lvl="1"/>
+            <a:r>
+              <a:rPr lang="en-US" dirty="0"/>
+              <a:t>Looks like a spreadsheet wall-o-numbers. </a:t>
+            </a:r>
+          </a:p>
+        </p:txBody>
+      </p:sp>
+    </p:spTree>
+    <p:extLst>
+      <p:ext uri="{BB962C8B-B14F-4D97-AF65-F5344CB8AC3E}">
+        <p14:creationId xmlns:p14="http://schemas.microsoft.com/office/powerpoint/2010/main" val="298250801"/>
+      </p:ext>
+    </p:extLst>
+  </p:cSld>
+  <p:clrMapOvr>
+    <a:masterClrMapping/>
+  </p:clrMapOvr>
+</p:sld>
+</file>
+
+<file path=ppt/slides/slide3.xml><?xml version="1.0" encoding="utf-8"?>
+<p:sld xmlns:a="http://schemas.openxmlformats.org/drawingml/2006/main" xmlns:r="http://schemas.openxmlformats.org/officeDocument/2006/relationships" xmlns:p="http://schemas.openxmlformats.org/presentationml/2006/main" show="0">
   <p:cSld>
     <p:spTree>
       <p:nvGrpSpPr>
@@ -5711,7 +7636,7 @@
 </p:sld>
 </file>
 
-<file path=ppt/slides/slide20.xml><?xml version="1.0" encoding="utf-8"?>
+<file path=ppt/slides/slide30.xml><?xml version="1.0" encoding="utf-8"?>
 <p:sld xmlns:a="http://schemas.openxmlformats.org/drawingml/2006/main" xmlns:r="http://schemas.openxmlformats.org/officeDocument/2006/relationships" xmlns:p="http://schemas.openxmlformats.org/presentationml/2006/main">
   <p:cSld>
     <p:spTree>
@@ -5733,7 +7658,7 @@
           <p:cNvPr id="2" name="Title 1">
             <a:extLst>
               <a:ext uri="{FF2B5EF4-FFF2-40B4-BE49-F238E27FC236}">
-                <a16:creationId xmlns:a16="http://schemas.microsoft.com/office/drawing/2014/main" id="{41EC2875-91C7-D1F9-C439-7F97C4520B40}"/>
+                <a16:creationId xmlns:a16="http://schemas.microsoft.com/office/drawing/2014/main" id="{49CA63B2-F415-798E-B349-0D59E2B755E2}"/>
               </a:ext>
             </a:extLst>
           </p:cNvPr>
@@ -5751,7 +7676,7 @@
           <a:p>
             <a:r>
               <a:rPr lang="en-US" dirty="0"/>
-              <a:t>Example – Parliament Chart</a:t>
+              <a:t>A Table of Data</a:t>
             </a:r>
           </a:p>
         </p:txBody>
@@ -5761,7 +7686,7 @@
           <p:cNvPr id="3" name="Content Placeholder 2">
             <a:extLst>
               <a:ext uri="{FF2B5EF4-FFF2-40B4-BE49-F238E27FC236}">
-                <a16:creationId xmlns:a16="http://schemas.microsoft.com/office/drawing/2014/main" id="{59E27ED1-3DF7-6400-B163-2F81FB7598D1}"/>
+                <a16:creationId xmlns:a16="http://schemas.microsoft.com/office/drawing/2014/main" id="{45A95499-5B29-55B1-95F0-A05CE20482B2}"/>
               </a:ext>
             </a:extLst>
           </p:cNvPr>
@@ -5774,83 +7699,62 @@
         </p:nvSpPr>
         <p:spPr>
           <a:xfrm>
-            <a:off x="1" y="1853754"/>
-            <a:ext cx="7164370" cy="4199727"/>
+            <a:off x="104503" y="1853754"/>
+            <a:ext cx="3662341" cy="4199727"/>
           </a:xfrm>
         </p:spPr>
         <p:txBody>
-          <a:bodyPr>
-            <a:normAutofit/>
-          </a:bodyPr>
-          <a:lstStyle/>
-          <a:p>
-            <a:r>
-              <a:rPr lang="en-US" dirty="0"/>
-              <a:t>Each block is one mark, and it has an x and y coordinate set. </a:t>
+          <a:bodyPr/>
+          <a:lstStyle/>
+          <a:p>
+            <a:r>
+              <a:rPr lang="en-US" dirty="0"/>
+              <a:t>RDBs look like this. </a:t>
             </a:r>
           </a:p>
           <a:p>
             <a:pPr lvl="1"/>
             <a:r>
               <a:rPr lang="en-US" dirty="0"/>
-              <a:t>Each mark is one representative in parliament in this case. </a:t>
-            </a:r>
-          </a:p>
-          <a:p>
-            <a:r>
-              <a:rPr lang="en-US" dirty="0"/>
-              <a:t>X and y are transformed through trig to create new x and y. </a:t>
+              <a:t>Should be familiar... </a:t>
             </a:r>
           </a:p>
           <a:p>
             <a:pPr lvl="1"/>
             <a:r>
               <a:rPr lang="en-US" dirty="0"/>
-              <a:t>These new values are what are actually plotted. </a:t>
-            </a:r>
-          </a:p>
-          <a:p>
-            <a:pPr lvl="1"/>
-            <a:r>
-              <a:rPr lang="en-US" dirty="0"/>
-              <a:t>These are in a curve due to the trig-ness of the calculation. </a:t>
-            </a:r>
-          </a:p>
-          <a:p>
-            <a:r>
-              <a:rPr lang="en-US" dirty="0"/>
-              <a:t>This type of thing isn’t easy to do off the top of your head. </a:t>
-            </a:r>
-          </a:p>
-          <a:p>
-            <a:pPr lvl="1"/>
-            <a:r>
-              <a:rPr lang="en-US" dirty="0"/>
-              <a:t>May require manual, custom data to be added. </a:t>
-            </a:r>
-          </a:p>
-          <a:p>
-            <a:pPr lvl="1"/>
-            <a:r>
-              <a:rPr lang="en-US" dirty="0"/>
-              <a:t>We can follow guides and adapt to our data. </a:t>
-            </a:r>
-          </a:p>
-          <a:p>
-            <a:pPr lvl="1"/>
-            <a:r>
-              <a:rPr lang="en-US" dirty="0"/>
-              <a:t>Trying to adapt things to yours is a very good way to get good. </a:t>
-            </a:r>
+              <a:t>May be thousands of tables.</a:t>
+            </a:r>
+          </a:p>
+          <a:p>
+            <a:r>
+              <a:rPr lang="en-US" dirty="0"/>
+              <a:t>Table (sheet) is a list of a thing (an entity). </a:t>
+            </a:r>
+          </a:p>
+          <a:p>
+            <a:r>
+              <a:rPr lang="en-US" dirty="0"/>
+              <a:t>Each row is one instance of that thing. </a:t>
+            </a:r>
+          </a:p>
+          <a:p>
+            <a:r>
+              <a:rPr lang="en-US" dirty="0"/>
+              <a:t>Each column is one value (var) tracked about the thing. </a:t>
+            </a:r>
+          </a:p>
+          <a:p>
+            <a:endParaRPr lang="en-US" dirty="0"/>
           </a:p>
         </p:txBody>
       </p:sp>
       <p:pic>
         <p:nvPicPr>
-          <p:cNvPr id="5122" name="Picture 2" descr="Workbook: Automated Parliament Chart">
+          <p:cNvPr id="1026" name="Picture 2" descr="Key Components in Databases with Multiple Tables - Genspark">
             <a:extLst>
               <a:ext uri="{FF2B5EF4-FFF2-40B4-BE49-F238E27FC236}">
-                <a16:creationId xmlns:a16="http://schemas.microsoft.com/office/drawing/2014/main" id="{05820A2A-D7A7-D4D3-00D4-88DA7FDA98B0}"/>
+                <a16:creationId xmlns:a16="http://schemas.microsoft.com/office/drawing/2014/main" id="{F272D5A6-9318-48CE-49D1-2BC2C0CFF4CA}"/>
               </a:ext>
             </a:extLst>
           </p:cNvPr>
@@ -5874,8 +7778,8 @@
         </p:blipFill>
         <p:spPr bwMode="auto">
           <a:xfrm>
-            <a:off x="6901042" y="2348913"/>
-            <a:ext cx="5290958" cy="3263716"/>
+            <a:off x="3766844" y="2015732"/>
+            <a:ext cx="8425156" cy="3670365"/>
           </a:xfrm>
           <a:prstGeom prst="rect">
             <a:avLst/>
@@ -5895,7 +7799,7 @@
     </p:spTree>
     <p:extLst>
       <p:ext uri="{BB962C8B-B14F-4D97-AF65-F5344CB8AC3E}">
-        <p14:creationId xmlns:p14="http://schemas.microsoft.com/office/powerpoint/2010/main" val="3515400123"/>
+        <p14:creationId xmlns:p14="http://schemas.microsoft.com/office/powerpoint/2010/main" val="1098943757"/>
       </p:ext>
     </p:extLst>
   </p:cSld>
@@ -5905,7 +7809,7 @@
 </p:sld>
 </file>
 
-<file path=ppt/slides/slide21.xml><?xml version="1.0" encoding="utf-8"?>
+<file path=ppt/slides/slide31.xml><?xml version="1.0" encoding="utf-8"?>
 <p:sld xmlns:a="http://schemas.openxmlformats.org/drawingml/2006/main" xmlns:r="http://schemas.openxmlformats.org/officeDocument/2006/relationships" xmlns:p="http://schemas.openxmlformats.org/presentationml/2006/main">
   <p:cSld>
     <p:spTree>
@@ -5924,13 +7828,7 @@
       </p:grpSpPr>
       <p:sp>
         <p:nvSpPr>
-          <p:cNvPr id="2" name="Title 1">
-            <a:extLst>
-              <a:ext uri="{FF2B5EF4-FFF2-40B4-BE49-F238E27FC236}">
-                <a16:creationId xmlns:a16="http://schemas.microsoft.com/office/drawing/2014/main" id="{D4BC257F-BF74-AAB3-3920-382826CA1641}"/>
-              </a:ext>
-            </a:extLst>
-          </p:cNvPr>
+          <p:cNvPr id="2" name="Title 1"/>
           <p:cNvSpPr>
             <a:spLocks noGrp="1"/>
           </p:cNvSpPr>
@@ -5945,20 +7843,14 @@
           <a:p>
             <a:r>
               <a:rPr lang="en-US" dirty="0"/>
-              <a:t>Chart Axis</a:t>
-            </a:r>
-          </a:p>
-        </p:txBody>
-      </p:sp>
-      <p:sp>
-        <p:nvSpPr>
-          <p:cNvPr id="3" name="Content Placeholder 2">
-            <a:extLst>
-              <a:ext uri="{FF2B5EF4-FFF2-40B4-BE49-F238E27FC236}">
-                <a16:creationId xmlns:a16="http://schemas.microsoft.com/office/drawing/2014/main" id="{7DA5445B-B3E7-3511-B788-88E41AB498DC}"/>
-              </a:ext>
-            </a:extLst>
-          </p:cNvPr>
+              <a:t>Relational Databases</a:t>
+            </a:r>
+          </a:p>
+        </p:txBody>
+      </p:sp>
+      <p:sp>
+        <p:nvSpPr>
+          <p:cNvPr id="6" name="Content Placeholder 5"/>
           <p:cNvSpPr>
             <a:spLocks noGrp="1"/>
           </p:cNvSpPr>
@@ -5968,68 +7860,137 @@
         </p:nvSpPr>
         <p:spPr>
           <a:xfrm>
-            <a:off x="1451579" y="2015732"/>
-            <a:ext cx="9603275" cy="3960862"/>
+            <a:off x="1451579" y="1853754"/>
+            <a:ext cx="9603275" cy="4199727"/>
           </a:xfrm>
         </p:spPr>
         <p:txBody>
-          <a:bodyPr/>
-          <a:lstStyle/>
-          <a:p>
-            <a:r>
-              <a:rPr lang="en-US" dirty="0"/>
-              <a:t>Our axis define the scale and layout of a coordinate plane. </a:t>
-            </a:r>
-          </a:p>
-          <a:p>
-            <a:r>
-              <a:rPr lang="en-US" dirty="0"/>
-              <a:t>Tick marks show intervals:</a:t>
+          <a:bodyPr>
+            <a:normAutofit lnSpcReduction="10000"/>
+          </a:bodyPr>
+          <a:lstStyle/>
+          <a:p>
+            <a:pPr marL="342900" indent="-342900">
+              <a:buFont typeface="Arial" panose="020B0604020202020204" pitchFamily="34" charset="0"/>
+              <a:buChar char="•"/>
+            </a:pPr>
+            <a:r>
+              <a:rPr lang="en-US" sz="2400" dirty="0"/>
+              <a:t>Database that stores data using an entity-relationship model. </a:t>
+            </a:r>
+          </a:p>
+          <a:p>
+            <a:pPr marL="845820" lvl="1" indent="-342900">
+              <a:buFont typeface="Arial" panose="020B0604020202020204" pitchFamily="34" charset="0"/>
+              <a:buChar char="•"/>
+            </a:pPr>
+            <a:r>
+              <a:rPr lang="en-US" sz="2200" dirty="0"/>
+              <a:t>Entities are the “business objects” we want to track. E.g. Customers, sales, products, employees, </a:t>
+            </a:r>
+            <a:r>
+              <a:rPr lang="en-US" sz="2200" dirty="0" err="1"/>
+              <a:t>etc</a:t>
+            </a:r>
+            <a:r>
+              <a:rPr lang="en-US" sz="2200" dirty="0"/>
+              <a:t>…</a:t>
+            </a:r>
+          </a:p>
+          <a:p>
+            <a:pPr marL="845820" lvl="1" indent="-342900">
+              <a:buFont typeface="Arial" panose="020B0604020202020204" pitchFamily="34" charset="0"/>
+              <a:buChar char="•"/>
+            </a:pPr>
+            <a:r>
+              <a:rPr lang="en-US" sz="2200" dirty="0"/>
+              <a:t>Relationships are the interactions between those entities. E.g. a customer makes a purchase, an employee fills a role, </a:t>
+            </a:r>
+            <a:r>
+              <a:rPr lang="en-US" sz="2200" dirty="0" err="1"/>
+              <a:t>etc</a:t>
+            </a:r>
+            <a:r>
+              <a:rPr lang="en-US" sz="2200" dirty="0"/>
+              <a:t>…</a:t>
+            </a:r>
+            <a:r>
+              <a:rPr lang="en-US" sz="2400" dirty="0"/>
+              <a:t>	</a:t>
+            </a:r>
+          </a:p>
+          <a:p>
+            <a:pPr marL="388620" indent="-342900"/>
+            <a:r>
+              <a:rPr lang="en-US" sz="2600" dirty="0"/>
+              <a:t>A database will have many tables, one per entity (“thing”). </a:t>
+            </a:r>
+          </a:p>
+          <a:p>
+            <a:pPr marL="845820" lvl="1" indent="-342900"/>
+            <a:r>
+              <a:rPr lang="en-US" sz="2400" dirty="0"/>
+              <a:t>Students, customers, products, purchases, </a:t>
+            </a:r>
+            <a:r>
+              <a:rPr lang="en-US" sz="2400" dirty="0" err="1"/>
+              <a:t>etc</a:t>
+            </a:r>
+            <a:r>
+              <a:rPr lang="en-US" sz="2400" dirty="0"/>
+              <a:t>…</a:t>
+            </a:r>
+          </a:p>
+          <a:p>
+            <a:pPr marL="388620" indent="-342900"/>
+            <a:r>
+              <a:rPr lang="en-US" sz="2600" dirty="0"/>
+              <a:t>There can be connections (joins) to model reality. </a:t>
+            </a:r>
+          </a:p>
+          <a:p>
+            <a:pPr marL="845820" lvl="1" indent="-342900"/>
+            <a:r>
+              <a:rPr lang="en-US" sz="2400" dirty="0"/>
+              <a:t>Customer makes purchase, employee assigned laptop, </a:t>
+            </a:r>
+            <a:r>
+              <a:rPr lang="en-US" sz="2400" dirty="0" err="1"/>
+              <a:t>etc</a:t>
+            </a:r>
+            <a:r>
+              <a:rPr lang="en-US" sz="2400" dirty="0"/>
+              <a:t>…</a:t>
             </a:r>
           </a:p>
           <a:p>
             <a:pPr lvl="1"/>
-            <a:r>
-              <a:rPr lang="en-US" dirty="0"/>
-              <a:t>Major tick marks are typically labeled. </a:t>
-            </a:r>
-          </a:p>
-          <a:p>
-            <a:pPr lvl="1"/>
-            <a:r>
-              <a:rPr lang="en-US" dirty="0"/>
-              <a:t>Minor tick marks are not. </a:t>
-            </a:r>
-          </a:p>
-          <a:p>
-            <a:r>
-              <a:rPr lang="en-US" dirty="0"/>
-              <a:t>Right click -&gt; edit in Tableau. If not available, you don’t have an axis…</a:t>
-            </a:r>
-          </a:p>
-          <a:p>
-            <a:pPr lvl="1"/>
-            <a:r>
-              <a:rPr lang="en-US" dirty="0"/>
-              <a:t>Hint: what does a scatter plot require? </a:t>
-            </a:r>
+            <a:endParaRPr lang="en-US" dirty="0"/>
           </a:p>
         </p:txBody>
       </p:sp>
     </p:spTree>
     <p:extLst>
       <p:ext uri="{BB962C8B-B14F-4D97-AF65-F5344CB8AC3E}">
-        <p14:creationId xmlns:p14="http://schemas.microsoft.com/office/powerpoint/2010/main" val="718169465"/>
+        <p14:creationId xmlns:p14="http://schemas.microsoft.com/office/powerpoint/2010/main" val="3377861876"/>
       </p:ext>
     </p:extLst>
   </p:cSld>
   <p:clrMapOvr>
     <a:masterClrMapping/>
   </p:clrMapOvr>
+  <mc:AlternateContent xmlns:mc="http://schemas.openxmlformats.org/markup-compatibility/2006" xmlns:p14="http://schemas.microsoft.com/office/powerpoint/2010/main">
+    <mc:Choice Requires="p14">
+      <p:transition spd="slow" p14:dur="2000" advTm="19316"/>
+    </mc:Choice>
+    <mc:Fallback xmlns="">
+      <p:transition spd="slow" advTm="19316"/>
+    </mc:Fallback>
+  </mc:AlternateContent>
 </p:sld>
 </file>
 
-<file path=ppt/slides/slide22.xml><?xml version="1.0" encoding="utf-8"?>
+<file path=ppt/slides/slide32.xml><?xml version="1.0" encoding="utf-8"?>
 <p:sld xmlns:a="http://schemas.openxmlformats.org/drawingml/2006/main" xmlns:r="http://schemas.openxmlformats.org/officeDocument/2006/relationships" xmlns:p="http://schemas.openxmlformats.org/presentationml/2006/main">
   <p:cSld>
     <p:spTree>
@@ -6048,10 +8009,164 @@
       </p:grpSpPr>
       <p:sp>
         <p:nvSpPr>
-          <p:cNvPr id="2" name="Title 1">
+          <p:cNvPr id="2" name="Title 1"/>
+          <p:cNvSpPr>
+            <a:spLocks noGrp="1"/>
+          </p:cNvSpPr>
+          <p:nvPr>
+            <p:ph type="title"/>
+          </p:nvPr>
+        </p:nvSpPr>
+        <p:spPr/>
+        <p:txBody>
+          <a:bodyPr/>
+          <a:lstStyle/>
+          <a:p>
+            <a:r>
+              <a:rPr lang="en-US" dirty="0"/>
+              <a:t>Three Basic Components of a Relational Database</a:t>
+            </a:r>
+          </a:p>
+        </p:txBody>
+      </p:sp>
+      <p:sp>
+        <p:nvSpPr>
+          <p:cNvPr id="3" name="Content Placeholder 2"/>
+          <p:cNvSpPr>
+            <a:spLocks noGrp="1"/>
+          </p:cNvSpPr>
+          <p:nvPr>
+            <p:ph idx="1"/>
+          </p:nvPr>
+        </p:nvSpPr>
+        <p:spPr>
+          <a:xfrm>
+            <a:off x="1451579" y="2015732"/>
+            <a:ext cx="9603275" cy="4037749"/>
+          </a:xfrm>
+        </p:spPr>
+        <p:txBody>
+          <a:bodyPr/>
+          <a:lstStyle/>
+          <a:p>
+            <a:r>
+              <a:rPr lang="en-US" b="1" dirty="0"/>
+              <a:t>Tables</a:t>
+            </a:r>
+            <a:r>
+              <a:rPr lang="en-US" dirty="0"/>
+              <a:t> – data organized into sets of columns (fields) and rows (records).</a:t>
+            </a:r>
+          </a:p>
+          <a:p>
+            <a:r>
+              <a:rPr lang="en-US" b="1" dirty="0"/>
+              <a:t>Fields</a:t>
+            </a:r>
+            <a:r>
+              <a:rPr lang="en-US" dirty="0"/>
+              <a:t> – these are the columns that contain descriptive information about the observations in the table (including primary and foreign keys).</a:t>
+            </a:r>
+          </a:p>
+          <a:p>
+            <a:r>
+              <a:rPr lang="en-US" b="1" dirty="0"/>
+              <a:t>Records</a:t>
+            </a:r>
+            <a:r>
+              <a:rPr lang="en-US" dirty="0"/>
+              <a:t> – these are the rows in a table; each row, or record, corresponds to a unique instance of what is being described in the table. </a:t>
+            </a:r>
+          </a:p>
+          <a:p>
+            <a:endParaRPr lang="en-US" dirty="0"/>
+          </a:p>
+          <a:p>
+            <a:r>
+              <a:rPr lang="en-US" dirty="0"/>
+              <a:t>A typical ‘enterprise’ database may have hundreds or thousands of tables. </a:t>
+            </a:r>
+          </a:p>
+          <a:p>
+            <a:r>
+              <a:rPr lang="en-US" dirty="0"/>
+              <a:t>The things we directly use are usually a combination of data that would be in many tables. </a:t>
+            </a:r>
+          </a:p>
+          <a:p>
+            <a:endParaRPr lang="en-US" dirty="0"/>
+          </a:p>
+          <a:p>
+            <a:endParaRPr lang="en-US" dirty="0"/>
+          </a:p>
+        </p:txBody>
+      </p:sp>
+    </p:spTree>
+    <p:extLst>
+      <p:ext uri="{BB962C8B-B14F-4D97-AF65-F5344CB8AC3E}">
+        <p14:creationId xmlns:p14="http://schemas.microsoft.com/office/powerpoint/2010/main" val="3793254333"/>
+      </p:ext>
+    </p:extLst>
+  </p:cSld>
+  <p:clrMapOvr>
+    <a:masterClrMapping/>
+  </p:clrMapOvr>
+  <mc:AlternateContent xmlns:mc="http://schemas.openxmlformats.org/markup-compatibility/2006" xmlns:p14="http://schemas.microsoft.com/office/powerpoint/2010/main">
+    <mc:Choice Requires="p14">
+      <p:transition spd="slow" p14:dur="2000" advTm="33335"/>
+    </mc:Choice>
+    <mc:Fallback xmlns="">
+      <p:transition spd="slow" advTm="33335"/>
+    </mc:Fallback>
+  </mc:AlternateContent>
+</p:sld>
+</file>
+
+<file path=ppt/slides/slide33.xml><?xml version="1.0" encoding="utf-8"?>
+<p:sld xmlns:a="http://schemas.openxmlformats.org/drawingml/2006/main" xmlns:r="http://schemas.openxmlformats.org/officeDocument/2006/relationships" xmlns:p="http://schemas.openxmlformats.org/presentationml/2006/main">
+  <p:cSld>
+    <p:spTree>
+      <p:nvGrpSpPr>
+        <p:cNvPr id="1" name=""/>
+        <p:cNvGrpSpPr/>
+        <p:nvPr/>
+      </p:nvGrpSpPr>
+      <p:grpSpPr>
+        <a:xfrm>
+          <a:off x="0" y="0"/>
+          <a:ext cx="0" cy="0"/>
+          <a:chOff x="0" y="0"/>
+          <a:chExt cx="0" cy="0"/>
+        </a:xfrm>
+      </p:grpSpPr>
+      <p:sp>
+        <p:nvSpPr>
+          <p:cNvPr id="2" name="Title 1"/>
+          <p:cNvSpPr>
+            <a:spLocks noGrp="1"/>
+          </p:cNvSpPr>
+          <p:nvPr>
+            <p:ph type="title"/>
+          </p:nvPr>
+        </p:nvSpPr>
+        <p:spPr/>
+        <p:txBody>
+          <a:bodyPr/>
+          <a:lstStyle/>
+          <a:p>
+            <a:r>
+              <a:rPr lang="en-US" dirty="0"/>
+              <a:t>Primary Keys and Foreign Keys</a:t>
+            </a:r>
+          </a:p>
+        </p:txBody>
+      </p:sp>
+      <p:sp>
+        <p:nvSpPr>
+          <p:cNvPr id="5" name="Content Placeholder 4">
             <a:extLst>
               <a:ext uri="{FF2B5EF4-FFF2-40B4-BE49-F238E27FC236}">
-                <a16:creationId xmlns:a16="http://schemas.microsoft.com/office/drawing/2014/main" id="{F8B55E14-2E03-03F5-E19C-D5667BDDC8BC}"/>
+                <a16:creationId xmlns:a16="http://schemas.microsoft.com/office/drawing/2014/main" id="{0D9A157A-6EDA-4A78-ACB5-1198AA902F52}"/>
               </a:ext>
             </a:extLst>
           </p:cNvPr>
@@ -6059,86 +8174,139 @@
             <a:spLocks noGrp="1"/>
           </p:cNvSpPr>
           <p:nvPr>
-            <p:ph type="title"/>
-          </p:nvPr>
-        </p:nvSpPr>
-        <p:spPr/>
-        <p:txBody>
-          <a:bodyPr/>
-          <a:lstStyle/>
-          <a:p>
-            <a:r>
-              <a:rPr lang="en-US" dirty="0"/>
-              <a:t>Axis Scales</a:t>
-            </a:r>
-          </a:p>
-        </p:txBody>
-      </p:sp>
-      <p:sp>
-        <p:nvSpPr>
-          <p:cNvPr id="3" name="Content Placeholder 2">
-            <a:extLst>
-              <a:ext uri="{FF2B5EF4-FFF2-40B4-BE49-F238E27FC236}">
-                <a16:creationId xmlns:a16="http://schemas.microsoft.com/office/drawing/2014/main" id="{35E238C0-4902-6BB6-806C-B8E1CCA18469}"/>
-              </a:ext>
-            </a:extLst>
-          </p:cNvPr>
-          <p:cNvSpPr>
-            <a:spLocks noGrp="1"/>
-          </p:cNvSpPr>
-          <p:nvPr>
             <p:ph idx="1"/>
           </p:nvPr>
         </p:nvSpPr>
         <p:spPr>
           <a:xfrm>
             <a:off x="1451579" y="1853754"/>
-            <a:ext cx="9603275" cy="2236331"/>
+            <a:ext cx="9603275" cy="2541735"/>
           </a:xfrm>
         </p:spPr>
         <p:txBody>
-          <a:bodyPr/>
-          <a:lstStyle/>
-          <a:p>
-            <a:r>
-              <a:rPr lang="en-US" dirty="0"/>
-              <a:t>Sometimes the scales on an axis are transformed from linear. </a:t>
-            </a:r>
-          </a:p>
-          <a:p>
-            <a:r>
-              <a:rPr lang="en-US" dirty="0"/>
-              <a:t>Common changes:</a:t>
+          <a:bodyPr anchor="t">
+            <a:normAutofit lnSpcReduction="10000"/>
+          </a:bodyPr>
+          <a:lstStyle/>
+          <a:p>
+            <a:r>
+              <a:rPr lang="en-US" dirty="0"/>
+              <a:t>Keys (unique identifiers) facilitate joining (connecting) different entities together. </a:t>
             </a:r>
           </a:p>
           <a:p>
             <a:pPr lvl="1"/>
             <a:r>
               <a:rPr lang="en-US" dirty="0"/>
-              <a:t>Reversed. </a:t>
+              <a:t>The key (usually) allows for us to join data when the key matches. </a:t>
             </a:r>
           </a:p>
           <a:p>
             <a:pPr lvl="1"/>
             <a:r>
               <a:rPr lang="en-US" dirty="0"/>
-              <a:t>Logarithmic – shows linear with exponential data. </a:t>
-            </a:r>
-          </a:p>
-          <a:p>
-            <a:r>
-              <a:rPr lang="en-US" dirty="0"/>
-              <a:t>In Tableau – right click on axis to edit details. </a:t>
-            </a:r>
+              <a:t>E.g. We join data from Students and Registrations using the student ID on both. </a:t>
+            </a:r>
+          </a:p>
+          <a:p>
+            <a:r>
+              <a:rPr lang="en-US" b="1" dirty="0"/>
+              <a:t>Primary Key </a:t>
+            </a:r>
+            <a:r>
+              <a:rPr lang="en-US" dirty="0"/>
+              <a:t>– Unique identifier in each table, Transaction_ID in Transaction Table; CustomerID in Customer Table</a:t>
+            </a:r>
+          </a:p>
+          <a:p>
+            <a:r>
+              <a:rPr lang="en-US" b="1" dirty="0"/>
+              <a:t>Foreign Key </a:t>
+            </a:r>
+            <a:r>
+              <a:rPr lang="en-US" dirty="0"/>
+              <a:t>- Exist to create relationships or links between two tables</a:t>
+            </a:r>
+          </a:p>
+          <a:p>
+            <a:endParaRPr lang="en-US" dirty="0"/>
           </a:p>
         </p:txBody>
       </p:sp>
       <p:pic>
         <p:nvPicPr>
-          <p:cNvPr id="3074" name="Picture 2" descr="GraphPad Prism 10 User Guide - When to use a logarithmic axis">
+          <p:cNvPr id="7" name="Picture 6">
             <a:extLst>
               <a:ext uri="{FF2B5EF4-FFF2-40B4-BE49-F238E27FC236}">
-                <a16:creationId xmlns:a16="http://schemas.microsoft.com/office/drawing/2014/main" id="{8E54C168-ABEC-0F06-399A-5CBBBE6CFEB8}"/>
+                <a16:creationId xmlns:a16="http://schemas.microsoft.com/office/drawing/2014/main" id="{046C895E-8D8D-4FEA-AD50-53D5A88BFCB3}"/>
+              </a:ext>
+            </a:extLst>
+          </p:cNvPr>
+          <p:cNvPicPr>
+            <a:picLocks noChangeAspect="1"/>
+          </p:cNvPicPr>
+          <p:nvPr/>
+        </p:nvPicPr>
+        <p:blipFill>
+          <a:blip r:embed="rId2"/>
+          <a:stretch>
+            <a:fillRect/>
+          </a:stretch>
+        </p:blipFill>
+        <p:spPr>
+          <a:xfrm>
+            <a:off x="-45378" y="4349568"/>
+            <a:ext cx="12237378" cy="1975773"/>
+          </a:xfrm>
+          <a:prstGeom prst="rect">
+            <a:avLst/>
+          </a:prstGeom>
+        </p:spPr>
+      </p:pic>
+    </p:spTree>
+    <p:extLst>
+      <p:ext uri="{BB962C8B-B14F-4D97-AF65-F5344CB8AC3E}">
+        <p14:creationId xmlns:p14="http://schemas.microsoft.com/office/powerpoint/2010/main" val="2641674467"/>
+      </p:ext>
+    </p:extLst>
+  </p:cSld>
+  <p:clrMapOvr>
+    <a:masterClrMapping/>
+  </p:clrMapOvr>
+  <mc:AlternateContent xmlns:mc="http://schemas.openxmlformats.org/markup-compatibility/2006" xmlns:p14="http://schemas.microsoft.com/office/powerpoint/2010/main">
+    <mc:Choice Requires="p14">
+      <p:transition spd="slow" p14:dur="2000" advTm="58613"/>
+    </mc:Choice>
+    <mc:Fallback xmlns="">
+      <p:transition spd="slow" advTm="58613"/>
+    </mc:Fallback>
+  </mc:AlternateContent>
+</p:sld>
+</file>
+
+<file path=ppt/slides/slide34.xml><?xml version="1.0" encoding="utf-8"?>
+<p:sld xmlns:a="http://schemas.openxmlformats.org/drawingml/2006/main" xmlns:r="http://schemas.openxmlformats.org/officeDocument/2006/relationships" xmlns:p="http://schemas.openxmlformats.org/presentationml/2006/main">
+  <p:cSld>
+    <p:spTree>
+      <p:nvGrpSpPr>
+        <p:cNvPr id="1" name=""/>
+        <p:cNvGrpSpPr/>
+        <p:nvPr/>
+      </p:nvGrpSpPr>
+      <p:grpSpPr>
+        <a:xfrm>
+          <a:off x="0" y="0"/>
+          <a:ext cx="0" cy="0"/>
+          <a:chOff x="0" y="0"/>
+          <a:chExt cx="0" cy="0"/>
+        </a:xfrm>
+      </p:grpSpPr>
+      <p:pic>
+        <p:nvPicPr>
+          <p:cNvPr id="2050" name="Picture 2" descr="SQL JOIN (With Examples)">
+            <a:extLst>
+              <a:ext uri="{FF2B5EF4-FFF2-40B4-BE49-F238E27FC236}">
+                <a16:creationId xmlns:a16="http://schemas.microsoft.com/office/drawing/2014/main" id="{5377473A-FFAC-81D5-CFD2-44A8C675DB8F}"/>
               </a:ext>
             </a:extLst>
           </p:cNvPr>
@@ -6155,62 +8323,15 @@
               </a:ext>
             </a:extLst>
           </a:blip>
-          <a:srcRect t="6653" b="6168"/>
+          <a:srcRect t="10476"/>
           <a:stretch>
             <a:fillRect/>
           </a:stretch>
         </p:blipFill>
         <p:spPr bwMode="auto">
           <a:xfrm>
-            <a:off x="0" y="4090085"/>
-            <a:ext cx="7975600" cy="2767915"/>
-          </a:xfrm>
-          <a:prstGeom prst="rect">
-            <a:avLst/>
-          </a:prstGeom>
-          <a:noFill/>
-          <a:extLst>
-            <a:ext uri="{909E8E84-426E-40DD-AFC4-6F175D3DCCD1}">
-              <a14:hiddenFill xmlns:a14="http://schemas.microsoft.com/office/drawing/2010/main">
-                <a:solidFill>
-                  <a:srgbClr val="FFFFFF"/>
-                </a:solidFill>
-              </a14:hiddenFill>
-            </a:ext>
-          </a:extLst>
-        </p:spPr>
-      </p:pic>
-      <p:pic>
-        <p:nvPicPr>
-          <p:cNvPr id="3076" name="Picture 4" descr="Understanding the Richter Scale">
-            <a:extLst>
-              <a:ext uri="{FF2B5EF4-FFF2-40B4-BE49-F238E27FC236}">
-                <a16:creationId xmlns:a16="http://schemas.microsoft.com/office/drawing/2014/main" id="{573898B5-2E60-513C-C26B-2CF5E7D2BCF8}"/>
-              </a:ext>
-            </a:extLst>
-          </p:cNvPr>
-          <p:cNvPicPr>
-            <a:picLocks noChangeAspect="1" noChangeArrowheads="1"/>
-          </p:cNvPicPr>
-          <p:nvPr/>
-        </p:nvPicPr>
-        <p:blipFill rotWithShape="1">
-          <a:blip r:embed="rId3">
-            <a:extLst>
-              <a:ext uri="{28A0092B-C50C-407E-A947-70E740481C1C}">
-                <a14:useLocalDpi xmlns:a14="http://schemas.microsoft.com/office/drawing/2010/main" val="0"/>
-              </a:ext>
-            </a:extLst>
-          </a:blip>
-          <a:srcRect l="31367" r="7652"/>
-          <a:stretch>
-            <a:fillRect/>
-          </a:stretch>
-        </p:blipFill>
-        <p:spPr bwMode="auto">
-          <a:xfrm>
-            <a:off x="7975600" y="2434279"/>
-            <a:ext cx="4219515" cy="3892137"/>
+            <a:off x="2320925" y="0"/>
+            <a:ext cx="7550150" cy="6139543"/>
           </a:xfrm>
           <a:prstGeom prst="rect">
             <a:avLst/>
@@ -6230,7 +8351,7 @@
     </p:spTree>
     <p:extLst>
       <p:ext uri="{BB962C8B-B14F-4D97-AF65-F5344CB8AC3E}">
-        <p14:creationId xmlns:p14="http://schemas.microsoft.com/office/powerpoint/2010/main" val="3362070243"/>
+        <p14:creationId xmlns:p14="http://schemas.microsoft.com/office/powerpoint/2010/main" val="3221980487"/>
       </p:ext>
     </p:extLst>
   </p:cSld>
@@ -6240,7 +8361,7 @@
 </p:sld>
 </file>
 
-<file path=ppt/slides/slide23.xml><?xml version="1.0" encoding="utf-8"?>
+<file path=ppt/slides/slide35.xml><?xml version="1.0" encoding="utf-8"?>
 <p:sld xmlns:a="http://schemas.openxmlformats.org/drawingml/2006/main" xmlns:r="http://schemas.openxmlformats.org/officeDocument/2006/relationships" xmlns:p="http://schemas.openxmlformats.org/presentationml/2006/main">
   <p:cSld>
     <p:spTree>
@@ -6259,10 +8380,10 @@
       </p:grpSpPr>
       <p:sp>
         <p:nvSpPr>
-          <p:cNvPr id="2" name="Title 1">
+          <p:cNvPr id="3" name="Title 2">
             <a:extLst>
               <a:ext uri="{FF2B5EF4-FFF2-40B4-BE49-F238E27FC236}">
-                <a16:creationId xmlns:a16="http://schemas.microsoft.com/office/drawing/2014/main" id="{FFD77A72-D188-A819-4009-282413334096}"/>
+                <a16:creationId xmlns:a16="http://schemas.microsoft.com/office/drawing/2014/main" id="{AEF17812-7AFC-219D-E3ED-68933DCE6132}"/>
               </a:ext>
             </a:extLst>
           </p:cNvPr>
@@ -6280,17 +8401,17 @@
           <a:p>
             <a:r>
               <a:rPr lang="en-US" dirty="0"/>
-              <a:t>Conclusion</a:t>
-            </a:r>
-          </a:p>
-        </p:txBody>
-      </p:sp>
-      <p:sp>
-        <p:nvSpPr>
-          <p:cNvPr id="3" name="Content Placeholder 2">
+              <a:t>Using our Keys</a:t>
+            </a:r>
+          </a:p>
+        </p:txBody>
+      </p:sp>
+      <p:sp>
+        <p:nvSpPr>
+          <p:cNvPr id="4" name="Content Placeholder 3">
             <a:extLst>
               <a:ext uri="{FF2B5EF4-FFF2-40B4-BE49-F238E27FC236}">
-                <a16:creationId xmlns:a16="http://schemas.microsoft.com/office/drawing/2014/main" id="{FDD1E98E-AE55-6CAE-AA74-89849FF8AE85}"/>
+                <a16:creationId xmlns:a16="http://schemas.microsoft.com/office/drawing/2014/main" id="{5EFED8C5-75E4-8791-3780-98B645069D1E}"/>
               </a:ext>
             </a:extLst>
           </p:cNvPr>
@@ -6301,19 +8422,113 @@
             <p:ph idx="1"/>
           </p:nvPr>
         </p:nvSpPr>
-        <p:spPr/>
-        <p:txBody>
-          <a:bodyPr/>
-          <a:lstStyle/>
-          <a:p>
-            <a:endParaRPr lang="en-US"/>
+        <p:spPr>
+          <a:xfrm>
+            <a:off x="1451579" y="2093842"/>
+            <a:ext cx="9603275" cy="3890905"/>
+          </a:xfrm>
+        </p:spPr>
+        <p:txBody>
+          <a:bodyPr>
+            <a:normAutofit fontScale="92500" lnSpcReduction="10000"/>
+          </a:bodyPr>
+          <a:lstStyle/>
+          <a:p>
+            <a:pPr marL="342900" indent="-342900">
+              <a:buFont typeface="Arial" panose="020B0604020202020204" pitchFamily="34" charset="0"/>
+              <a:buChar char="•"/>
+            </a:pPr>
+            <a:r>
+              <a:rPr lang="en-US" dirty="0"/>
+              <a:t>The keys are the key to connecting entities. </a:t>
+            </a:r>
+          </a:p>
+          <a:p>
+            <a:pPr marL="342900" indent="-342900">
+              <a:buFont typeface="Arial" panose="020B0604020202020204" pitchFamily="34" charset="0"/>
+              <a:buChar char="•"/>
+            </a:pPr>
+            <a:r>
+              <a:rPr lang="en-US" dirty="0"/>
+              <a:t>Entity-relationship structure requires dividing data. </a:t>
+            </a:r>
+          </a:p>
+          <a:p>
+            <a:pPr marL="845820" lvl="1" indent="-342900">
+              <a:buFont typeface="Arial" panose="020B0604020202020204" pitchFamily="34" charset="0"/>
+              <a:buChar char="•"/>
+            </a:pPr>
+            <a:r>
+              <a:rPr lang="en-US" dirty="0"/>
+              <a:t>Each “thing” is stored in its own table. </a:t>
+            </a:r>
+          </a:p>
+          <a:p>
+            <a:pPr marL="342900" indent="-342900">
+              <a:buFont typeface="Arial" panose="020B0604020202020204" pitchFamily="34" charset="0"/>
+              <a:buChar char="•"/>
+            </a:pPr>
+            <a:r>
+              <a:rPr lang="en-US" dirty="0"/>
+              <a:t>Relationships are how those entities are joined. </a:t>
+            </a:r>
+          </a:p>
+          <a:p>
+            <a:pPr marL="342900" indent="-342900">
+              <a:buFont typeface="Arial" panose="020B0604020202020204" pitchFamily="34" charset="0"/>
+              <a:buChar char="•"/>
+            </a:pPr>
+            <a:r>
+              <a:rPr lang="en-US" dirty="0"/>
+              <a:t>Keys allow us to connect entities correctly. </a:t>
+            </a:r>
+          </a:p>
+          <a:p>
+            <a:pPr marL="845820" lvl="1" indent="-342900">
+              <a:buFont typeface="Arial" panose="020B0604020202020204" pitchFamily="34" charset="0"/>
+              <a:buChar char="•"/>
+            </a:pPr>
+            <a:r>
+              <a:rPr lang="en-US" dirty="0"/>
+              <a:t>We can look up the part of the other table to connect. </a:t>
+            </a:r>
+          </a:p>
+          <a:p>
+            <a:pPr marL="845820" lvl="1" indent="-342900">
+              <a:buFont typeface="Arial" panose="020B0604020202020204" pitchFamily="34" charset="0"/>
+              <a:buChar char="•"/>
+            </a:pPr>
+            <a:r>
+              <a:rPr lang="en-US" dirty="0"/>
+              <a:t>E.g. your transcript is looking up your ID from the “registrations” table. The foreign key in that table is the ID. </a:t>
+            </a:r>
+          </a:p>
+          <a:p>
+            <a:pPr marL="845820" lvl="1" indent="-342900">
+              <a:buFont typeface="Arial" panose="020B0604020202020204" pitchFamily="34" charset="0"/>
+              <a:buChar char="•"/>
+            </a:pPr>
+            <a:r>
+              <a:rPr lang="en-US" dirty="0"/>
+              <a:t>We find the student, then look up all the matching courses you’ve registered in and completed. </a:t>
+            </a:r>
+          </a:p>
+          <a:p>
+            <a:pPr marL="342900" indent="-342900">
+              <a:buFont typeface="Arial" panose="020B0604020202020204" pitchFamily="34" charset="0"/>
+              <a:buChar char="•"/>
+            </a:pPr>
+            <a:r>
+              <a:rPr lang="en-US" dirty="0"/>
+              <a:t>Joins are possible without connecting keys, but more rare. </a:t>
+            </a:r>
           </a:p>
         </p:txBody>
       </p:sp>
     </p:spTree>
     <p:extLst>
       <p:ext uri="{BB962C8B-B14F-4D97-AF65-F5344CB8AC3E}">
-        <p14:creationId xmlns:p14="http://schemas.microsoft.com/office/powerpoint/2010/main" val="1960139384"/>
+        <p14:creationId xmlns:p14="http://schemas.microsoft.com/office/powerpoint/2010/main" val="2673803790"/>
       </p:ext>
     </p:extLst>
   </p:cSld>
@@ -6323,7 +8538,7 @@
 </p:sld>
 </file>
 
-<file path=ppt/slides/slide3.xml><?xml version="1.0" encoding="utf-8"?>
+<file path=ppt/slides/slide36.xml><?xml version="1.0" encoding="utf-8"?>
 <p:sld xmlns:a="http://schemas.openxmlformats.org/drawingml/2006/main" xmlns:r="http://schemas.openxmlformats.org/officeDocument/2006/relationships" xmlns:p="http://schemas.openxmlformats.org/presentationml/2006/main">
   <p:cSld>
     <p:spTree>
@@ -6345,7 +8560,7 @@
           <p:cNvPr id="2" name="Title 1">
             <a:extLst>
               <a:ext uri="{FF2B5EF4-FFF2-40B4-BE49-F238E27FC236}">
-                <a16:creationId xmlns:a16="http://schemas.microsoft.com/office/drawing/2014/main" id="{31E8DBB4-B120-D042-A2C7-A8512708EABA}"/>
+                <a16:creationId xmlns:a16="http://schemas.microsoft.com/office/drawing/2014/main" id="{3EB7C82C-C396-92B3-66B9-587A13DCB78A}"/>
               </a:ext>
             </a:extLst>
           </p:cNvPr>
@@ -6363,7 +8578,7 @@
           <a:p>
             <a:r>
               <a:rPr lang="en-US" dirty="0"/>
-              <a:t>But if We Visualize them</a:t>
+              <a:t>In Practice…</a:t>
             </a:r>
           </a:p>
         </p:txBody>
@@ -6373,7 +8588,7 @@
           <p:cNvPr id="3" name="Content Placeholder 2">
             <a:extLst>
               <a:ext uri="{FF2B5EF4-FFF2-40B4-BE49-F238E27FC236}">
-                <a16:creationId xmlns:a16="http://schemas.microsoft.com/office/drawing/2014/main" id="{DD78EF90-6539-ABFC-9AEF-A98CE9B3E5F0}"/>
+                <a16:creationId xmlns:a16="http://schemas.microsoft.com/office/drawing/2014/main" id="{710339AC-D4D2-2C85-6AA1-247F31A810B9}"/>
               </a:ext>
             </a:extLst>
           </p:cNvPr>
@@ -6384,66 +8599,87 @@
             <p:ph idx="1"/>
           </p:nvPr>
         </p:nvSpPr>
-        <p:spPr/>
+        <p:spPr>
+          <a:xfrm>
+            <a:off x="1451579" y="1853754"/>
+            <a:ext cx="9603275" cy="4199727"/>
+          </a:xfrm>
+        </p:spPr>
         <p:txBody>
           <a:bodyPr/>
           <a:lstStyle/>
           <a:p>
-            <a:endParaRPr lang="en-US"/>
-          </a:p>
-        </p:txBody>
-      </p:sp>
-      <p:pic>
-        <p:nvPicPr>
-          <p:cNvPr id="2050" name="Picture 2" descr="Anscombe's quartet - Wikipedia">
-            <a:extLst>
-              <a:ext uri="{FF2B5EF4-FFF2-40B4-BE49-F238E27FC236}">
-                <a16:creationId xmlns:a16="http://schemas.microsoft.com/office/drawing/2014/main" id="{34090B7A-D9B5-AD88-1597-A0C7D0DB4EC2}"/>
-              </a:ext>
-            </a:extLst>
-          </p:cNvPr>
-          <p:cNvPicPr>
-            <a:picLocks noChangeAspect="1" noChangeArrowheads="1"/>
-          </p:cNvPicPr>
-          <p:nvPr/>
-        </p:nvPicPr>
-        <p:blipFill>
-          <a:blip r:embed="rId2">
-            <a:extLst>
-              <a:ext uri="{28A0092B-C50C-407E-A947-70E740481C1C}">
-                <a14:useLocalDpi xmlns:a14="http://schemas.microsoft.com/office/drawing/2010/main" val="0"/>
-              </a:ext>
-            </a:extLst>
-          </a:blip>
-          <a:srcRect/>
-          <a:stretch>
-            <a:fillRect/>
-          </a:stretch>
-        </p:blipFill>
-        <p:spPr bwMode="auto">
-          <a:xfrm>
-            <a:off x="2382996" y="1455448"/>
-            <a:ext cx="7426008" cy="5402552"/>
-          </a:xfrm>
-          <a:prstGeom prst="rect">
-            <a:avLst/>
-          </a:prstGeom>
-          <a:noFill/>
-          <a:extLst>
-            <a:ext uri="{909E8E84-426E-40DD-AFC4-6F175D3DCCD1}">
-              <a14:hiddenFill xmlns:a14="http://schemas.microsoft.com/office/drawing/2010/main">
-                <a:solidFill>
-                  <a:srgbClr val="FFFFFF"/>
-                </a:solidFill>
-              </a14:hiddenFill>
-            </a:ext>
-          </a:extLst>
-        </p:spPr>
-      </p:pic>
+            <a:r>
+              <a:rPr lang="en-US" dirty="0"/>
+              <a:t>In most cases, in real life usage, we will have some central database (a data warehouse). </a:t>
+            </a:r>
+          </a:p>
+          <a:p>
+            <a:r>
+              <a:rPr lang="en-US" dirty="0"/>
+              <a:t>Many systems that generate data (sales, website, HR, </a:t>
+            </a:r>
+            <a:r>
+              <a:rPr lang="en-US" dirty="0" err="1"/>
+              <a:t>etc</a:t>
+            </a:r>
+            <a:r>
+              <a:rPr lang="en-US" dirty="0"/>
+              <a:t>…) will dump data in. </a:t>
+            </a:r>
+          </a:p>
+          <a:p>
+            <a:pPr lvl="1"/>
+            <a:r>
+              <a:rPr lang="en-US" dirty="0"/>
+              <a:t>There is an ETL process (later) to move the data in. </a:t>
+            </a:r>
+          </a:p>
+          <a:p>
+            <a:r>
+              <a:rPr lang="en-US" dirty="0"/>
+              <a:t>This warehouse is effectively a central repository of all data. </a:t>
+            </a:r>
+          </a:p>
+          <a:p>
+            <a:r>
+              <a:rPr lang="en-US" dirty="0"/>
+              <a:t>When doing analysis, we connect to that warehouse and slice out what we need. </a:t>
+            </a:r>
+          </a:p>
+          <a:p>
+            <a:pPr lvl="1"/>
+            <a:r>
+              <a:rPr lang="en-US" dirty="0"/>
+              <a:t>Join together the tables that hold the parts we care about. </a:t>
+            </a:r>
+          </a:p>
+          <a:p>
+            <a:pPr lvl="1"/>
+            <a:r>
+              <a:rPr lang="en-US" dirty="0"/>
+              <a:t>Slice out the relevant columns that are useful. </a:t>
+            </a:r>
+          </a:p>
+          <a:p>
+            <a:pPr lvl="1"/>
+            <a:r>
+              <a:rPr lang="en-US" dirty="0"/>
+              <a:t>This is more or less what we get in many Kaggle downloads. </a:t>
+            </a:r>
+          </a:p>
+          <a:p>
+            <a:r>
+              <a:rPr lang="en-US" dirty="0"/>
+              <a:t>Setting up the starting point of the data is often/usually work, not just adding a csv!</a:t>
+            </a:r>
+          </a:p>
+        </p:txBody>
+      </p:sp>
     </p:spTree>
     <p:extLst>
       <p:ext uri="{BB962C8B-B14F-4D97-AF65-F5344CB8AC3E}">
-        <p14:creationId xmlns:p14="http://schemas.microsoft.com/office/powerpoint/2010/main" val="4113695421"/>
+        <p14:creationId xmlns:p14="http://schemas.microsoft.com/office/powerpoint/2010/main" val="2645790915"/>
       </p:ext>
     </p:extLst>
   </p:cSld>
@@ -6453,289 +8689,7 @@
 </p:sld>
 </file>
 
-<file path=ppt/slides/slide4.xml><?xml version="1.0" encoding="utf-8"?>
-<p:sld xmlns:a="http://schemas.openxmlformats.org/drawingml/2006/main" xmlns:r="http://schemas.openxmlformats.org/officeDocument/2006/relationships" xmlns:p="http://schemas.openxmlformats.org/presentationml/2006/main">
-  <p:cSld>
-    <p:spTree>
-      <p:nvGrpSpPr>
-        <p:cNvPr id="1" name=""/>
-        <p:cNvGrpSpPr/>
-        <p:nvPr/>
-      </p:nvGrpSpPr>
-      <p:grpSpPr>
-        <a:xfrm>
-          <a:off x="0" y="0"/>
-          <a:ext cx="0" cy="0"/>
-          <a:chOff x="0" y="0"/>
-          <a:chExt cx="0" cy="0"/>
-        </a:xfrm>
-      </p:grpSpPr>
-      <p:sp>
-        <p:nvSpPr>
-          <p:cNvPr id="2" name="Title 1">
-            <a:extLst>
-              <a:ext uri="{FF2B5EF4-FFF2-40B4-BE49-F238E27FC236}">
-                <a16:creationId xmlns:a16="http://schemas.microsoft.com/office/drawing/2014/main" id="{4EDE3C09-89C8-C337-77C3-E1EE64093359}"/>
-              </a:ext>
-            </a:extLst>
-          </p:cNvPr>
-          <p:cNvSpPr>
-            <a:spLocks noGrp="1"/>
-          </p:cNvSpPr>
-          <p:nvPr>
-            <p:ph type="title"/>
-          </p:nvPr>
-        </p:nvSpPr>
-        <p:spPr/>
-        <p:txBody>
-          <a:bodyPr/>
-          <a:lstStyle/>
-          <a:p>
-            <a:r>
-              <a:rPr lang="en-US" dirty="0"/>
-              <a:t>What is Going on Here? Chaos!</a:t>
-            </a:r>
-          </a:p>
-        </p:txBody>
-      </p:sp>
-      <p:sp>
-        <p:nvSpPr>
-          <p:cNvPr id="3" name="Content Placeholder 2">
-            <a:extLst>
-              <a:ext uri="{FF2B5EF4-FFF2-40B4-BE49-F238E27FC236}">
-                <a16:creationId xmlns:a16="http://schemas.microsoft.com/office/drawing/2014/main" id="{BB3CDEB5-DDC9-EE74-758C-7586C98E1B16}"/>
-              </a:ext>
-            </a:extLst>
-          </p:cNvPr>
-          <p:cNvSpPr>
-            <a:spLocks noGrp="1"/>
-          </p:cNvSpPr>
-          <p:nvPr>
-            <p:ph idx="1"/>
-          </p:nvPr>
-        </p:nvSpPr>
-        <p:spPr>
-          <a:xfrm>
-            <a:off x="1451579" y="2015732"/>
-            <a:ext cx="9603275" cy="4037749"/>
-          </a:xfrm>
-        </p:spPr>
-        <p:txBody>
-          <a:bodyPr/>
-          <a:lstStyle/>
-          <a:p>
-            <a:r>
-              <a:rPr lang="en-US" dirty="0"/>
-              <a:t>We have a lot of data. </a:t>
-            </a:r>
-          </a:p>
-          <a:p>
-            <a:r>
-              <a:rPr lang="en-US" dirty="0"/>
-              <a:t>We can analyze that data in many different ways. </a:t>
-            </a:r>
-          </a:p>
-          <a:p>
-            <a:r>
-              <a:rPr lang="en-US" dirty="0"/>
-              <a:t>The type of analysis we do will change what we can learn from our data. </a:t>
-            </a:r>
-          </a:p>
-          <a:p>
-            <a:r>
-              <a:rPr lang="en-US" dirty="0"/>
-              <a:t>Visual analysis is powerful because it can help us see things that are difficult otherwise. </a:t>
-            </a:r>
-          </a:p>
-          <a:p>
-            <a:r>
-              <a:rPr lang="en-US" dirty="0"/>
-              <a:t>To analyze data well (like if this was your job):</a:t>
-            </a:r>
-          </a:p>
-          <a:p>
-            <a:pPr lvl="1"/>
-            <a:r>
-              <a:rPr lang="en-US" dirty="0"/>
-              <a:t>We need a toolkit of analytical tools, of which visualization is an important one. </a:t>
-            </a:r>
-          </a:p>
-          <a:p>
-            <a:pPr lvl="1"/>
-            <a:r>
-              <a:rPr lang="en-US" dirty="0"/>
-              <a:t>We need to ensure we present data in a way that allows us to see what we care about. </a:t>
-            </a:r>
-          </a:p>
-        </p:txBody>
-      </p:sp>
-    </p:spTree>
-    <p:extLst>
-      <p:ext uri="{BB962C8B-B14F-4D97-AF65-F5344CB8AC3E}">
-        <p14:creationId xmlns:p14="http://schemas.microsoft.com/office/powerpoint/2010/main" val="2389286841"/>
-      </p:ext>
-    </p:extLst>
-  </p:cSld>
-  <p:clrMapOvr>
-    <a:masterClrMapping/>
-  </p:clrMapOvr>
-</p:sld>
-</file>
-
-<file path=ppt/slides/slide5.xml><?xml version="1.0" encoding="utf-8"?>
-<p:sld xmlns:a="http://schemas.openxmlformats.org/drawingml/2006/main" xmlns:r="http://schemas.openxmlformats.org/officeDocument/2006/relationships" xmlns:p="http://schemas.openxmlformats.org/presentationml/2006/main">
-  <p:cSld>
-    <p:spTree>
-      <p:nvGrpSpPr>
-        <p:cNvPr id="1" name=""/>
-        <p:cNvGrpSpPr/>
-        <p:nvPr/>
-      </p:nvGrpSpPr>
-      <p:grpSpPr>
-        <a:xfrm>
-          <a:off x="0" y="0"/>
-          <a:ext cx="0" cy="0"/>
-          <a:chOff x="0" y="0"/>
-          <a:chExt cx="0" cy="0"/>
-        </a:xfrm>
-      </p:grpSpPr>
-      <p:sp>
-        <p:nvSpPr>
-          <p:cNvPr id="2" name="Title 1">
-            <a:extLst>
-              <a:ext uri="{FF2B5EF4-FFF2-40B4-BE49-F238E27FC236}">
-                <a16:creationId xmlns:a16="http://schemas.microsoft.com/office/drawing/2014/main" id="{E0843ED3-56F8-1B98-CFE4-DA416007B797}"/>
-              </a:ext>
-            </a:extLst>
-          </p:cNvPr>
-          <p:cNvSpPr>
-            <a:spLocks noGrp="1"/>
-          </p:cNvSpPr>
-          <p:nvPr>
-            <p:ph type="title"/>
-          </p:nvPr>
-        </p:nvSpPr>
-        <p:spPr/>
-        <p:txBody>
-          <a:bodyPr/>
-          <a:lstStyle/>
-          <a:p>
-            <a:r>
-              <a:rPr lang="en-US" dirty="0"/>
-              <a:t>Encoding vs Decoding</a:t>
-            </a:r>
-          </a:p>
-        </p:txBody>
-      </p:sp>
-      <p:sp>
-        <p:nvSpPr>
-          <p:cNvPr id="3" name="Content Placeholder 2">
-            <a:extLst>
-              <a:ext uri="{FF2B5EF4-FFF2-40B4-BE49-F238E27FC236}">
-                <a16:creationId xmlns:a16="http://schemas.microsoft.com/office/drawing/2014/main" id="{350037FC-109E-8375-5DE1-6B4522717FA4}"/>
-              </a:ext>
-            </a:extLst>
-          </p:cNvPr>
-          <p:cNvSpPr>
-            <a:spLocks noGrp="1"/>
-          </p:cNvSpPr>
-          <p:nvPr>
-            <p:ph idx="1"/>
-          </p:nvPr>
-        </p:nvSpPr>
-        <p:spPr>
-          <a:xfrm>
-            <a:off x="1451579" y="1853754"/>
-            <a:ext cx="9603275" cy="4199727"/>
-          </a:xfrm>
-        </p:spPr>
-        <p:txBody>
-          <a:bodyPr>
-            <a:normAutofit lnSpcReduction="10000"/>
-          </a:bodyPr>
-          <a:lstStyle/>
-          <a:p>
-            <a:r>
-              <a:rPr lang="en-US" dirty="0"/>
-              <a:t>Encode. </a:t>
-            </a:r>
-          </a:p>
-          <a:p>
-            <a:pPr lvl="1"/>
-            <a:r>
-              <a:rPr lang="en-US" dirty="0"/>
-              <a:t>We have a bunch of data to analyze and sort through. </a:t>
-            </a:r>
-          </a:p>
-          <a:p>
-            <a:pPr lvl="1"/>
-            <a:r>
-              <a:rPr lang="en-US" dirty="0"/>
-              <a:t>We will create a visual representation of that in our charts – encoding. </a:t>
-            </a:r>
-          </a:p>
-          <a:p>
-            <a:r>
-              <a:rPr lang="en-US" dirty="0"/>
-              <a:t>Decode. </a:t>
-            </a:r>
-          </a:p>
-          <a:p>
-            <a:pPr lvl="1"/>
-            <a:r>
-              <a:rPr lang="en-US" dirty="0"/>
-              <a:t>The reader will look at our visualization to get the information – decoding. </a:t>
-            </a:r>
-          </a:p>
-          <a:p>
-            <a:pPr lvl="1"/>
-            <a:r>
-              <a:rPr lang="en-US" dirty="0"/>
-              <a:t>We want to make sure that they get what we intended. </a:t>
-            </a:r>
-          </a:p>
-          <a:p>
-            <a:pPr lvl="1"/>
-            <a:r>
-              <a:rPr lang="en-US" dirty="0"/>
-              <a:t>We also want to make that as easy, or friction free, as possible. </a:t>
-            </a:r>
-          </a:p>
-          <a:p>
-            <a:r>
-              <a:rPr lang="en-US" dirty="0"/>
-              <a:t>We translate data into charts, the reader transforms charts into info/knowledge. </a:t>
-            </a:r>
-          </a:p>
-          <a:p>
-            <a:pPr lvl="1"/>
-            <a:r>
-              <a:rPr lang="en-US" dirty="0"/>
-              <a:t>The better we are, the better this works. </a:t>
-            </a:r>
-          </a:p>
-          <a:p>
-            <a:r>
-              <a:rPr lang="en-US" dirty="0"/>
-              <a:t>Also don’t want to accidentally encode info - order, size, shade may convey meaning. </a:t>
-            </a:r>
-          </a:p>
-        </p:txBody>
-      </p:sp>
-    </p:spTree>
-    <p:extLst>
-      <p:ext uri="{BB962C8B-B14F-4D97-AF65-F5344CB8AC3E}">
-        <p14:creationId xmlns:p14="http://schemas.microsoft.com/office/powerpoint/2010/main" val="3236604726"/>
-      </p:ext>
-    </p:extLst>
-  </p:cSld>
-  <p:clrMapOvr>
-    <a:masterClrMapping/>
-  </p:clrMapOvr>
-</p:sld>
-</file>
-
-<file path=ppt/slides/slide6.xml><?xml version="1.0" encoding="utf-8"?>
+<file path=ppt/slides/slide37.xml><?xml version="1.0" encoding="utf-8"?>
 <p:sld xmlns:a="http://schemas.openxmlformats.org/drawingml/2006/main" xmlns:r="http://schemas.openxmlformats.org/officeDocument/2006/relationships" xmlns:p="http://schemas.openxmlformats.org/presentationml/2006/main">
   <p:cSld>
     <p:bg>
@@ -6778,14 +8732,327 @@
       </p:grpSpPr>
       <p:sp>
         <p:nvSpPr>
-          <p:cNvPr id="2" name="Title 1">
+          <p:cNvPr id="10" name="Rectangle 9">
             <a:extLst>
               <a:ext uri="{FF2B5EF4-FFF2-40B4-BE49-F238E27FC236}">
-                <a16:creationId xmlns:a16="http://schemas.microsoft.com/office/drawing/2014/main" id="{B8BAED8F-D7B6-00DA-9BB9-CC467AFA3F80}"/>
+                <a16:creationId xmlns:a16="http://schemas.microsoft.com/office/drawing/2014/main" id="{1CE580D1-F917-4567-AFB4-99AA9B52ADF0}"/>
+              </a:ext>
+              <a:ext uri="{C183D7F6-B498-43B3-948B-1728B52AA6E4}">
+                <adec:decorative xmlns:adec="http://schemas.microsoft.com/office/drawing/2017/decorative" val="1"/>
               </a:ext>
             </a:extLst>
           </p:cNvPr>
           <p:cNvSpPr>
+            <a:spLocks noGrp="1" noRot="1" noChangeAspect="1" noMove="1" noResize="1" noEditPoints="1" noAdjustHandles="1" noChangeArrowheads="1" noChangeShapeType="1" noTextEdit="1"/>
+          </p:cNvSpPr>
+          <p:nvPr>
+            <p:extLst>
+              <p:ext uri="{386F3935-93C4-4BCD-93E2-E3B085C9AB24}">
+                <p16:designElem xmlns:p16="http://schemas.microsoft.com/office/powerpoint/2015/main" val="1"/>
+              </p:ext>
+            </p:extLst>
+          </p:nvPr>
+        </p:nvSpPr>
+        <p:spPr>
+          <a:xfrm>
+            <a:off x="0" y="2019476"/>
+            <a:ext cx="12192000" cy="4105941"/>
+          </a:xfrm>
+          <a:prstGeom prst="rect">
+            <a:avLst/>
+          </a:prstGeom>
+          <a:gradFill flip="none" rotWithShape="1">
+            <a:gsLst>
+              <a:gs pos="0">
+                <a:schemeClr val="bg2">
+                  <a:alpha val="0"/>
+                </a:schemeClr>
+              </a:gs>
+              <a:gs pos="100000">
+                <a:schemeClr val="bg2"/>
+              </a:gs>
+            </a:gsLst>
+            <a:lin ang="5400000" scaled="0"/>
+            <a:tileRect/>
+          </a:gradFill>
+          <a:ln>
+            <a:noFill/>
+          </a:ln>
+        </p:spPr>
+        <p:style>
+          <a:lnRef idx="2">
+            <a:schemeClr val="accent1">
+              <a:shade val="50000"/>
+            </a:schemeClr>
+          </a:lnRef>
+          <a:fillRef idx="1">
+            <a:schemeClr val="accent1"/>
+          </a:fillRef>
+          <a:effectRef idx="0">
+            <a:schemeClr val="accent1"/>
+          </a:effectRef>
+          <a:fontRef idx="minor">
+            <a:schemeClr val="lt1"/>
+          </a:fontRef>
+        </p:style>
+        <p:txBody>
+          <a:bodyPr/>
+          <a:lstStyle/>
+          <a:p>
+            <a:endParaRPr lang="en-US"/>
+          </a:p>
+        </p:txBody>
+      </p:sp>
+      <p:pic>
+        <p:nvPicPr>
+          <p:cNvPr id="12" name="Picture 11">
+            <a:extLst>
+              <a:ext uri="{FF2B5EF4-FFF2-40B4-BE49-F238E27FC236}">
+                <a16:creationId xmlns:a16="http://schemas.microsoft.com/office/drawing/2014/main" id="{1F5620B8-A2D8-4568-B566-F0453A0D9167}"/>
+              </a:ext>
+              <a:ext uri="{C183D7F6-B498-43B3-948B-1728B52AA6E4}">
+                <adec:decorative xmlns:adec="http://schemas.microsoft.com/office/drawing/2017/decorative" val="1"/>
+              </a:ext>
+            </a:extLst>
+          </p:cNvPr>
+          <p:cNvPicPr>
+            <a:picLocks noGrp="1" noRot="1" noChangeAspect="1" noMove="1" noResize="1" noEditPoints="1" noAdjustHandles="1" noChangeArrowheads="1" noChangeShapeType="1" noCrop="1"/>
+          </p:cNvPicPr>
+          <p:nvPr>
+            <p:extLst>
+              <p:ext uri="{386F3935-93C4-4BCD-93E2-E3B085C9AB24}">
+                <p16:designElem xmlns:p16="http://schemas.microsoft.com/office/powerpoint/2015/main" val="1"/>
+              </p:ext>
+            </p:extLst>
+          </p:nvPr>
+        </p:nvPicPr>
+        <p:blipFill rotWithShape="1">
+          <a:blip r:embed="rId2">
+            <a:extLst>
+              <a:ext uri="{28A0092B-C50C-407E-A947-70E740481C1C}">
+                <a14:useLocalDpi xmlns:a14="http://schemas.microsoft.com/office/drawing/2010/main" val="0"/>
+              </a:ext>
+            </a:extLst>
+          </a:blip>
+          <a:srcRect t="1538" b="-1538"/>
+          <a:stretch/>
+        </p:blipFill>
+        <p:spPr bwMode="black">
+          <a:xfrm>
+            <a:off x="0" y="6126480"/>
+            <a:ext cx="12192000" cy="742950"/>
+          </a:xfrm>
+          <a:prstGeom prst="rect">
+            <a:avLst/>
+          </a:prstGeom>
+        </p:spPr>
+      </p:pic>
+      <p:cxnSp>
+        <p:nvCxnSpPr>
+          <p:cNvPr id="14" name="Straight Connector 13">
+            <a:extLst>
+              <a:ext uri="{FF2B5EF4-FFF2-40B4-BE49-F238E27FC236}">
+                <a16:creationId xmlns:a16="http://schemas.microsoft.com/office/drawing/2014/main" id="{1C7D2BA4-4B7A-4596-8BCC-5CF715423894}"/>
+              </a:ext>
+              <a:ext uri="{C183D7F6-B498-43B3-948B-1728B52AA6E4}">
+                <adec:decorative xmlns:adec="http://schemas.microsoft.com/office/drawing/2017/decorative" val="1"/>
+              </a:ext>
+            </a:extLst>
+          </p:cNvPr>
+          <p:cNvCxnSpPr>
+            <a:cxnSpLocks noGrp="1" noRot="1" noChangeAspect="1" noMove="1" noResize="1" noEditPoints="1" noAdjustHandles="1" noChangeArrowheads="1" noChangeShapeType="1"/>
+          </p:cNvCxnSpPr>
+          <p:nvPr>
+            <p:extLst>
+              <p:ext uri="{386F3935-93C4-4BCD-93E2-E3B085C9AB24}">
+                <p16:designElem xmlns:p16="http://schemas.microsoft.com/office/powerpoint/2015/main" val="1"/>
+              </p:ext>
+            </p:extLst>
+          </p:nvPr>
+        </p:nvCxnSpPr>
+        <p:spPr>
+          <a:xfrm>
+            <a:off x="0" y="6128413"/>
+            <a:ext cx="12192000" cy="0"/>
+          </a:xfrm>
+          <a:prstGeom prst="line">
+            <a:avLst/>
+          </a:prstGeom>
+          <a:ln w="12700">
+            <a:solidFill>
+              <a:srgbClr val="000001">
+                <a:alpha val="20000"/>
+              </a:srgbClr>
+            </a:solidFill>
+          </a:ln>
+        </p:spPr>
+        <p:style>
+          <a:lnRef idx="1">
+            <a:schemeClr val="accent1"/>
+          </a:lnRef>
+          <a:fillRef idx="0">
+            <a:schemeClr val="accent1"/>
+          </a:fillRef>
+          <a:effectRef idx="0">
+            <a:schemeClr val="accent1"/>
+          </a:effectRef>
+          <a:fontRef idx="minor">
+            <a:schemeClr val="tx1"/>
+          </a:fontRef>
+        </p:style>
+      </p:cxnSp>
+      <p:cxnSp>
+        <p:nvCxnSpPr>
+          <p:cNvPr id="16" name="Straight Connector 15">
+            <a:extLst>
+              <a:ext uri="{FF2B5EF4-FFF2-40B4-BE49-F238E27FC236}">
+                <a16:creationId xmlns:a16="http://schemas.microsoft.com/office/drawing/2014/main" id="{4977F1E1-2B6F-4BB6-899F-67D8764D83C5}"/>
+              </a:ext>
+              <a:ext uri="{C183D7F6-B498-43B3-948B-1728B52AA6E4}">
+                <adec:decorative xmlns:adec="http://schemas.microsoft.com/office/drawing/2017/decorative" val="1"/>
+              </a:ext>
+            </a:extLst>
+          </p:cNvPr>
+          <p:cNvCxnSpPr>
+            <a:cxnSpLocks noGrp="1" noRot="1" noChangeAspect="1" noMove="1" noResize="1" noEditPoints="1" noAdjustHandles="1" noChangeArrowheads="1" noChangeShapeType="1"/>
+          </p:cNvCxnSpPr>
+          <p:nvPr>
+            <p:extLst>
+              <p:ext uri="{386F3935-93C4-4BCD-93E2-E3B085C9AB24}">
+                <p16:designElem xmlns:p16="http://schemas.microsoft.com/office/powerpoint/2015/main" val="1"/>
+              </p:ext>
+            </p:extLst>
+          </p:nvPr>
+        </p:nvCxnSpPr>
+        <p:spPr>
+          <a:xfrm>
+            <a:off x="2417780" y="3528542"/>
+            <a:ext cx="8637072" cy="0"/>
+          </a:xfrm>
+          <a:prstGeom prst="line">
+            <a:avLst/>
+          </a:prstGeom>
+          <a:ln w="31750"/>
+        </p:spPr>
+        <p:style>
+          <a:lnRef idx="3">
+            <a:schemeClr val="accent1"/>
+          </a:lnRef>
+          <a:fillRef idx="0">
+            <a:schemeClr val="accent1"/>
+          </a:fillRef>
+          <a:effectRef idx="2">
+            <a:schemeClr val="accent1"/>
+          </a:effectRef>
+          <a:fontRef idx="minor">
+            <a:schemeClr val="tx1"/>
+          </a:fontRef>
+        </p:style>
+      </p:cxnSp>
+      <p:pic>
+        <p:nvPicPr>
+          <p:cNvPr id="6" name="Picture 5" descr="Financial graphs on a dark display">
+            <a:extLst>
+              <a:ext uri="{FF2B5EF4-FFF2-40B4-BE49-F238E27FC236}">
+                <a16:creationId xmlns:a16="http://schemas.microsoft.com/office/drawing/2014/main" id="{C41BE355-D75E-3F0D-AB57-95266AE95C8A}"/>
+              </a:ext>
+            </a:extLst>
+          </p:cNvPr>
+          <p:cNvPicPr>
+            <a:picLocks noChangeAspect="1"/>
+          </p:cNvPicPr>
+          <p:nvPr/>
+        </p:nvPicPr>
+        <p:blipFill>
+          <a:blip r:embed="rId3"/>
+          <a:srcRect t="9998" r="-1" b="-1"/>
+          <a:stretch>
+            <a:fillRect/>
+          </a:stretch>
+        </p:blipFill>
+        <p:spPr>
+          <a:xfrm>
+            <a:off x="2" y="10"/>
+            <a:ext cx="12191695" cy="6857990"/>
+          </a:xfrm>
+          <a:prstGeom prst="rect">
+            <a:avLst/>
+          </a:prstGeom>
+        </p:spPr>
+      </p:pic>
+      <p:sp>
+        <p:nvSpPr>
+          <p:cNvPr id="18" name="Rectangle 17">
+            <a:extLst>
+              <a:ext uri="{FF2B5EF4-FFF2-40B4-BE49-F238E27FC236}">
+                <a16:creationId xmlns:a16="http://schemas.microsoft.com/office/drawing/2014/main" id="{6A0FFA78-985C-4F50-B21A-77045C7DF657}"/>
+              </a:ext>
+              <a:ext uri="{C183D7F6-B498-43B3-948B-1728B52AA6E4}">
+                <adec:decorative xmlns:adec="http://schemas.microsoft.com/office/drawing/2017/decorative" val="1"/>
+              </a:ext>
+            </a:extLst>
+          </p:cNvPr>
+          <p:cNvSpPr>
+            <a:spLocks noGrp="1" noRot="1" noChangeAspect="1" noMove="1" noResize="1" noEditPoints="1" noAdjustHandles="1" noChangeArrowheads="1" noChangeShapeType="1" noTextEdit="1"/>
+          </p:cNvSpPr>
+          <p:nvPr>
+            <p:extLst>
+              <p:ext uri="{386F3935-93C4-4BCD-93E2-E3B085C9AB24}">
+                <p16:designElem xmlns:p16="http://schemas.microsoft.com/office/powerpoint/2015/main" val="1"/>
+              </p:ext>
+            </p:extLst>
+          </p:nvPr>
+        </p:nvSpPr>
+        <p:spPr>
+          <a:xfrm>
+            <a:off x="3896786" y="3064931"/>
+            <a:ext cx="8295215" cy="2488568"/>
+          </a:xfrm>
+          <a:prstGeom prst="rect">
+            <a:avLst/>
+          </a:prstGeom>
+          <a:solidFill>
+            <a:srgbClr val="000001">
+              <a:alpha val="75000"/>
+            </a:srgbClr>
+          </a:solidFill>
+          <a:ln>
+            <a:noFill/>
+          </a:ln>
+        </p:spPr>
+        <p:style>
+          <a:lnRef idx="1">
+            <a:schemeClr val="accent1"/>
+          </a:lnRef>
+          <a:fillRef idx="3">
+            <a:schemeClr val="accent1"/>
+          </a:fillRef>
+          <a:effectRef idx="2">
+            <a:schemeClr val="accent1"/>
+          </a:effectRef>
+          <a:fontRef idx="minor">
+            <a:schemeClr val="lt1"/>
+          </a:fontRef>
+        </p:style>
+        <p:txBody>
+          <a:bodyPr rtlCol="0" anchor="ctr"/>
+          <a:lstStyle/>
+          <a:p>
+            <a:pPr algn="ctr"/>
+            <a:endParaRPr lang="en-US"/>
+          </a:p>
+        </p:txBody>
+      </p:sp>
+      <p:sp>
+        <p:nvSpPr>
+          <p:cNvPr id="3" name="Title 2">
+            <a:extLst>
+              <a:ext uri="{FF2B5EF4-FFF2-40B4-BE49-F238E27FC236}">
+                <a16:creationId xmlns:a16="http://schemas.microsoft.com/office/drawing/2014/main" id="{EB55FAA6-7C03-4FE2-840B-00F215037EF4}"/>
+              </a:ext>
+            </a:extLst>
+          </p:cNvPr>
+          <p:cNvSpPr>
             <a:spLocks noGrp="1"/>
           </p:cNvSpPr>
           <p:nvPr>
@@ -6794,8 +9061,165 @@
         </p:nvSpPr>
         <p:spPr>
           <a:xfrm>
-            <a:off x="1451579" y="804519"/>
-            <a:ext cx="9603275" cy="1049235"/>
+            <a:off x="4065511" y="3236470"/>
+            <a:ext cx="6832500" cy="1252601"/>
+          </a:xfrm>
+        </p:spPr>
+        <p:txBody>
+          <a:bodyPr vert="horz" lIns="91440" tIns="45720" rIns="91440" bIns="0" rtlCol="0" anchor="b">
+            <a:normAutofit/>
+          </a:bodyPr>
+          <a:lstStyle/>
+          <a:p>
+            <a:r>
+              <a:rPr lang="en-US" sz="4100">
+                <a:solidFill>
+                  <a:srgbClr val="FFFFFE"/>
+                </a:solidFill>
+              </a:rPr>
+              <a:t>RDB Data Dictionaries and ER Diagrams</a:t>
+            </a:r>
+          </a:p>
+        </p:txBody>
+      </p:sp>
+      <p:cxnSp>
+        <p:nvCxnSpPr>
+          <p:cNvPr id="20" name="Straight Connector 19">
+            <a:extLst>
+              <a:ext uri="{FF2B5EF4-FFF2-40B4-BE49-F238E27FC236}">
+                <a16:creationId xmlns:a16="http://schemas.microsoft.com/office/drawing/2014/main" id="{65409EC7-69B1-45CC-8FB7-1964C1AB6720}"/>
+              </a:ext>
+              <a:ext uri="{C183D7F6-B498-43B3-948B-1728B52AA6E4}">
+                <adec:decorative xmlns:adec="http://schemas.microsoft.com/office/drawing/2017/decorative" val="1"/>
+              </a:ext>
+            </a:extLst>
+          </p:cNvPr>
+          <p:cNvCxnSpPr>
+            <a:cxnSpLocks noGrp="1" noRot="1" noChangeAspect="1" noMove="1" noResize="1" noEditPoints="1" noAdjustHandles="1" noChangeArrowheads="1" noChangeShapeType="1"/>
+          </p:cNvCxnSpPr>
+          <p:nvPr>
+            <p:extLst>
+              <p:ext uri="{386F3935-93C4-4BCD-93E2-E3B085C9AB24}">
+                <p16:designElem xmlns:p16="http://schemas.microsoft.com/office/powerpoint/2015/main" val="1"/>
+              </p:ext>
+            </p:extLst>
+          </p:nvPr>
+        </p:nvCxnSpPr>
+        <p:spPr>
+          <a:xfrm>
+            <a:off x="4065509" y="4666480"/>
+            <a:ext cx="6832499" cy="0"/>
+          </a:xfrm>
+          <a:prstGeom prst="line">
+            <a:avLst/>
+          </a:prstGeom>
+          <a:ln w="31750">
+            <a:solidFill>
+              <a:srgbClr val="158BA0"/>
+            </a:solidFill>
+          </a:ln>
+        </p:spPr>
+        <p:style>
+          <a:lnRef idx="3">
+            <a:schemeClr val="accent1"/>
+          </a:lnRef>
+          <a:fillRef idx="0">
+            <a:schemeClr val="accent1"/>
+          </a:fillRef>
+          <a:effectRef idx="2">
+            <a:schemeClr val="accent1"/>
+          </a:effectRef>
+          <a:fontRef idx="minor">
+            <a:schemeClr val="tx1"/>
+          </a:fontRef>
+        </p:style>
+      </p:cxnSp>
+    </p:spTree>
+    <p:extLst>
+      <p:ext uri="{BB962C8B-B14F-4D97-AF65-F5344CB8AC3E}">
+        <p14:creationId xmlns:p14="http://schemas.microsoft.com/office/powerpoint/2010/main" val="847960121"/>
+      </p:ext>
+    </p:extLst>
+  </p:cSld>
+  <p:clrMapOvr>
+    <a:masterClrMapping/>
+  </p:clrMapOvr>
+  <mc:AlternateContent xmlns:mc="http://schemas.openxmlformats.org/markup-compatibility/2006" xmlns:p14="http://schemas.microsoft.com/office/powerpoint/2010/main">
+    <mc:Choice Requires="p14">
+      <p:transition spd="slow" p14:dur="2000" advTm="5305"/>
+    </mc:Choice>
+    <mc:Fallback xmlns="">
+      <p:transition spd="slow" advTm="5305"/>
+    </mc:Fallback>
+  </mc:AlternateContent>
+</p:sld>
+</file>
+
+<file path=ppt/slides/slide38.xml><?xml version="1.0" encoding="utf-8"?>
+<p:sld xmlns:a="http://schemas.openxmlformats.org/drawingml/2006/main" xmlns:r="http://schemas.openxmlformats.org/officeDocument/2006/relationships" xmlns:p="http://schemas.openxmlformats.org/presentationml/2006/main">
+  <p:cSld>
+    <p:spTree>
+      <p:nvGrpSpPr>
+        <p:cNvPr id="1" name=""/>
+        <p:cNvGrpSpPr/>
+        <p:nvPr/>
+      </p:nvGrpSpPr>
+      <p:grpSpPr>
+        <a:xfrm>
+          <a:off x="0" y="0"/>
+          <a:ext cx="0" cy="0"/>
+          <a:chOff x="0" y="0"/>
+          <a:chExt cx="0" cy="0"/>
+        </a:xfrm>
+      </p:grpSpPr>
+      <p:sp>
+        <p:nvSpPr>
+          <p:cNvPr id="3" name="Title 2">
+            <a:extLst>
+              <a:ext uri="{FF2B5EF4-FFF2-40B4-BE49-F238E27FC236}">
+                <a16:creationId xmlns:a16="http://schemas.microsoft.com/office/drawing/2014/main" id="{5AA14696-1FF5-01CE-F942-F88B0E8BDB94}"/>
+              </a:ext>
+            </a:extLst>
+          </p:cNvPr>
+          <p:cNvSpPr>
+            <a:spLocks noGrp="1"/>
+          </p:cNvSpPr>
+          <p:nvPr>
+            <p:ph type="title"/>
+          </p:nvPr>
+        </p:nvSpPr>
+        <p:spPr/>
+        <p:txBody>
+          <a:bodyPr/>
+          <a:lstStyle/>
+          <a:p>
+            <a:r>
+              <a:rPr lang="en-US" dirty="0"/>
+              <a:t>Documenting a Database</a:t>
+            </a:r>
+          </a:p>
+        </p:txBody>
+      </p:sp>
+      <p:sp>
+        <p:nvSpPr>
+          <p:cNvPr id="4" name="Content Placeholder 3">
+            <a:extLst>
+              <a:ext uri="{FF2B5EF4-FFF2-40B4-BE49-F238E27FC236}">
+                <a16:creationId xmlns:a16="http://schemas.microsoft.com/office/drawing/2014/main" id="{302BDDA3-3D6A-B688-E180-6DCA8CB15257}"/>
+              </a:ext>
+            </a:extLst>
+          </p:cNvPr>
+          <p:cNvSpPr>
+            <a:spLocks noGrp="1"/>
+          </p:cNvSpPr>
+          <p:nvPr>
+            <p:ph idx="1"/>
+          </p:nvPr>
+        </p:nvSpPr>
+        <p:spPr>
+          <a:xfrm>
+            <a:off x="1451579" y="1853754"/>
+            <a:ext cx="9603275" cy="4199727"/>
           </a:xfrm>
         </p:spPr>
         <p:txBody>
@@ -6804,9 +9228,361 @@
           </a:bodyPr>
           <a:lstStyle/>
           <a:p>
-            <a:r>
-              <a:rPr lang="en-US" dirty="0"/>
-              <a:t>Coordinate Planes</a:t>
+            <a:pPr marL="342900" indent="-342900">
+              <a:buFont typeface="Arial" panose="020B0604020202020204" pitchFamily="34" charset="0"/>
+              <a:buChar char="•"/>
+            </a:pPr>
+            <a:r>
+              <a:rPr lang="en-US" dirty="0"/>
+              <a:t>With small and simple datasets we can often gain an understanding by looking at it. </a:t>
+            </a:r>
+          </a:p>
+          <a:p>
+            <a:pPr marL="845820" lvl="1" indent="-342900">
+              <a:buFont typeface="Arial" panose="020B0604020202020204" pitchFamily="34" charset="0"/>
+              <a:buChar char="•"/>
+            </a:pPr>
+            <a:r>
+              <a:rPr lang="en-US" dirty="0"/>
+              <a:t>E.g. much of what we use in Tableau. </a:t>
+            </a:r>
+          </a:p>
+          <a:p>
+            <a:pPr marL="342900" indent="-342900">
+              <a:buFont typeface="Arial" panose="020B0604020202020204" pitchFamily="34" charset="0"/>
+              <a:buChar char="•"/>
+            </a:pPr>
+            <a:r>
+              <a:rPr lang="en-US" dirty="0"/>
+              <a:t>With large databases, that’s less practical. </a:t>
+            </a:r>
+          </a:p>
+          <a:p>
+            <a:pPr marL="845820" lvl="1" indent="-342900">
+              <a:buFont typeface="Arial" panose="020B0604020202020204" pitchFamily="34" charset="0"/>
+              <a:buChar char="•"/>
+            </a:pPr>
+            <a:r>
+              <a:rPr lang="en-US" dirty="0"/>
+              <a:t>Databases may contain thousands of tables. </a:t>
+            </a:r>
+          </a:p>
+          <a:p>
+            <a:pPr marL="845820" lvl="1" indent="-342900">
+              <a:buFont typeface="Arial" panose="020B0604020202020204" pitchFamily="34" charset="0"/>
+              <a:buChar char="•"/>
+            </a:pPr>
+            <a:r>
+              <a:rPr lang="en-US" dirty="0"/>
+              <a:t>There can be thousands more relationships. </a:t>
+            </a:r>
+          </a:p>
+          <a:p>
+            <a:pPr marL="845820" lvl="1" indent="-342900">
+              <a:buFont typeface="Arial" panose="020B0604020202020204" pitchFamily="34" charset="0"/>
+              <a:buChar char="•"/>
+            </a:pPr>
+            <a:r>
+              <a:rPr lang="en-US" dirty="0"/>
+              <a:t>Each table can contain 10s to 100s or more fields. </a:t>
+            </a:r>
+          </a:p>
+          <a:p>
+            <a:pPr marL="845820" lvl="1" indent="-342900">
+              <a:buFont typeface="Arial" panose="020B0604020202020204" pitchFamily="34" charset="0"/>
+              <a:buChar char="•"/>
+            </a:pPr>
+            <a:r>
+              <a:rPr lang="en-US" dirty="0"/>
+              <a:t>On system I used had a 900+ page document describing it. That wasn’t a super large DB. </a:t>
+            </a:r>
+          </a:p>
+          <a:p>
+            <a:pPr marL="342900" indent="-342900">
+              <a:buFont typeface="Arial" panose="020B0604020202020204" pitchFamily="34" charset="0"/>
+              <a:buChar char="•"/>
+            </a:pPr>
+            <a:r>
+              <a:rPr lang="en-US" dirty="0"/>
+              <a:t>We need things to help us understand the DB. </a:t>
+            </a:r>
+          </a:p>
+          <a:p>
+            <a:pPr marL="845820" lvl="1" indent="-342900">
+              <a:buFont typeface="Arial" panose="020B0604020202020204" pitchFamily="34" charset="0"/>
+              <a:buChar char="•"/>
+            </a:pPr>
+            <a:r>
+              <a:rPr lang="en-US" dirty="0"/>
+              <a:t>Data dictionary. </a:t>
+            </a:r>
+          </a:p>
+          <a:p>
+            <a:pPr marL="845820" lvl="1" indent="-342900">
+              <a:buFont typeface="Arial" panose="020B0604020202020204" pitchFamily="34" charset="0"/>
+              <a:buChar char="•"/>
+            </a:pPr>
+            <a:r>
+              <a:rPr lang="en-US" dirty="0"/>
+              <a:t>Entity-relationship diagram. </a:t>
+            </a:r>
+          </a:p>
+        </p:txBody>
+      </p:sp>
+    </p:spTree>
+    <p:extLst>
+      <p:ext uri="{BB962C8B-B14F-4D97-AF65-F5344CB8AC3E}">
+        <p14:creationId xmlns:p14="http://schemas.microsoft.com/office/powerpoint/2010/main" val="1545019128"/>
+      </p:ext>
+    </p:extLst>
+  </p:cSld>
+  <p:clrMapOvr>
+    <a:masterClrMapping/>
+  </p:clrMapOvr>
+</p:sld>
+</file>
+
+<file path=ppt/slides/slide39.xml><?xml version="1.0" encoding="utf-8"?>
+<p:sld xmlns:a="http://schemas.openxmlformats.org/drawingml/2006/main" xmlns:r="http://schemas.openxmlformats.org/officeDocument/2006/relationships" xmlns:p="http://schemas.openxmlformats.org/presentationml/2006/main">
+  <p:cSld>
+    <p:spTree>
+      <p:nvGrpSpPr>
+        <p:cNvPr id="1" name=""/>
+        <p:cNvGrpSpPr/>
+        <p:nvPr/>
+      </p:nvGrpSpPr>
+      <p:grpSpPr>
+        <a:xfrm>
+          <a:off x="0" y="0"/>
+          <a:ext cx="0" cy="0"/>
+          <a:chOff x="0" y="0"/>
+          <a:chExt cx="0" cy="0"/>
+        </a:xfrm>
+      </p:grpSpPr>
+      <p:sp>
+        <p:nvSpPr>
+          <p:cNvPr id="6" name="Title 5">
+            <a:extLst>
+              <a:ext uri="{FF2B5EF4-FFF2-40B4-BE49-F238E27FC236}">
+                <a16:creationId xmlns:a16="http://schemas.microsoft.com/office/drawing/2014/main" id="{964D9434-E6EF-7AC2-67D9-69BD842FF9C7}"/>
+              </a:ext>
+            </a:extLst>
+          </p:cNvPr>
+          <p:cNvSpPr>
+            <a:spLocks noGrp="1"/>
+          </p:cNvSpPr>
+          <p:nvPr>
+            <p:ph type="title"/>
+          </p:nvPr>
+        </p:nvSpPr>
+        <p:spPr/>
+        <p:txBody>
+          <a:bodyPr/>
+          <a:lstStyle/>
+          <a:p>
+            <a:r>
+              <a:rPr lang="en-US" dirty="0"/>
+              <a:t>Data Dictionaries</a:t>
+            </a:r>
+          </a:p>
+        </p:txBody>
+      </p:sp>
+      <p:sp>
+        <p:nvSpPr>
+          <p:cNvPr id="7" name="Content Placeholder 6">
+            <a:extLst>
+              <a:ext uri="{FF2B5EF4-FFF2-40B4-BE49-F238E27FC236}">
+                <a16:creationId xmlns:a16="http://schemas.microsoft.com/office/drawing/2014/main" id="{31CFC047-411C-9C75-FFFB-4AEEF27973FD}"/>
+              </a:ext>
+            </a:extLst>
+          </p:cNvPr>
+          <p:cNvSpPr>
+            <a:spLocks noGrp="1"/>
+          </p:cNvSpPr>
+          <p:nvPr>
+            <p:ph idx="1"/>
+          </p:nvPr>
+        </p:nvSpPr>
+        <p:spPr>
+          <a:xfrm>
+            <a:off x="1451579" y="2015732"/>
+            <a:ext cx="9603275" cy="4037749"/>
+          </a:xfrm>
+        </p:spPr>
+        <p:txBody>
+          <a:bodyPr/>
+          <a:lstStyle/>
+          <a:p>
+            <a:pPr marL="342900" indent="-342900">
+              <a:buFont typeface="Arial" panose="020B0604020202020204" pitchFamily="34" charset="0"/>
+              <a:buChar char="•"/>
+            </a:pPr>
+            <a:r>
+              <a:rPr lang="en-US" dirty="0"/>
+              <a:t>Data dictionaries provide an explanation of what is in a dataset. </a:t>
+            </a:r>
+          </a:p>
+          <a:p>
+            <a:pPr marL="342900" indent="-342900">
+              <a:buFont typeface="Arial" panose="020B0604020202020204" pitchFamily="34" charset="0"/>
+              <a:buChar char="•"/>
+            </a:pPr>
+            <a:r>
+              <a:rPr lang="en-US" dirty="0"/>
+              <a:t>Typically include information on:</a:t>
+            </a:r>
+          </a:p>
+          <a:p>
+            <a:pPr marL="845820" lvl="1" indent="-342900">
+              <a:buFont typeface="Arial" panose="020B0604020202020204" pitchFamily="34" charset="0"/>
+              <a:buChar char="•"/>
+            </a:pPr>
+            <a:r>
+              <a:rPr lang="en-US" dirty="0"/>
+              <a:t>Data types. (Number, string, date, </a:t>
+            </a:r>
+            <a:r>
+              <a:rPr lang="en-US" dirty="0" err="1"/>
+              <a:t>etc</a:t>
+            </a:r>
+            <a:r>
+              <a:rPr lang="en-US" dirty="0"/>
+              <a:t>…)</a:t>
+            </a:r>
+          </a:p>
+          <a:p>
+            <a:pPr marL="845820" lvl="1" indent="-342900">
+              <a:buFont typeface="Arial" panose="020B0604020202020204" pitchFamily="34" charset="0"/>
+              <a:buChar char="•"/>
+            </a:pPr>
+            <a:r>
+              <a:rPr lang="en-US" dirty="0"/>
+              <a:t>Context/description on what each variable is. </a:t>
+            </a:r>
+          </a:p>
+          <a:p>
+            <a:pPr marL="845820" lvl="1" indent="-342900">
+              <a:buFont typeface="Arial" panose="020B0604020202020204" pitchFamily="34" charset="0"/>
+              <a:buChar char="•"/>
+            </a:pPr>
+            <a:r>
+              <a:rPr lang="en-US" dirty="0"/>
+              <a:t>Rules on content (length, format, </a:t>
+            </a:r>
+            <a:r>
+              <a:rPr lang="en-US" dirty="0" err="1"/>
+              <a:t>etc</a:t>
+            </a:r>
+            <a:r>
+              <a:rPr lang="en-US" dirty="0"/>
+              <a:t>…)</a:t>
+            </a:r>
+          </a:p>
+          <a:p>
+            <a:pPr marL="845820" lvl="1" indent="-342900">
+              <a:buFont typeface="Arial" panose="020B0604020202020204" pitchFamily="34" charset="0"/>
+              <a:buChar char="•"/>
+            </a:pPr>
+            <a:r>
+              <a:rPr lang="en-US" dirty="0"/>
+              <a:t>DB “details” – keys, default values, “is required”, etc..</a:t>
+            </a:r>
+          </a:p>
+          <a:p>
+            <a:pPr marL="342900" indent="-342900">
+              <a:buFont typeface="Arial" panose="020B0604020202020204" pitchFamily="34" charset="0"/>
+              <a:buChar char="•"/>
+            </a:pPr>
+            <a:r>
+              <a:rPr lang="en-US" dirty="0"/>
+              <a:t>The data dictionary helps someone using data to understand that data more easily. </a:t>
+            </a:r>
+          </a:p>
+          <a:p>
+            <a:pPr marL="342900" indent="-342900">
+              <a:buFont typeface="Arial" panose="020B0604020202020204" pitchFamily="34" charset="0"/>
+              <a:buChar char="•"/>
+            </a:pPr>
+            <a:r>
+              <a:rPr lang="en-US" dirty="0"/>
+              <a:t>This is often, but not always, on the download page in Kaggle/</a:t>
+            </a:r>
+            <a:r>
+              <a:rPr lang="en-US" dirty="0" err="1"/>
+              <a:t>CoE</a:t>
+            </a:r>
+            <a:r>
+              <a:rPr lang="en-US" dirty="0"/>
+              <a:t>/</a:t>
+            </a:r>
+            <a:r>
+              <a:rPr lang="en-US" dirty="0" err="1"/>
+              <a:t>etc</a:t>
+            </a:r>
+            <a:r>
+              <a:rPr lang="en-US" dirty="0"/>
+              <a:t>…</a:t>
+            </a:r>
+          </a:p>
+          <a:p>
+            <a:endParaRPr lang="en-US" dirty="0"/>
+          </a:p>
+        </p:txBody>
+      </p:sp>
+    </p:spTree>
+    <p:extLst>
+      <p:ext uri="{BB962C8B-B14F-4D97-AF65-F5344CB8AC3E}">
+        <p14:creationId xmlns:p14="http://schemas.microsoft.com/office/powerpoint/2010/main" val="2616051624"/>
+      </p:ext>
+    </p:extLst>
+  </p:cSld>
+  <p:clrMapOvr>
+    <a:masterClrMapping/>
+  </p:clrMapOvr>
+</p:sld>
+</file>
+
+<file path=ppt/slides/slide4.xml><?xml version="1.0" encoding="utf-8"?>
+<p:sld xmlns:a="http://schemas.openxmlformats.org/drawingml/2006/main" xmlns:r="http://schemas.openxmlformats.org/officeDocument/2006/relationships" xmlns:p="http://schemas.openxmlformats.org/presentationml/2006/main" show="0">
+  <p:cSld>
+    <p:spTree>
+      <p:nvGrpSpPr>
+        <p:cNvPr id="1" name=""/>
+        <p:cNvGrpSpPr/>
+        <p:nvPr/>
+      </p:nvGrpSpPr>
+      <p:grpSpPr>
+        <a:xfrm>
+          <a:off x="0" y="0"/>
+          <a:ext cx="0" cy="0"/>
+          <a:chOff x="0" y="0"/>
+          <a:chExt cx="0" cy="0"/>
+        </a:xfrm>
+      </p:grpSpPr>
+      <p:sp>
+        <p:nvSpPr>
+          <p:cNvPr id="2" name="Title 1">
+            <a:extLst>
+              <a:ext uri="{FF2B5EF4-FFF2-40B4-BE49-F238E27FC236}">
+                <a16:creationId xmlns:a16="http://schemas.microsoft.com/office/drawing/2014/main" id="{31E8DBB4-B120-D042-A2C7-A8512708EABA}"/>
+              </a:ext>
+            </a:extLst>
+          </p:cNvPr>
+          <p:cNvSpPr>
+            <a:spLocks noGrp="1"/>
+          </p:cNvSpPr>
+          <p:nvPr>
+            <p:ph type="title"/>
+          </p:nvPr>
+        </p:nvSpPr>
+        <p:spPr/>
+        <p:txBody>
+          <a:bodyPr/>
+          <a:lstStyle/>
+          <a:p>
+            <a:r>
+              <a:rPr lang="en-US" dirty="0"/>
+              <a:t>But if We Visualize them</a:t>
             </a:r>
           </a:p>
         </p:txBody>
@@ -6816,7 +9592,7 @@
           <p:cNvPr id="3" name="Content Placeholder 2">
             <a:extLst>
               <a:ext uri="{FF2B5EF4-FFF2-40B4-BE49-F238E27FC236}">
-                <a16:creationId xmlns:a16="http://schemas.microsoft.com/office/drawing/2014/main" id="{D7DF58A3-C2D0-1EC3-0333-70E5D404C9A9}"/>
+                <a16:creationId xmlns:a16="http://schemas.microsoft.com/office/drawing/2014/main" id="{DD78EF90-6539-ABFC-9AEF-A98CE9B3E5F0}"/>
               </a:ext>
             </a:extLst>
           </p:cNvPr>
@@ -6827,78 +9603,21 @@
             <p:ph idx="1"/>
           </p:nvPr>
         </p:nvSpPr>
-        <p:spPr>
-          <a:xfrm>
-            <a:off x="689548" y="1853754"/>
-            <a:ext cx="6889641" cy="4199727"/>
-          </a:xfrm>
-        </p:spPr>
-        <p:txBody>
-          <a:bodyPr>
-            <a:normAutofit/>
-          </a:bodyPr>
-          <a:lstStyle/>
-          <a:p>
-            <a:r>
-              <a:rPr lang="en-US" dirty="0"/>
-              <a:t>One of the foundational ideas of graphing is the coordinate plane. </a:t>
-            </a:r>
-          </a:p>
-          <a:p>
-            <a:r>
-              <a:rPr lang="en-US" dirty="0"/>
-              <a:t>Allows us to define exact position in 2D (</a:t>
-            </a:r>
-            <a:r>
-              <a:rPr lang="en-US" dirty="0" err="1"/>
-              <a:t>x,y</a:t>
-            </a:r>
-            <a:r>
-              <a:rPr lang="en-US" dirty="0"/>
-              <a:t>). </a:t>
-            </a:r>
-          </a:p>
-          <a:p>
-            <a:r>
-              <a:rPr lang="en-US" dirty="0"/>
-              <a:t>We can plot pretty much anything here. </a:t>
-            </a:r>
-          </a:p>
-          <a:p>
-            <a:pPr lvl="1"/>
-            <a:r>
-              <a:rPr lang="en-US" dirty="0"/>
-              <a:t>We can define the positions arithmetically. </a:t>
-            </a:r>
-          </a:p>
-          <a:p>
-            <a:r>
-              <a:rPr lang="en-US" dirty="0"/>
-              <a:t>Tableau works by creating planes and plotting points on them. </a:t>
-            </a:r>
-          </a:p>
-          <a:p>
-            <a:pPr lvl="1"/>
-            <a:r>
-              <a:rPr lang="en-US" dirty="0"/>
-              <a:t>Often this is transparent to us – e.g. bar graph or map. </a:t>
-            </a:r>
-          </a:p>
-          <a:p>
-            <a:pPr lvl="1"/>
-            <a:r>
-              <a:rPr lang="en-US" dirty="0"/>
-              <a:t>In more complex examples, we can manipulate it to do things like curves. </a:t>
-            </a:r>
+        <p:spPr/>
+        <p:txBody>
+          <a:bodyPr/>
+          <a:lstStyle/>
+          <a:p>
+            <a:endParaRPr lang="en-US"/>
           </a:p>
         </p:txBody>
       </p:sp>
       <p:pic>
         <p:nvPicPr>
-          <p:cNvPr id="1026" name="Picture 2" descr="Coordinate Plane Stock Illustrations – 912 Coordinate Plane Stock  Illustrations, Vectors &amp; Clipart - Dreamstime">
+          <p:cNvPr id="2050" name="Picture 2" descr="Anscombe's quartet - Wikipedia">
             <a:extLst>
               <a:ext uri="{FF2B5EF4-FFF2-40B4-BE49-F238E27FC236}">
-                <a16:creationId xmlns:a16="http://schemas.microsoft.com/office/drawing/2014/main" id="{6CA77E98-C740-7035-2B66-EE672DD3AAF3}"/>
+                <a16:creationId xmlns:a16="http://schemas.microsoft.com/office/drawing/2014/main" id="{34090B7A-D9B5-AD88-1597-A0C7D0DB4EC2}"/>
               </a:ext>
             </a:extLst>
           </p:cNvPr>
@@ -6915,14 +9634,15 @@
               </a:ext>
             </a:extLst>
           </a:blip>
+          <a:srcRect/>
           <a:stretch>
             <a:fillRect/>
           </a:stretch>
         </p:blipFill>
         <p:spPr bwMode="auto">
           <a:xfrm>
-            <a:off x="7579190" y="2015734"/>
-            <a:ext cx="4527466" cy="4527466"/>
+            <a:off x="2382996" y="1455448"/>
+            <a:ext cx="7426008" cy="5402552"/>
           </a:xfrm>
           <a:prstGeom prst="rect">
             <a:avLst/>
@@ -6942,7 +9662,7 @@
     </p:spTree>
     <p:extLst>
       <p:ext uri="{BB962C8B-B14F-4D97-AF65-F5344CB8AC3E}">
-        <p14:creationId xmlns:p14="http://schemas.microsoft.com/office/powerpoint/2010/main" val="2175499035"/>
+        <p14:creationId xmlns:p14="http://schemas.microsoft.com/office/powerpoint/2010/main" val="4113695421"/>
       </p:ext>
     </p:extLst>
   </p:cSld>
@@ -6952,7 +9672,7 @@
 </p:sld>
 </file>
 
-<file path=ppt/slides/slide7.xml><?xml version="1.0" encoding="utf-8"?>
+<file path=ppt/slides/slide40.xml><?xml version="1.0" encoding="utf-8"?>
 <p:sld xmlns:a="http://schemas.openxmlformats.org/drawingml/2006/main" xmlns:r="http://schemas.openxmlformats.org/officeDocument/2006/relationships" xmlns:p="http://schemas.openxmlformats.org/presentationml/2006/main">
   <p:cSld>
     <p:spTree>
@@ -6969,116 +9689,368 @@
           <a:chExt cx="0" cy="0"/>
         </a:xfrm>
       </p:grpSpPr>
-      <p:sp>
-        <p:nvSpPr>
-          <p:cNvPr id="2" name="Title 1">
-            <a:extLst>
-              <a:ext uri="{FF2B5EF4-FFF2-40B4-BE49-F238E27FC236}">
-                <a16:creationId xmlns:a16="http://schemas.microsoft.com/office/drawing/2014/main" id="{00E9E895-B1B2-2CA4-61BB-BA639B9E0378}"/>
-              </a:ext>
-            </a:extLst>
-          </p:cNvPr>
-          <p:cNvSpPr>
-            <a:spLocks noGrp="1"/>
-          </p:cNvSpPr>
-          <p:nvPr>
-            <p:ph type="title"/>
-          </p:nvPr>
-        </p:nvSpPr>
-        <p:spPr>
-          <a:xfrm>
-            <a:off x="2846241" y="804519"/>
-            <a:ext cx="8208613" cy="1049235"/>
-          </a:xfrm>
-        </p:spPr>
-        <p:txBody>
-          <a:bodyPr/>
-          <a:lstStyle/>
-          <a:p>
-            <a:r>
-              <a:rPr lang="en-US" dirty="0"/>
-              <a:t>Styles Make Charts</a:t>
-            </a:r>
-          </a:p>
-        </p:txBody>
-      </p:sp>
-      <p:sp>
-        <p:nvSpPr>
-          <p:cNvPr id="3" name="Content Placeholder 2">
-            <a:extLst>
-              <a:ext uri="{FF2B5EF4-FFF2-40B4-BE49-F238E27FC236}">
-                <a16:creationId xmlns:a16="http://schemas.microsoft.com/office/drawing/2014/main" id="{810A997C-F392-7576-AB79-767501B7F0DB}"/>
-              </a:ext>
-            </a:extLst>
-          </p:cNvPr>
-          <p:cNvSpPr>
-            <a:spLocks noGrp="1"/>
-          </p:cNvSpPr>
-          <p:nvPr>
-            <p:ph idx="1"/>
-          </p:nvPr>
-        </p:nvSpPr>
-        <p:spPr>
-          <a:xfrm>
-            <a:off x="2846241" y="2015732"/>
-            <a:ext cx="8208613" cy="4037749"/>
-          </a:xfrm>
-        </p:spPr>
-        <p:txBody>
-          <a:bodyPr/>
-          <a:lstStyle/>
-          <a:p>
-            <a:r>
-              <a:rPr lang="en-US" dirty="0"/>
-              <a:t>Each chart style uses the plane to display results differently. </a:t>
-            </a:r>
-          </a:p>
-          <a:p>
-            <a:r>
-              <a:rPr lang="en-US" dirty="0"/>
-              <a:t>Different charts are good at different things. </a:t>
-            </a:r>
-          </a:p>
-          <a:p>
-            <a:r>
-              <a:rPr lang="en-US" dirty="0"/>
-              <a:t>Different charts need different values (type and number) to work. </a:t>
-            </a:r>
-          </a:p>
-          <a:p>
-            <a:r>
-              <a:rPr lang="en-US" dirty="0"/>
-              <a:t>“When I read this, do I get that?” </a:t>
-            </a:r>
-          </a:p>
-          <a:p>
-            <a:r>
-              <a:rPr lang="en-US" dirty="0"/>
-              <a:t>In Tableau, the Show Me changes chart types all-at-once:</a:t>
-            </a:r>
-          </a:p>
-          <a:p>
-            <a:pPr lvl="1"/>
-            <a:r>
-              <a:rPr lang="en-US" dirty="0"/>
-              <a:t>We can reformat our data into a totally new style. </a:t>
-            </a:r>
-          </a:p>
-          <a:p>
-            <a:pPr lvl="1"/>
-            <a:r>
-              <a:rPr lang="en-US" dirty="0"/>
-              <a:t>Tableau makes assumptions, it may make mistakes. </a:t>
-            </a:r>
-          </a:p>
-        </p:txBody>
-      </p:sp>
       <p:pic>
         <p:nvPicPr>
-          <p:cNvPr id="7170" name="Picture 2" descr="Tableau - Show Me">
+          <p:cNvPr id="10" name="Content Placeholder 9">
             <a:extLst>
               <a:ext uri="{FF2B5EF4-FFF2-40B4-BE49-F238E27FC236}">
-                <a16:creationId xmlns:a16="http://schemas.microsoft.com/office/drawing/2014/main" id="{B33B7390-1EA0-E7CE-5DB2-CDA3A0A4372C}"/>
+                <a16:creationId xmlns:a16="http://schemas.microsoft.com/office/drawing/2014/main" id="{19F932E7-A806-43CB-BE25-ADEE62AD2C06}"/>
+              </a:ext>
+            </a:extLst>
+          </p:cNvPr>
+          <p:cNvPicPr>
+            <a:picLocks noGrp="1"/>
+          </p:cNvPicPr>
+          <p:nvPr>
+            <p:ph idx="1"/>
+          </p:nvPr>
+        </p:nvPicPr>
+        <p:blipFill>
+          <a:blip r:embed="rId2"/>
+          <a:stretch>
+            <a:fillRect/>
+          </a:stretch>
+        </p:blipFill>
+        <p:spPr>
+          <a:xfrm>
+            <a:off x="0" y="0"/>
+            <a:ext cx="12192000" cy="6858000"/>
+          </a:xfrm>
+          <a:prstGeom prst="rect">
+            <a:avLst/>
+          </a:prstGeom>
+        </p:spPr>
+      </p:pic>
+    </p:spTree>
+    <p:extLst>
+      <p:ext uri="{BB962C8B-B14F-4D97-AF65-F5344CB8AC3E}">
+        <p14:creationId xmlns:p14="http://schemas.microsoft.com/office/powerpoint/2010/main" val="1616456333"/>
+      </p:ext>
+    </p:extLst>
+  </p:cSld>
+  <p:clrMapOvr>
+    <a:masterClrMapping/>
+  </p:clrMapOvr>
+  <mc:AlternateContent xmlns:mc="http://schemas.openxmlformats.org/markup-compatibility/2006" xmlns:p14="http://schemas.microsoft.com/office/powerpoint/2010/main">
+    <mc:Choice Requires="p14">
+      <p:transition spd="slow" p14:dur="2000" advTm="32974"/>
+    </mc:Choice>
+    <mc:Fallback xmlns="">
+      <p:transition spd="slow" advTm="32974"/>
+    </mc:Fallback>
+  </mc:AlternateContent>
+</p:sld>
+</file>
+
+<file path=ppt/slides/slide41.xml><?xml version="1.0" encoding="utf-8"?>
+<p:sld xmlns:a="http://schemas.openxmlformats.org/drawingml/2006/main" xmlns:r="http://schemas.openxmlformats.org/officeDocument/2006/relationships" xmlns:p="http://schemas.openxmlformats.org/presentationml/2006/main">
+  <p:cSld>
+    <p:spTree>
+      <p:nvGrpSpPr>
+        <p:cNvPr id="1" name=""/>
+        <p:cNvGrpSpPr/>
+        <p:nvPr/>
+      </p:nvGrpSpPr>
+      <p:grpSpPr>
+        <a:xfrm>
+          <a:off x="0" y="0"/>
+          <a:ext cx="0" cy="0"/>
+          <a:chOff x="0" y="0"/>
+          <a:chExt cx="0" cy="0"/>
+        </a:xfrm>
+      </p:grpSpPr>
+      <p:sp>
+        <p:nvSpPr>
+          <p:cNvPr id="3" name="Title 2">
+            <a:extLst>
+              <a:ext uri="{FF2B5EF4-FFF2-40B4-BE49-F238E27FC236}">
+                <a16:creationId xmlns:a16="http://schemas.microsoft.com/office/drawing/2014/main" id="{2847D78C-C344-11C0-C527-89762158C289}"/>
+              </a:ext>
+            </a:extLst>
+          </p:cNvPr>
+          <p:cNvSpPr>
+            <a:spLocks noGrp="1"/>
+          </p:cNvSpPr>
+          <p:nvPr>
+            <p:ph type="title"/>
+          </p:nvPr>
+        </p:nvSpPr>
+        <p:spPr/>
+        <p:txBody>
+          <a:bodyPr/>
+          <a:lstStyle/>
+          <a:p>
+            <a:endParaRPr lang="en-US"/>
+          </a:p>
+        </p:txBody>
+      </p:sp>
+      <p:sp>
+        <p:nvSpPr>
+          <p:cNvPr id="4" name="Content Placeholder 3">
+            <a:extLst>
+              <a:ext uri="{FF2B5EF4-FFF2-40B4-BE49-F238E27FC236}">
+                <a16:creationId xmlns:a16="http://schemas.microsoft.com/office/drawing/2014/main" id="{0F283AD0-33A0-A1E4-65E5-ECFAFCAFF5F0}"/>
+              </a:ext>
+            </a:extLst>
+          </p:cNvPr>
+          <p:cNvSpPr>
+            <a:spLocks noGrp="1"/>
+          </p:cNvSpPr>
+          <p:nvPr>
+            <p:ph idx="1"/>
+          </p:nvPr>
+        </p:nvSpPr>
+        <p:spPr/>
+        <p:txBody>
+          <a:bodyPr/>
+          <a:lstStyle/>
+          <a:p>
+            <a:endParaRPr lang="en-US"/>
+          </a:p>
+        </p:txBody>
+      </p:sp>
+      <p:pic>
+        <p:nvPicPr>
+          <p:cNvPr id="5" name="Picture 4">
+            <a:extLst>
+              <a:ext uri="{FF2B5EF4-FFF2-40B4-BE49-F238E27FC236}">
+                <a16:creationId xmlns:a16="http://schemas.microsoft.com/office/drawing/2014/main" id="{01CB7B3D-CB97-9AA9-65B6-E7F0CC0CCFF3}"/>
+              </a:ext>
+            </a:extLst>
+          </p:cNvPr>
+          <p:cNvPicPr>
+            <a:picLocks noChangeAspect="1"/>
+          </p:cNvPicPr>
+          <p:nvPr/>
+        </p:nvPicPr>
+        <p:blipFill>
+          <a:blip r:embed="rId2"/>
+          <a:stretch>
+            <a:fillRect/>
+          </a:stretch>
+        </p:blipFill>
+        <p:spPr>
+          <a:xfrm>
+            <a:off x="3478161" y="0"/>
+            <a:ext cx="5235677" cy="6858000"/>
+          </a:xfrm>
+          <a:prstGeom prst="rect">
+            <a:avLst/>
+          </a:prstGeom>
+        </p:spPr>
+      </p:pic>
+    </p:spTree>
+    <p:extLst>
+      <p:ext uri="{BB962C8B-B14F-4D97-AF65-F5344CB8AC3E}">
+        <p14:creationId xmlns:p14="http://schemas.microsoft.com/office/powerpoint/2010/main" val="70698638"/>
+      </p:ext>
+    </p:extLst>
+  </p:cSld>
+  <p:clrMapOvr>
+    <a:masterClrMapping/>
+  </p:clrMapOvr>
+</p:sld>
+</file>
+
+<file path=ppt/slides/slide42.xml><?xml version="1.0" encoding="utf-8"?>
+<p:sld xmlns:a="http://schemas.openxmlformats.org/drawingml/2006/main" xmlns:r="http://schemas.openxmlformats.org/officeDocument/2006/relationships" xmlns:p="http://schemas.openxmlformats.org/presentationml/2006/main">
+  <p:cSld>
+    <p:spTree>
+      <p:nvGrpSpPr>
+        <p:cNvPr id="1" name=""/>
+        <p:cNvGrpSpPr/>
+        <p:nvPr/>
+      </p:nvGrpSpPr>
+      <p:grpSpPr>
+        <a:xfrm>
+          <a:off x="0" y="0"/>
+          <a:ext cx="0" cy="0"/>
+          <a:chOff x="0" y="0"/>
+          <a:chExt cx="0" cy="0"/>
+        </a:xfrm>
+      </p:grpSpPr>
+      <p:sp>
+        <p:nvSpPr>
+          <p:cNvPr id="3" name="Title 2"/>
+          <p:cNvSpPr>
+            <a:spLocks noGrp="1"/>
+          </p:cNvSpPr>
+          <p:nvPr>
+            <p:ph type="title"/>
+          </p:nvPr>
+        </p:nvSpPr>
+        <p:spPr/>
+        <p:txBody>
+          <a:bodyPr>
+            <a:normAutofit/>
+          </a:bodyPr>
+          <a:lstStyle/>
+          <a:p>
+            <a:r>
+              <a:rPr lang="en-US" dirty="0"/>
+              <a:t>Example of Relational Database Diagrams - ER Diagram</a:t>
+            </a:r>
+          </a:p>
+        </p:txBody>
+      </p:sp>
+      <p:sp>
+        <p:nvSpPr>
+          <p:cNvPr id="4" name="Content Placeholder 3"/>
+          <p:cNvSpPr>
+            <a:spLocks noGrp="1"/>
+          </p:cNvSpPr>
+          <p:nvPr>
+            <p:ph idx="1"/>
+          </p:nvPr>
+        </p:nvSpPr>
+        <p:spPr/>
+        <p:txBody>
+          <a:bodyPr anchor="t">
+            <a:normAutofit/>
+          </a:bodyPr>
+          <a:lstStyle/>
+          <a:p>
+            <a:r>
+              <a:rPr lang="en-US" b="1" dirty="0"/>
+              <a:t>ER (Entity-Relationship) Diagram </a:t>
+            </a:r>
+            <a:r>
+              <a:rPr lang="en-US" dirty="0"/>
+              <a:t>– graphical representation of an information system, illustrating relationships among people, objects, places and events within that system</a:t>
+            </a:r>
+          </a:p>
+          <a:p>
+            <a:endParaRPr lang="en-US" dirty="0"/>
+          </a:p>
+          <a:p>
+            <a:endParaRPr lang="en-US" dirty="0"/>
+          </a:p>
+          <a:p>
+            <a:endParaRPr lang="en-US" dirty="0"/>
+          </a:p>
+          <a:p>
+            <a:endParaRPr lang="en-US" dirty="0"/>
+          </a:p>
+        </p:txBody>
+      </p:sp>
+      <p:pic>
+        <p:nvPicPr>
+          <p:cNvPr id="5" name="Picture 4"/>
+          <p:cNvPicPr>
+            <a:picLocks noChangeAspect="1"/>
+          </p:cNvPicPr>
+          <p:nvPr/>
+        </p:nvPicPr>
+        <p:blipFill>
+          <a:blip r:embed="rId2"/>
+          <a:stretch>
+            <a:fillRect/>
+          </a:stretch>
+        </p:blipFill>
+        <p:spPr>
+          <a:xfrm>
+            <a:off x="2392437" y="3395737"/>
+            <a:ext cx="7407125" cy="2657744"/>
+          </a:xfrm>
+          <a:prstGeom prst="rect">
+            <a:avLst/>
+          </a:prstGeom>
+        </p:spPr>
+      </p:pic>
+    </p:spTree>
+    <p:extLst>
+      <p:ext uri="{BB962C8B-B14F-4D97-AF65-F5344CB8AC3E}">
+        <p14:creationId xmlns:p14="http://schemas.microsoft.com/office/powerpoint/2010/main" val="3615000086"/>
+      </p:ext>
+    </p:extLst>
+  </p:cSld>
+  <p:clrMapOvr>
+    <a:masterClrMapping/>
+  </p:clrMapOvr>
+  <mc:AlternateContent xmlns:mc="http://schemas.openxmlformats.org/markup-compatibility/2006" xmlns:p14="http://schemas.microsoft.com/office/powerpoint/2010/main">
+    <mc:Choice Requires="p14">
+      <p:transition spd="slow" p14:dur="2000" advTm="57586"/>
+    </mc:Choice>
+    <mc:Fallback xmlns="">
+      <p:transition spd="slow" advTm="57586"/>
+    </mc:Fallback>
+  </mc:AlternateContent>
+</p:sld>
+</file>
+
+<file path=ppt/slides/slide43.xml><?xml version="1.0" encoding="utf-8"?>
+<p:sld xmlns:a="http://schemas.openxmlformats.org/drawingml/2006/main" xmlns:r="http://schemas.openxmlformats.org/officeDocument/2006/relationships" xmlns:p="http://schemas.openxmlformats.org/presentationml/2006/main">
+  <p:cSld>
+    <p:spTree>
+      <p:nvGrpSpPr>
+        <p:cNvPr id="1" name=""/>
+        <p:cNvGrpSpPr/>
+        <p:nvPr/>
+      </p:nvGrpSpPr>
+      <p:grpSpPr>
+        <a:xfrm>
+          <a:off x="0" y="0"/>
+          <a:ext cx="0" cy="0"/>
+          <a:chOff x="0" y="0"/>
+          <a:chExt cx="0" cy="0"/>
+        </a:xfrm>
+      </p:grpSpPr>
+      <p:sp>
+        <p:nvSpPr>
+          <p:cNvPr id="3" name="Title 2">
+            <a:extLst>
+              <a:ext uri="{FF2B5EF4-FFF2-40B4-BE49-F238E27FC236}">
+                <a16:creationId xmlns:a16="http://schemas.microsoft.com/office/drawing/2014/main" id="{D3B07865-F12B-979F-28A0-005B27AE0F0A}"/>
+              </a:ext>
+            </a:extLst>
+          </p:cNvPr>
+          <p:cNvSpPr>
+            <a:spLocks noGrp="1"/>
+          </p:cNvSpPr>
+          <p:nvPr>
+            <p:ph type="title"/>
+          </p:nvPr>
+        </p:nvSpPr>
+        <p:spPr/>
+        <p:txBody>
+          <a:bodyPr/>
+          <a:lstStyle/>
+          <a:p>
+            <a:endParaRPr lang="en-US"/>
+          </a:p>
+        </p:txBody>
+      </p:sp>
+      <p:sp>
+        <p:nvSpPr>
+          <p:cNvPr id="4" name="Content Placeholder 3">
+            <a:extLst>
+              <a:ext uri="{FF2B5EF4-FFF2-40B4-BE49-F238E27FC236}">
+                <a16:creationId xmlns:a16="http://schemas.microsoft.com/office/drawing/2014/main" id="{2A5A72BF-2D9A-507C-5884-785E326D8C83}"/>
+              </a:ext>
+            </a:extLst>
+          </p:cNvPr>
+          <p:cNvSpPr>
+            <a:spLocks noGrp="1"/>
+          </p:cNvSpPr>
+          <p:nvPr>
+            <p:ph idx="1"/>
+          </p:nvPr>
+        </p:nvSpPr>
+        <p:spPr/>
+        <p:txBody>
+          <a:bodyPr/>
+          <a:lstStyle/>
+          <a:p>
+            <a:endParaRPr lang="en-US"/>
+          </a:p>
+        </p:txBody>
+      </p:sp>
+      <p:pic>
+        <p:nvPicPr>
+          <p:cNvPr id="2052" name="Picture 4" descr="Cardinality in Database Design: Examples and Crow's Foot Notation |  Study.com">
+            <a:extLst>
+              <a:ext uri="{FF2B5EF4-FFF2-40B4-BE49-F238E27FC236}">
+                <a16:creationId xmlns:a16="http://schemas.microsoft.com/office/drawing/2014/main" id="{FB764D61-A34C-4512-BC63-DB7BB4DD8A2A}"/>
               </a:ext>
             </a:extLst>
           </p:cNvPr>
@@ -7087,7 +10059,7 @@
           </p:cNvPicPr>
           <p:nvPr/>
         </p:nvPicPr>
-        <p:blipFill rotWithShape="1">
+        <p:blipFill>
           <a:blip r:embed="rId2">
             <a:extLst>
               <a:ext uri="{28A0092B-C50C-407E-A947-70E740481C1C}">
@@ -7095,15 +10067,15 @@
               </a:ext>
             </a:extLst>
           </a:blip>
-          <a:srcRect l="59459"/>
+          <a:srcRect/>
           <a:stretch>
             <a:fillRect/>
           </a:stretch>
         </p:blipFill>
         <p:spPr bwMode="auto">
           <a:xfrm>
-            <a:off x="56917" y="0"/>
-            <a:ext cx="2789324" cy="6858000"/>
+            <a:off x="1432560" y="0"/>
+            <a:ext cx="9641840" cy="6749288"/>
           </a:xfrm>
           <a:prstGeom prst="rect">
             <a:avLst/>
@@ -7123,7 +10095,7 @@
     </p:spTree>
     <p:extLst>
       <p:ext uri="{BB962C8B-B14F-4D97-AF65-F5344CB8AC3E}">
-        <p14:creationId xmlns:p14="http://schemas.microsoft.com/office/powerpoint/2010/main" val="569117580"/>
+        <p14:creationId xmlns:p14="http://schemas.microsoft.com/office/powerpoint/2010/main" val="3177685697"/>
       </p:ext>
     </p:extLst>
   </p:cSld>
@@ -7133,7 +10105,542 @@
 </p:sld>
 </file>
 
-<file path=ppt/slides/slide8.xml><?xml version="1.0" encoding="utf-8"?>
+<file path=ppt/slides/slide44.xml><?xml version="1.0" encoding="utf-8"?>
+<p:sld xmlns:a="http://schemas.openxmlformats.org/drawingml/2006/main" xmlns:r="http://schemas.openxmlformats.org/officeDocument/2006/relationships" xmlns:p="http://schemas.openxmlformats.org/presentationml/2006/main">
+  <p:cSld>
+    <p:spTree>
+      <p:nvGrpSpPr>
+        <p:cNvPr id="1" name=""/>
+        <p:cNvGrpSpPr/>
+        <p:nvPr/>
+      </p:nvGrpSpPr>
+      <p:grpSpPr>
+        <a:xfrm>
+          <a:off x="0" y="0"/>
+          <a:ext cx="0" cy="0"/>
+          <a:chOff x="0" y="0"/>
+          <a:chExt cx="0" cy="0"/>
+        </a:xfrm>
+      </p:grpSpPr>
+      <p:sp>
+        <p:nvSpPr>
+          <p:cNvPr id="3" name="Title 2">
+            <a:extLst>
+              <a:ext uri="{FF2B5EF4-FFF2-40B4-BE49-F238E27FC236}">
+                <a16:creationId xmlns:a16="http://schemas.microsoft.com/office/drawing/2014/main" id="{08F3E332-900C-371E-EEAB-AA3BC976F1F1}"/>
+              </a:ext>
+            </a:extLst>
+          </p:cNvPr>
+          <p:cNvSpPr>
+            <a:spLocks noGrp="1"/>
+          </p:cNvSpPr>
+          <p:nvPr>
+            <p:ph type="title"/>
+          </p:nvPr>
+        </p:nvSpPr>
+        <p:spPr/>
+        <p:txBody>
+          <a:bodyPr/>
+          <a:lstStyle/>
+          <a:p>
+            <a:endParaRPr lang="en-US"/>
+          </a:p>
+        </p:txBody>
+      </p:sp>
+      <p:sp>
+        <p:nvSpPr>
+          <p:cNvPr id="4" name="Content Placeholder 3">
+            <a:extLst>
+              <a:ext uri="{FF2B5EF4-FFF2-40B4-BE49-F238E27FC236}">
+                <a16:creationId xmlns:a16="http://schemas.microsoft.com/office/drawing/2014/main" id="{0236CE97-C15D-27CA-EF48-DE41C79F9651}"/>
+              </a:ext>
+            </a:extLst>
+          </p:cNvPr>
+          <p:cNvSpPr>
+            <a:spLocks noGrp="1"/>
+          </p:cNvSpPr>
+          <p:nvPr>
+            <p:ph idx="1"/>
+          </p:nvPr>
+        </p:nvSpPr>
+        <p:spPr/>
+        <p:txBody>
+          <a:bodyPr/>
+          <a:lstStyle/>
+          <a:p>
+            <a:endParaRPr lang="en-US"/>
+          </a:p>
+        </p:txBody>
+      </p:sp>
+      <p:pic>
+        <p:nvPicPr>
+          <p:cNvPr id="3074" name="Picture 2" descr="Entity-relationship Model for Delegation | Download Scientific Diagram">
+            <a:extLst>
+              <a:ext uri="{FF2B5EF4-FFF2-40B4-BE49-F238E27FC236}">
+                <a16:creationId xmlns:a16="http://schemas.microsoft.com/office/drawing/2014/main" id="{475D4A01-858D-FC0C-DEE5-91237B63439A}"/>
+              </a:ext>
+            </a:extLst>
+          </p:cNvPr>
+          <p:cNvPicPr>
+            <a:picLocks noChangeAspect="1" noChangeArrowheads="1"/>
+          </p:cNvPicPr>
+          <p:nvPr/>
+        </p:nvPicPr>
+        <p:blipFill>
+          <a:blip r:embed="rId2">
+            <a:extLst>
+              <a:ext uri="{28A0092B-C50C-407E-A947-70E740481C1C}">
+                <a14:useLocalDpi xmlns:a14="http://schemas.microsoft.com/office/drawing/2010/main" val="0"/>
+              </a:ext>
+            </a:extLst>
+          </a:blip>
+          <a:srcRect/>
+          <a:stretch>
+            <a:fillRect/>
+          </a:stretch>
+        </p:blipFill>
+        <p:spPr bwMode="auto">
+          <a:xfrm>
+            <a:off x="2565400" y="120981"/>
+            <a:ext cx="7061200" cy="6616037"/>
+          </a:xfrm>
+          <a:prstGeom prst="rect">
+            <a:avLst/>
+          </a:prstGeom>
+          <a:noFill/>
+          <a:extLst>
+            <a:ext uri="{909E8E84-426E-40DD-AFC4-6F175D3DCCD1}">
+              <a14:hiddenFill xmlns:a14="http://schemas.microsoft.com/office/drawing/2010/main">
+                <a:solidFill>
+                  <a:srgbClr val="FFFFFF"/>
+                </a:solidFill>
+              </a14:hiddenFill>
+            </a:ext>
+          </a:extLst>
+        </p:spPr>
+      </p:pic>
+    </p:spTree>
+    <p:extLst>
+      <p:ext uri="{BB962C8B-B14F-4D97-AF65-F5344CB8AC3E}">
+        <p14:creationId xmlns:p14="http://schemas.microsoft.com/office/powerpoint/2010/main" val="183162897"/>
+      </p:ext>
+    </p:extLst>
+  </p:cSld>
+  <p:clrMapOvr>
+    <a:masterClrMapping/>
+  </p:clrMapOvr>
+</p:sld>
+</file>
+
+<file path=ppt/slides/slide45.xml><?xml version="1.0" encoding="utf-8"?>
+<p:sld xmlns:a="http://schemas.openxmlformats.org/drawingml/2006/main" xmlns:r="http://schemas.openxmlformats.org/officeDocument/2006/relationships" xmlns:p="http://schemas.openxmlformats.org/presentationml/2006/main">
+  <p:cSld>
+    <p:spTree>
+      <p:nvGrpSpPr>
+        <p:cNvPr id="1" name=""/>
+        <p:cNvGrpSpPr/>
+        <p:nvPr/>
+      </p:nvGrpSpPr>
+      <p:grpSpPr>
+        <a:xfrm>
+          <a:off x="0" y="0"/>
+          <a:ext cx="0" cy="0"/>
+          <a:chOff x="0" y="0"/>
+          <a:chExt cx="0" cy="0"/>
+        </a:xfrm>
+      </p:grpSpPr>
+      <p:sp>
+        <p:nvSpPr>
+          <p:cNvPr id="5" name="Title 4">
+            <a:extLst>
+              <a:ext uri="{FF2B5EF4-FFF2-40B4-BE49-F238E27FC236}">
+                <a16:creationId xmlns:a16="http://schemas.microsoft.com/office/drawing/2014/main" id="{D3E28EAD-0701-2426-90B3-54C28FEF11D1}"/>
+              </a:ext>
+            </a:extLst>
+          </p:cNvPr>
+          <p:cNvSpPr>
+            <a:spLocks noGrp="1"/>
+          </p:cNvSpPr>
+          <p:nvPr>
+            <p:ph type="title"/>
+          </p:nvPr>
+        </p:nvSpPr>
+        <p:spPr/>
+        <p:txBody>
+          <a:bodyPr/>
+          <a:lstStyle/>
+          <a:p>
+            <a:r>
+              <a:rPr lang="en-US" dirty="0"/>
+              <a:t>ERD </a:t>
+            </a:r>
+            <a:r>
+              <a:rPr lang="en-US" dirty="0" err="1"/>
+              <a:t>Stylez</a:t>
+            </a:r>
+            <a:endParaRPr lang="en-US" dirty="0"/>
+          </a:p>
+        </p:txBody>
+      </p:sp>
+      <p:sp>
+        <p:nvSpPr>
+          <p:cNvPr id="6" name="Content Placeholder 5">
+            <a:extLst>
+              <a:ext uri="{FF2B5EF4-FFF2-40B4-BE49-F238E27FC236}">
+                <a16:creationId xmlns:a16="http://schemas.microsoft.com/office/drawing/2014/main" id="{01750883-74EF-144B-B457-849BA6A68086}"/>
+              </a:ext>
+            </a:extLst>
+          </p:cNvPr>
+          <p:cNvSpPr>
+            <a:spLocks noGrp="1"/>
+          </p:cNvSpPr>
+          <p:nvPr>
+            <p:ph idx="1"/>
+          </p:nvPr>
+        </p:nvSpPr>
+        <p:spPr/>
+        <p:txBody>
+          <a:bodyPr/>
+          <a:lstStyle/>
+          <a:p>
+            <a:pPr marL="342900" indent="-342900">
+              <a:buFont typeface="Arial" panose="020B0604020202020204" pitchFamily="34" charset="0"/>
+              <a:buChar char="•"/>
+            </a:pPr>
+            <a:r>
+              <a:rPr lang="en-US" dirty="0"/>
+              <a:t>There are a lot of different styles of ERDs. </a:t>
+            </a:r>
+          </a:p>
+          <a:p>
+            <a:pPr marL="342900" indent="-342900">
+              <a:buFont typeface="Arial" panose="020B0604020202020204" pitchFamily="34" charset="0"/>
+              <a:buChar char="•"/>
+            </a:pPr>
+            <a:r>
+              <a:rPr lang="en-US" dirty="0"/>
+              <a:t>Some show fields in each table, some don’t. </a:t>
+            </a:r>
+          </a:p>
+          <a:p>
+            <a:pPr marL="342900" indent="-342900">
+              <a:buFont typeface="Arial" panose="020B0604020202020204" pitchFamily="34" charset="0"/>
+              <a:buChar char="•"/>
+            </a:pPr>
+            <a:r>
+              <a:rPr lang="en-US" dirty="0"/>
+              <a:t>Some have a diamond for the relationship between entities, some don’t. </a:t>
+            </a:r>
+          </a:p>
+          <a:p>
+            <a:pPr marL="342900" indent="-342900">
+              <a:buFont typeface="Arial" panose="020B0604020202020204" pitchFamily="34" charset="0"/>
+              <a:buChar char="•"/>
+            </a:pPr>
+            <a:r>
+              <a:rPr lang="en-US" dirty="0"/>
+              <a:t>The core thing is that they all show the entities, and relationships between them. Everything else can be varied. </a:t>
+            </a:r>
+          </a:p>
+        </p:txBody>
+      </p:sp>
+    </p:spTree>
+    <p:extLst>
+      <p:ext uri="{BB962C8B-B14F-4D97-AF65-F5344CB8AC3E}">
+        <p14:creationId xmlns:p14="http://schemas.microsoft.com/office/powerpoint/2010/main" val="3064405380"/>
+      </p:ext>
+    </p:extLst>
+  </p:cSld>
+  <p:clrMapOvr>
+    <a:masterClrMapping/>
+  </p:clrMapOvr>
+</p:sld>
+</file>
+
+<file path=ppt/slides/slide46.xml><?xml version="1.0" encoding="utf-8"?>
+<p:sld xmlns:a="http://schemas.openxmlformats.org/drawingml/2006/main" xmlns:r="http://schemas.openxmlformats.org/officeDocument/2006/relationships" xmlns:p="http://schemas.openxmlformats.org/presentationml/2006/main">
+  <p:cSld>
+    <p:spTree>
+      <p:nvGrpSpPr>
+        <p:cNvPr id="1" name=""/>
+        <p:cNvGrpSpPr/>
+        <p:nvPr/>
+      </p:nvGrpSpPr>
+      <p:grpSpPr>
+        <a:xfrm>
+          <a:off x="0" y="0"/>
+          <a:ext cx="0" cy="0"/>
+          <a:chOff x="0" y="0"/>
+          <a:chExt cx="0" cy="0"/>
+        </a:xfrm>
+      </p:grpSpPr>
+      <p:sp>
+        <p:nvSpPr>
+          <p:cNvPr id="3" name="Title 2">
+            <a:extLst>
+              <a:ext uri="{FF2B5EF4-FFF2-40B4-BE49-F238E27FC236}">
+                <a16:creationId xmlns:a16="http://schemas.microsoft.com/office/drawing/2014/main" id="{B300712D-1676-903D-D2DA-7C323736E495}"/>
+              </a:ext>
+            </a:extLst>
+          </p:cNvPr>
+          <p:cNvSpPr>
+            <a:spLocks noGrp="1"/>
+          </p:cNvSpPr>
+          <p:nvPr>
+            <p:ph type="title"/>
+          </p:nvPr>
+        </p:nvSpPr>
+        <p:spPr/>
+        <p:txBody>
+          <a:bodyPr/>
+          <a:lstStyle/>
+          <a:p>
+            <a:r>
+              <a:rPr lang="en-US" dirty="0"/>
+              <a:t>What do I need with an ERD?</a:t>
+            </a:r>
+          </a:p>
+        </p:txBody>
+      </p:sp>
+      <p:sp>
+        <p:nvSpPr>
+          <p:cNvPr id="4" name="Content Placeholder 3">
+            <a:extLst>
+              <a:ext uri="{FF2B5EF4-FFF2-40B4-BE49-F238E27FC236}">
+                <a16:creationId xmlns:a16="http://schemas.microsoft.com/office/drawing/2014/main" id="{5AAB0FB6-E15C-52F3-FADF-D2B3CB0AB62C}"/>
+              </a:ext>
+            </a:extLst>
+          </p:cNvPr>
+          <p:cNvSpPr>
+            <a:spLocks noGrp="1"/>
+          </p:cNvSpPr>
+          <p:nvPr>
+            <p:ph idx="1"/>
+          </p:nvPr>
+        </p:nvSpPr>
+        <p:spPr>
+          <a:xfrm>
+            <a:off x="1451579" y="2015732"/>
+            <a:ext cx="9603275" cy="4037749"/>
+          </a:xfrm>
+        </p:spPr>
+        <p:txBody>
+          <a:bodyPr/>
+          <a:lstStyle/>
+          <a:p>
+            <a:pPr marL="342900" indent="-342900">
+              <a:buFont typeface="Arial" panose="020B0604020202020204" pitchFamily="34" charset="0"/>
+              <a:buChar char="•"/>
+            </a:pPr>
+            <a:r>
+              <a:rPr lang="en-US" dirty="0"/>
+              <a:t>Entity relationship diagrams are extremely common when dealing with databases. </a:t>
+            </a:r>
+          </a:p>
+          <a:p>
+            <a:pPr marL="342900" indent="-342900">
+              <a:buFont typeface="Arial" panose="020B0604020202020204" pitchFamily="34" charset="0"/>
+              <a:buChar char="•"/>
+            </a:pPr>
+            <a:r>
+              <a:rPr lang="en-US" dirty="0"/>
+              <a:t>We don’t need to be an expert in them, but we should know:</a:t>
+            </a:r>
+          </a:p>
+          <a:p>
+            <a:pPr marL="788670" lvl="1" indent="-285750">
+              <a:buFont typeface="Arial" panose="020B0604020202020204" pitchFamily="34" charset="0"/>
+              <a:buChar char="•"/>
+            </a:pPr>
+            <a:r>
+              <a:rPr lang="en-US" dirty="0"/>
+              <a:t>How to interpret an ERD, at a high level. </a:t>
+            </a:r>
+          </a:p>
+          <a:p>
+            <a:pPr marL="788670" lvl="1" indent="-285750">
+              <a:buFont typeface="Arial" panose="020B0604020202020204" pitchFamily="34" charset="0"/>
+              <a:buChar char="•"/>
+            </a:pPr>
+            <a:r>
+              <a:rPr lang="en-US" dirty="0"/>
+              <a:t>How to take an ERD and understand it with the help of time and the ability to research. </a:t>
+            </a:r>
+          </a:p>
+          <a:p>
+            <a:pPr marL="788670" lvl="1" indent="-285750">
+              <a:buFont typeface="Arial" panose="020B0604020202020204" pitchFamily="34" charset="0"/>
+              <a:buChar char="•"/>
+            </a:pPr>
+            <a:r>
+              <a:rPr lang="en-US" dirty="0"/>
+              <a:t>An understanding of relationships, as that is really important in joining data. </a:t>
+            </a:r>
+          </a:p>
+          <a:p>
+            <a:pPr marL="285750" indent="-285750">
+              <a:buFont typeface="Arial" panose="020B0604020202020204" pitchFamily="34" charset="0"/>
+              <a:buChar char="•"/>
+            </a:pPr>
+            <a:r>
+              <a:rPr lang="en-US" dirty="0"/>
+              <a:t>When using “new” data, we need to gain an understanding of it to use it. </a:t>
+            </a:r>
+          </a:p>
+          <a:p>
+            <a:pPr marL="285750" indent="-285750">
+              <a:buFont typeface="Arial" panose="020B0604020202020204" pitchFamily="34" charset="0"/>
+              <a:buChar char="•"/>
+            </a:pPr>
+            <a:r>
+              <a:rPr lang="en-US" dirty="0"/>
+              <a:t>As we try to join data sources together, this becomes important.</a:t>
+            </a:r>
+          </a:p>
+          <a:p>
+            <a:pPr marL="742950" lvl="1" indent="-285750"/>
+            <a:r>
+              <a:rPr lang="en-US" dirty="0"/>
+              <a:t>Next week we’ll do some joining…</a:t>
+            </a:r>
+          </a:p>
+        </p:txBody>
+      </p:sp>
+    </p:spTree>
+    <p:extLst>
+      <p:ext uri="{BB962C8B-B14F-4D97-AF65-F5344CB8AC3E}">
+        <p14:creationId xmlns:p14="http://schemas.microsoft.com/office/powerpoint/2010/main" val="2626265205"/>
+      </p:ext>
+    </p:extLst>
+  </p:cSld>
+  <p:clrMapOvr>
+    <a:masterClrMapping/>
+  </p:clrMapOvr>
+</p:sld>
+</file>
+
+<file path=ppt/slides/slide47.xml><?xml version="1.0" encoding="utf-8"?>
+<p:sld xmlns:a="http://schemas.openxmlformats.org/drawingml/2006/main" xmlns:r="http://schemas.openxmlformats.org/officeDocument/2006/relationships" xmlns:p="http://schemas.openxmlformats.org/presentationml/2006/main">
+  <p:cSld>
+    <p:spTree>
+      <p:nvGrpSpPr>
+        <p:cNvPr id="1" name=""/>
+        <p:cNvGrpSpPr/>
+        <p:nvPr/>
+      </p:nvGrpSpPr>
+      <p:grpSpPr>
+        <a:xfrm>
+          <a:off x="0" y="0"/>
+          <a:ext cx="0" cy="0"/>
+          <a:chOff x="0" y="0"/>
+          <a:chExt cx="0" cy="0"/>
+        </a:xfrm>
+      </p:grpSpPr>
+      <p:sp>
+        <p:nvSpPr>
+          <p:cNvPr id="2" name="Title 1">
+            <a:extLst>
+              <a:ext uri="{FF2B5EF4-FFF2-40B4-BE49-F238E27FC236}">
+                <a16:creationId xmlns:a16="http://schemas.microsoft.com/office/drawing/2014/main" id="{EFBA978A-48FA-6E23-235F-00076DA6858A}"/>
+              </a:ext>
+            </a:extLst>
+          </p:cNvPr>
+          <p:cNvSpPr>
+            <a:spLocks noGrp="1"/>
+          </p:cNvSpPr>
+          <p:nvPr>
+            <p:ph type="title"/>
+          </p:nvPr>
+        </p:nvSpPr>
+        <p:spPr/>
+        <p:txBody>
+          <a:bodyPr/>
+          <a:lstStyle/>
+          <a:p>
+            <a:r>
+              <a:rPr lang="en-US" dirty="0"/>
+              <a:t>Conclusion</a:t>
+            </a:r>
+          </a:p>
+        </p:txBody>
+      </p:sp>
+      <p:sp>
+        <p:nvSpPr>
+          <p:cNvPr id="3" name="Content Placeholder 2">
+            <a:extLst>
+              <a:ext uri="{FF2B5EF4-FFF2-40B4-BE49-F238E27FC236}">
+                <a16:creationId xmlns:a16="http://schemas.microsoft.com/office/drawing/2014/main" id="{9B7A0D91-F7E7-7E0E-D3A4-01FF9714E9A8}"/>
+              </a:ext>
+            </a:extLst>
+          </p:cNvPr>
+          <p:cNvSpPr>
+            <a:spLocks noGrp="1"/>
+          </p:cNvSpPr>
+          <p:nvPr>
+            <p:ph idx="1"/>
+          </p:nvPr>
+        </p:nvSpPr>
+        <p:spPr>
+          <a:xfrm>
+            <a:off x="1451579" y="1944414"/>
+            <a:ext cx="9603275" cy="4109067"/>
+          </a:xfrm>
+        </p:spPr>
+        <p:txBody>
+          <a:bodyPr/>
+          <a:lstStyle/>
+          <a:p>
+            <a:r>
+              <a:rPr lang="en-US" dirty="0"/>
+              <a:t>Understanding the structure of our data is important. </a:t>
+            </a:r>
+          </a:p>
+          <a:p>
+            <a:pPr lvl="1"/>
+            <a:r>
+              <a:rPr lang="en-US" dirty="0"/>
+              <a:t>If you want/need to use non-curated data sources, you’ll need to be able to navigate. </a:t>
+            </a:r>
+          </a:p>
+          <a:p>
+            <a:pPr lvl="1"/>
+            <a:r>
+              <a:rPr lang="en-US" dirty="0"/>
+              <a:t>You’ll need to prepare and connect to data. </a:t>
+            </a:r>
+          </a:p>
+          <a:p>
+            <a:pPr lvl="1"/>
+            <a:r>
+              <a:rPr lang="en-US" dirty="0"/>
+              <a:t>Joining data tables to get all the data you need is common. </a:t>
+            </a:r>
+          </a:p>
+          <a:p>
+            <a:r>
+              <a:rPr lang="en-US" dirty="0"/>
+              <a:t>Get some practice reading the documentation, checking data, and seeing if it adds up…</a:t>
+            </a:r>
+          </a:p>
+          <a:p>
+            <a:endParaRPr lang="en-US" dirty="0"/>
+          </a:p>
+        </p:txBody>
+      </p:sp>
+    </p:spTree>
+    <p:extLst>
+      <p:ext uri="{BB962C8B-B14F-4D97-AF65-F5344CB8AC3E}">
+        <p14:creationId xmlns:p14="http://schemas.microsoft.com/office/powerpoint/2010/main" val="727630042"/>
+      </p:ext>
+    </p:extLst>
+  </p:cSld>
+  <p:clrMapOvr>
+    <a:masterClrMapping/>
+  </p:clrMapOvr>
+</p:sld>
+</file>
+
+<file path=ppt/slides/slide5.xml><?xml version="1.0" encoding="utf-8"?>
 <p:sld xmlns:a="http://schemas.openxmlformats.org/drawingml/2006/main" xmlns:r="http://schemas.openxmlformats.org/officeDocument/2006/relationships" xmlns:p="http://schemas.openxmlformats.org/presentationml/2006/main" show="0">
   <p:cSld>
     <p:spTree>
@@ -7155,7 +10662,7 @@
           <p:cNvPr id="2" name="Title 1">
             <a:extLst>
               <a:ext uri="{FF2B5EF4-FFF2-40B4-BE49-F238E27FC236}">
-                <a16:creationId xmlns:a16="http://schemas.microsoft.com/office/drawing/2014/main" id="{231BAAD8-3C26-8A04-97D7-048EF7F8158D}"/>
+                <a16:creationId xmlns:a16="http://schemas.microsoft.com/office/drawing/2014/main" id="{4EDE3C09-89C8-C337-77C3-E1EE64093359}"/>
               </a:ext>
             </a:extLst>
           </p:cNvPr>
@@ -7166,113 +10673,85 @@
             <p:ph type="title"/>
           </p:nvPr>
         </p:nvSpPr>
+        <p:spPr/>
+        <p:txBody>
+          <a:bodyPr/>
+          <a:lstStyle/>
+          <a:p>
+            <a:r>
+              <a:rPr lang="en-US" dirty="0"/>
+              <a:t>What is Going on Here? Chaos!</a:t>
+            </a:r>
+          </a:p>
+        </p:txBody>
+      </p:sp>
+      <p:sp>
+        <p:nvSpPr>
+          <p:cNvPr id="3" name="Content Placeholder 2">
+            <a:extLst>
+              <a:ext uri="{FF2B5EF4-FFF2-40B4-BE49-F238E27FC236}">
+                <a16:creationId xmlns:a16="http://schemas.microsoft.com/office/drawing/2014/main" id="{BB3CDEB5-DDC9-EE74-758C-7586C98E1B16}"/>
+              </a:ext>
+            </a:extLst>
+          </p:cNvPr>
+          <p:cNvSpPr>
+            <a:spLocks noGrp="1"/>
+          </p:cNvSpPr>
+          <p:nvPr>
+            <p:ph idx="1"/>
+          </p:nvPr>
+        </p:nvSpPr>
         <p:spPr>
           <a:xfrm>
-            <a:off x="1451579" y="804519"/>
-            <a:ext cx="9603275" cy="1049235"/>
+            <a:off x="1451579" y="2015732"/>
+            <a:ext cx="9603275" cy="4037749"/>
           </a:xfrm>
         </p:spPr>
         <p:txBody>
-          <a:bodyPr>
-            <a:normAutofit/>
-          </a:bodyPr>
-          <a:lstStyle/>
-          <a:p>
-            <a:r>
-              <a:rPr lang="en-US" dirty="0"/>
-              <a:t>Visual Vocabulary</a:t>
-            </a:r>
-          </a:p>
-        </p:txBody>
-      </p:sp>
-      <p:pic>
-        <p:nvPicPr>
-          <p:cNvPr id="4" name="Picture 3">
-            <a:extLst>
-              <a:ext uri="{FF2B5EF4-FFF2-40B4-BE49-F238E27FC236}">
-                <a16:creationId xmlns:a16="http://schemas.microsoft.com/office/drawing/2014/main" id="{86D2E3B8-CACB-A93A-3974-9ACD7E0FE2CC}"/>
-              </a:ext>
-            </a:extLst>
-          </p:cNvPr>
-          <p:cNvPicPr>
-            <a:picLocks noChangeAspect="1"/>
-          </p:cNvPicPr>
-          <p:nvPr/>
-        </p:nvPicPr>
-        <p:blipFill>
-          <a:blip r:embed="rId2"/>
-          <a:stretch>
-            <a:fillRect/>
-          </a:stretch>
-        </p:blipFill>
-        <p:spPr>
-          <a:xfrm>
-            <a:off x="156385" y="2221905"/>
-            <a:ext cx="6255637" cy="3831576"/>
-          </a:xfrm>
-          <a:prstGeom prst="rect">
-            <a:avLst/>
-          </a:prstGeom>
-        </p:spPr>
-      </p:pic>
-      <p:sp>
-        <p:nvSpPr>
-          <p:cNvPr id="3" name="Content Placeholder 2">
-            <a:extLst>
-              <a:ext uri="{FF2B5EF4-FFF2-40B4-BE49-F238E27FC236}">
-                <a16:creationId xmlns:a16="http://schemas.microsoft.com/office/drawing/2014/main" id="{6E3A9C4D-9F90-06C4-35A8-70DDC5F26C43}"/>
-              </a:ext>
-            </a:extLst>
-          </p:cNvPr>
-          <p:cNvSpPr>
-            <a:spLocks noGrp="1"/>
-          </p:cNvSpPr>
-          <p:nvPr>
-            <p:ph idx="1"/>
-          </p:nvPr>
-        </p:nvSpPr>
-        <p:spPr>
-          <a:xfrm>
-            <a:off x="6412023" y="2015734"/>
-            <a:ext cx="5779978" cy="4147999"/>
-          </a:xfrm>
-        </p:spPr>
-        <p:txBody>
-          <a:bodyPr>
-            <a:normAutofit/>
-          </a:bodyPr>
-          <a:lstStyle/>
-          <a:p>
-            <a:pPr>
-              <a:lnSpc>
-                <a:spcPct val="110000"/>
-              </a:lnSpc>
-            </a:pPr>
-            <a:r>
-              <a:rPr lang="en-US" sz="2400" dirty="0"/>
-              <a:t>There’s a link on Brightspace to a visual vocabulary. </a:t>
-            </a:r>
-          </a:p>
-          <a:p>
-            <a:pPr>
-              <a:lnSpc>
-                <a:spcPct val="110000"/>
-              </a:lnSpc>
-            </a:pPr>
-            <a:r>
-              <a:rPr lang="en-US" sz="2400" dirty="0"/>
-              <a:t>This gives an example of good chart types to display certain things you may want to show. </a:t>
-            </a:r>
-          </a:p>
-          <a:p>
-            <a:pPr>
-              <a:lnSpc>
-                <a:spcPct val="110000"/>
-              </a:lnSpc>
-            </a:pPr>
-            <a:r>
-              <a:rPr lang="en-US" sz="2400" dirty="0"/>
-              <a:t>These are good starting points – you can change anything, but these are examples of what we know works well. </a:t>
+          <a:bodyPr/>
+          <a:lstStyle/>
+          <a:p>
+            <a:r>
+              <a:rPr lang="en-US" dirty="0"/>
+              <a:t>We have a lot of data. </a:t>
+            </a:r>
+          </a:p>
+          <a:p>
+            <a:r>
+              <a:rPr lang="en-US" dirty="0"/>
+              <a:t>We can analyze that data in many different ways. </a:t>
+            </a:r>
+          </a:p>
+          <a:p>
+            <a:r>
+              <a:rPr lang="en-US" dirty="0"/>
+              <a:t>The type of analysis we do will change what we can learn from our data. </a:t>
+            </a:r>
+          </a:p>
+          <a:p>
+            <a:r>
+              <a:rPr lang="en-US" dirty="0"/>
+              <a:t>Visual analysis is powerful because it can help us see things that are difficult otherwise. </a:t>
+            </a:r>
+          </a:p>
+          <a:p>
+            <a:r>
+              <a:rPr lang="en-US" dirty="0"/>
+              <a:t>To analyze data well (like if this was your job):</a:t>
+            </a:r>
+          </a:p>
+          <a:p>
+            <a:pPr lvl="1"/>
+            <a:r>
+              <a:rPr lang="en-US" dirty="0"/>
+              <a:t>We need a toolkit of analytical tools, of which visualization is an important one. </a:t>
+            </a:r>
+          </a:p>
+          <a:p>
+            <a:pPr lvl="1"/>
+            <a:r>
+              <a:rPr lang="en-US" dirty="0"/>
+              <a:t>We need to ensure we present data in a way that allows us to see what we care about. </a:t>
             </a:r>
           </a:p>
         </p:txBody>
@@ -7280,7 +10759,7 @@
     </p:spTree>
     <p:extLst>
       <p:ext uri="{BB962C8B-B14F-4D97-AF65-F5344CB8AC3E}">
-        <p14:creationId xmlns:p14="http://schemas.microsoft.com/office/powerpoint/2010/main" val="3353865672"/>
+        <p14:creationId xmlns:p14="http://schemas.microsoft.com/office/powerpoint/2010/main" val="2389286841"/>
       </p:ext>
     </p:extLst>
   </p:cSld>
@@ -7290,7 +10769,160 @@
 </p:sld>
 </file>
 
-<file path=ppt/slides/slide9.xml><?xml version="1.0" encoding="utf-8"?>
+<file path=ppt/slides/slide6.xml><?xml version="1.0" encoding="utf-8"?>
+<p:sld xmlns:a="http://schemas.openxmlformats.org/drawingml/2006/main" xmlns:r="http://schemas.openxmlformats.org/officeDocument/2006/relationships" xmlns:p="http://schemas.openxmlformats.org/presentationml/2006/main" show="0">
+  <p:cSld>
+    <p:spTree>
+      <p:nvGrpSpPr>
+        <p:cNvPr id="1" name=""/>
+        <p:cNvGrpSpPr/>
+        <p:nvPr/>
+      </p:nvGrpSpPr>
+      <p:grpSpPr>
+        <a:xfrm>
+          <a:off x="0" y="0"/>
+          <a:ext cx="0" cy="0"/>
+          <a:chOff x="0" y="0"/>
+          <a:chExt cx="0" cy="0"/>
+        </a:xfrm>
+      </p:grpSpPr>
+      <p:sp>
+        <p:nvSpPr>
+          <p:cNvPr id="2" name="Title 1">
+            <a:extLst>
+              <a:ext uri="{FF2B5EF4-FFF2-40B4-BE49-F238E27FC236}">
+                <a16:creationId xmlns:a16="http://schemas.microsoft.com/office/drawing/2014/main" id="{E0843ED3-56F8-1B98-CFE4-DA416007B797}"/>
+              </a:ext>
+            </a:extLst>
+          </p:cNvPr>
+          <p:cNvSpPr>
+            <a:spLocks noGrp="1"/>
+          </p:cNvSpPr>
+          <p:nvPr>
+            <p:ph type="title"/>
+          </p:nvPr>
+        </p:nvSpPr>
+        <p:spPr/>
+        <p:txBody>
+          <a:bodyPr/>
+          <a:lstStyle/>
+          <a:p>
+            <a:r>
+              <a:rPr lang="en-US" dirty="0"/>
+              <a:t>Encoding vs Decoding</a:t>
+            </a:r>
+          </a:p>
+        </p:txBody>
+      </p:sp>
+      <p:sp>
+        <p:nvSpPr>
+          <p:cNvPr id="3" name="Content Placeholder 2">
+            <a:extLst>
+              <a:ext uri="{FF2B5EF4-FFF2-40B4-BE49-F238E27FC236}">
+                <a16:creationId xmlns:a16="http://schemas.microsoft.com/office/drawing/2014/main" id="{350037FC-109E-8375-5DE1-6B4522717FA4}"/>
+              </a:ext>
+            </a:extLst>
+          </p:cNvPr>
+          <p:cNvSpPr>
+            <a:spLocks noGrp="1"/>
+          </p:cNvSpPr>
+          <p:nvPr>
+            <p:ph idx="1"/>
+          </p:nvPr>
+        </p:nvSpPr>
+        <p:spPr>
+          <a:xfrm>
+            <a:off x="1451579" y="1853754"/>
+            <a:ext cx="9603275" cy="4199727"/>
+          </a:xfrm>
+        </p:spPr>
+        <p:txBody>
+          <a:bodyPr>
+            <a:normAutofit lnSpcReduction="10000"/>
+          </a:bodyPr>
+          <a:lstStyle/>
+          <a:p>
+            <a:r>
+              <a:rPr lang="en-US" dirty="0"/>
+              <a:t>Encode. </a:t>
+            </a:r>
+          </a:p>
+          <a:p>
+            <a:pPr lvl="1"/>
+            <a:r>
+              <a:rPr lang="en-US" dirty="0"/>
+              <a:t>We have a bunch of data to analyze and sort through. </a:t>
+            </a:r>
+          </a:p>
+          <a:p>
+            <a:pPr lvl="1"/>
+            <a:r>
+              <a:rPr lang="en-US" dirty="0"/>
+              <a:t>We will create a visual representation of that in our charts – encoding. </a:t>
+            </a:r>
+          </a:p>
+          <a:p>
+            <a:r>
+              <a:rPr lang="en-US" dirty="0"/>
+              <a:t>Decode. </a:t>
+            </a:r>
+          </a:p>
+          <a:p>
+            <a:pPr lvl="1"/>
+            <a:r>
+              <a:rPr lang="en-US" dirty="0"/>
+              <a:t>The reader will look at our visualization to get the information – decoding. </a:t>
+            </a:r>
+          </a:p>
+          <a:p>
+            <a:pPr lvl="1"/>
+            <a:r>
+              <a:rPr lang="en-US" dirty="0"/>
+              <a:t>We want to make sure that they get what we intended. </a:t>
+            </a:r>
+          </a:p>
+          <a:p>
+            <a:pPr lvl="1"/>
+            <a:r>
+              <a:rPr lang="en-US" dirty="0"/>
+              <a:t>We also want to make that as easy, or friction free, as possible. </a:t>
+            </a:r>
+          </a:p>
+          <a:p>
+            <a:r>
+              <a:rPr lang="en-US" dirty="0"/>
+              <a:t>We translate data into charts, the reader transforms charts into info/knowledge. </a:t>
+            </a:r>
+          </a:p>
+          <a:p>
+            <a:pPr lvl="1"/>
+            <a:r>
+              <a:rPr lang="en-US" dirty="0"/>
+              <a:t>The better we are, the better this works. </a:t>
+            </a:r>
+          </a:p>
+          <a:p>
+            <a:r>
+              <a:rPr lang="en-US" dirty="0"/>
+              <a:t>Also don’t want to accidentally encode info - order, size, shade may convey meaning. </a:t>
+            </a:r>
+          </a:p>
+        </p:txBody>
+      </p:sp>
+    </p:spTree>
+    <p:extLst>
+      <p:ext uri="{BB962C8B-B14F-4D97-AF65-F5344CB8AC3E}">
+        <p14:creationId xmlns:p14="http://schemas.microsoft.com/office/powerpoint/2010/main" val="3236604726"/>
+      </p:ext>
+    </p:extLst>
+  </p:cSld>
+  <p:clrMapOvr>
+    <a:masterClrMapping/>
+  </p:clrMapOvr>
+</p:sld>
+</file>
+
+<file path=ppt/slides/slide7.xml><?xml version="1.0" encoding="utf-8"?>
 <p:sld xmlns:a="http://schemas.openxmlformats.org/drawingml/2006/main" xmlns:r="http://schemas.openxmlformats.org/officeDocument/2006/relationships" xmlns:p="http://schemas.openxmlformats.org/presentationml/2006/main">
   <p:cSld>
     <p:bg>
@@ -7336,7 +10968,7 @@
           <p:cNvPr id="2" name="Title 1">
             <a:extLst>
               <a:ext uri="{FF2B5EF4-FFF2-40B4-BE49-F238E27FC236}">
-                <a16:creationId xmlns:a16="http://schemas.microsoft.com/office/drawing/2014/main" id="{F720A923-5539-D86F-D258-F7C4AC458EC8}"/>
+                <a16:creationId xmlns:a16="http://schemas.microsoft.com/office/drawing/2014/main" id="{B8BAED8F-D7B6-00DA-9BB9-CC467AFA3F80}"/>
               </a:ext>
             </a:extLst>
           </p:cNvPr>
@@ -7361,17 +10993,99 @@
           <a:p>
             <a:r>
               <a:rPr lang="en-US" dirty="0"/>
-              <a:t>Scatter Plots</a:t>
+              <a:t>Coordinate Planes</a:t>
+            </a:r>
+          </a:p>
+        </p:txBody>
+      </p:sp>
+      <p:sp>
+        <p:nvSpPr>
+          <p:cNvPr id="3" name="Content Placeholder 2">
+            <a:extLst>
+              <a:ext uri="{FF2B5EF4-FFF2-40B4-BE49-F238E27FC236}">
+                <a16:creationId xmlns:a16="http://schemas.microsoft.com/office/drawing/2014/main" id="{D7DF58A3-C2D0-1EC3-0333-70E5D404C9A9}"/>
+              </a:ext>
+            </a:extLst>
+          </p:cNvPr>
+          <p:cNvSpPr>
+            <a:spLocks noGrp="1"/>
+          </p:cNvSpPr>
+          <p:nvPr>
+            <p:ph idx="1"/>
+          </p:nvPr>
+        </p:nvSpPr>
+        <p:spPr>
+          <a:xfrm>
+            <a:off x="689548" y="1853754"/>
+            <a:ext cx="6889641" cy="4199727"/>
+          </a:xfrm>
+        </p:spPr>
+        <p:txBody>
+          <a:bodyPr>
+            <a:normAutofit/>
+          </a:bodyPr>
+          <a:lstStyle/>
+          <a:p>
+            <a:r>
+              <a:rPr lang="en-US" dirty="0"/>
+              <a:t>One of the foundational ideas of graphing is the coordinate plane. </a:t>
+            </a:r>
+          </a:p>
+          <a:p>
+            <a:r>
+              <a:rPr lang="en-US" dirty="0"/>
+              <a:t>Allows us to define exact position in 2D (</a:t>
+            </a:r>
+            <a:r>
+              <a:rPr lang="en-US" dirty="0" err="1"/>
+              <a:t>x,y</a:t>
+            </a:r>
+            <a:r>
+              <a:rPr lang="en-US" dirty="0"/>
+              <a:t>). </a:t>
+            </a:r>
+          </a:p>
+          <a:p>
+            <a:r>
+              <a:rPr lang="en-US" dirty="0"/>
+              <a:t>We can plot pretty much anything here. </a:t>
+            </a:r>
+          </a:p>
+          <a:p>
+            <a:pPr lvl="1"/>
+            <a:r>
+              <a:rPr lang="en-US" dirty="0"/>
+              <a:t>We can define the positions arithmetically. </a:t>
+            </a:r>
+          </a:p>
+          <a:p>
+            <a:r>
+              <a:rPr lang="en-US" dirty="0"/>
+              <a:t>Tableau works by creating planes and plotting points on them. </a:t>
+            </a:r>
+          </a:p>
+          <a:p>
+            <a:pPr lvl="1"/>
+            <a:r>
+              <a:rPr lang="en-US" dirty="0"/>
+              <a:t>Often this is transparent to us – e.g. bar graph or map. </a:t>
+            </a:r>
+          </a:p>
+          <a:p>
+            <a:pPr lvl="1"/>
+            <a:r>
+              <a:rPr lang="en-US" dirty="0"/>
+              <a:t>In more complex examples, we can manipulate it to do things like curves. </a:t>
             </a:r>
           </a:p>
         </p:txBody>
       </p:sp>
       <p:pic>
         <p:nvPicPr>
-          <p:cNvPr id="3074" name="Picture 2" descr="how to make a scatter plot in Excel — storytelling with data">
+          <p:cNvPr id="1026" name="Picture 2" descr="Coordinate Plane Stock Illustrations – 912 Coordinate Plane Stock  Illustrations, Vectors &amp; Clipart - Dreamstime">
             <a:extLst>
               <a:ext uri="{FF2B5EF4-FFF2-40B4-BE49-F238E27FC236}">
-                <a16:creationId xmlns:a16="http://schemas.microsoft.com/office/drawing/2014/main" id="{AB6A9B96-8D79-4155-508E-3086838C4A07}"/>
+                <a16:creationId xmlns:a16="http://schemas.microsoft.com/office/drawing/2014/main" id="{6CA77E98-C740-7035-2B66-EE672DD3AAF3}"/>
               </a:ext>
             </a:extLst>
           </p:cNvPr>
@@ -7394,8 +11108,8 @@
         </p:blipFill>
         <p:spPr bwMode="auto">
           <a:xfrm>
-            <a:off x="275544" y="1896061"/>
-            <a:ext cx="5820455" cy="4961939"/>
+            <a:off x="7579190" y="2015734"/>
+            <a:ext cx="4527466" cy="4527466"/>
           </a:xfrm>
           <a:prstGeom prst="rect">
             <a:avLst/>
@@ -7412,12 +11126,75 @@
           </a:extLst>
         </p:spPr>
       </p:pic>
+    </p:spTree>
+    <p:extLst>
+      <p:ext uri="{BB962C8B-B14F-4D97-AF65-F5344CB8AC3E}">
+        <p14:creationId xmlns:p14="http://schemas.microsoft.com/office/powerpoint/2010/main" val="2175499035"/>
+      </p:ext>
+    </p:extLst>
+  </p:cSld>
+  <p:clrMapOvr>
+    <a:masterClrMapping/>
+  </p:clrMapOvr>
+</p:sld>
+</file>
+
+<file path=ppt/slides/slide8.xml><?xml version="1.0" encoding="utf-8"?>
+<p:sld xmlns:a="http://schemas.openxmlformats.org/drawingml/2006/main" xmlns:r="http://schemas.openxmlformats.org/officeDocument/2006/relationships" xmlns:p="http://schemas.openxmlformats.org/presentationml/2006/main">
+  <p:cSld>
+    <p:spTree>
+      <p:nvGrpSpPr>
+        <p:cNvPr id="1" name=""/>
+        <p:cNvGrpSpPr/>
+        <p:nvPr/>
+      </p:nvGrpSpPr>
+      <p:grpSpPr>
+        <a:xfrm>
+          <a:off x="0" y="0"/>
+          <a:ext cx="0" cy="0"/>
+          <a:chOff x="0" y="0"/>
+          <a:chExt cx="0" cy="0"/>
+        </a:xfrm>
+      </p:grpSpPr>
+      <p:sp>
+        <p:nvSpPr>
+          <p:cNvPr id="2" name="Title 1">
+            <a:extLst>
+              <a:ext uri="{FF2B5EF4-FFF2-40B4-BE49-F238E27FC236}">
+                <a16:creationId xmlns:a16="http://schemas.microsoft.com/office/drawing/2014/main" id="{00E9E895-B1B2-2CA4-61BB-BA639B9E0378}"/>
+              </a:ext>
+            </a:extLst>
+          </p:cNvPr>
+          <p:cNvSpPr>
+            <a:spLocks noGrp="1"/>
+          </p:cNvSpPr>
+          <p:nvPr>
+            <p:ph type="title"/>
+          </p:nvPr>
+        </p:nvSpPr>
+        <p:spPr>
+          <a:xfrm>
+            <a:off x="2846241" y="804519"/>
+            <a:ext cx="8208613" cy="1049235"/>
+          </a:xfrm>
+        </p:spPr>
+        <p:txBody>
+          <a:bodyPr/>
+          <a:lstStyle/>
+          <a:p>
+            <a:r>
+              <a:rPr lang="en-US" dirty="0"/>
+              <a:t>Styles Make Charts</a:t>
+            </a:r>
+          </a:p>
+        </p:txBody>
+      </p:sp>
       <p:sp>
         <p:nvSpPr>
           <p:cNvPr id="3" name="Content Placeholder 2">
             <a:extLst>
               <a:ext uri="{FF2B5EF4-FFF2-40B4-BE49-F238E27FC236}">
-                <a16:creationId xmlns:a16="http://schemas.microsoft.com/office/drawing/2014/main" id="{328F0408-8EF6-ECA4-E367-8FF3A0F3FA90}"/>
+                <a16:creationId xmlns:a16="http://schemas.microsoft.com/office/drawing/2014/main" id="{810A997C-F392-7576-AB79-767501B7F0DB}"/>
               </a:ext>
             </a:extLst>
           </p:cNvPr>
@@ -7430,8 +11207,221 @@
         </p:nvSpPr>
         <p:spPr>
           <a:xfrm>
-            <a:off x="6095999" y="2015734"/>
-            <a:ext cx="5602015" cy="4037747"/>
+            <a:off x="2846241" y="2015732"/>
+            <a:ext cx="8208613" cy="4037749"/>
+          </a:xfrm>
+        </p:spPr>
+        <p:txBody>
+          <a:bodyPr/>
+          <a:lstStyle/>
+          <a:p>
+            <a:r>
+              <a:rPr lang="en-US" dirty="0"/>
+              <a:t>Each chart style uses the plane to display results differently. </a:t>
+            </a:r>
+          </a:p>
+          <a:p>
+            <a:r>
+              <a:rPr lang="en-US" dirty="0"/>
+              <a:t>Different charts are good at different things. </a:t>
+            </a:r>
+          </a:p>
+          <a:p>
+            <a:r>
+              <a:rPr lang="en-US" dirty="0"/>
+              <a:t>Different charts need different values (type and number) to work. </a:t>
+            </a:r>
+          </a:p>
+          <a:p>
+            <a:r>
+              <a:rPr lang="en-US" dirty="0"/>
+              <a:t>“When I read this, do I get that?” </a:t>
+            </a:r>
+          </a:p>
+          <a:p>
+            <a:r>
+              <a:rPr lang="en-US" dirty="0"/>
+              <a:t>In Tableau, the Show Me changes chart types all-at-once:</a:t>
+            </a:r>
+          </a:p>
+          <a:p>
+            <a:pPr lvl="1"/>
+            <a:r>
+              <a:rPr lang="en-US" dirty="0"/>
+              <a:t>We can reformat our data into a totally new style. </a:t>
+            </a:r>
+          </a:p>
+          <a:p>
+            <a:pPr lvl="1"/>
+            <a:r>
+              <a:rPr lang="en-US" dirty="0"/>
+              <a:t>Tableau makes assumptions, it may make mistakes. </a:t>
+            </a:r>
+          </a:p>
+        </p:txBody>
+      </p:sp>
+      <p:pic>
+        <p:nvPicPr>
+          <p:cNvPr id="7170" name="Picture 2" descr="Tableau - Show Me">
+            <a:extLst>
+              <a:ext uri="{FF2B5EF4-FFF2-40B4-BE49-F238E27FC236}">
+                <a16:creationId xmlns:a16="http://schemas.microsoft.com/office/drawing/2014/main" id="{B33B7390-1EA0-E7CE-5DB2-CDA3A0A4372C}"/>
+              </a:ext>
+            </a:extLst>
+          </p:cNvPr>
+          <p:cNvPicPr>
+            <a:picLocks noChangeAspect="1" noChangeArrowheads="1"/>
+          </p:cNvPicPr>
+          <p:nvPr/>
+        </p:nvPicPr>
+        <p:blipFill rotWithShape="1">
+          <a:blip r:embed="rId2">
+            <a:extLst>
+              <a:ext uri="{28A0092B-C50C-407E-A947-70E740481C1C}">
+                <a14:useLocalDpi xmlns:a14="http://schemas.microsoft.com/office/drawing/2010/main" val="0"/>
+              </a:ext>
+            </a:extLst>
+          </a:blip>
+          <a:srcRect l="59459"/>
+          <a:stretch>
+            <a:fillRect/>
+          </a:stretch>
+        </p:blipFill>
+        <p:spPr bwMode="auto">
+          <a:xfrm>
+            <a:off x="56917" y="0"/>
+            <a:ext cx="2789324" cy="6858000"/>
+          </a:xfrm>
+          <a:prstGeom prst="rect">
+            <a:avLst/>
+          </a:prstGeom>
+          <a:noFill/>
+          <a:extLst>
+            <a:ext uri="{909E8E84-426E-40DD-AFC4-6F175D3DCCD1}">
+              <a14:hiddenFill xmlns:a14="http://schemas.microsoft.com/office/drawing/2010/main">
+                <a:solidFill>
+                  <a:srgbClr val="FFFFFF"/>
+                </a:solidFill>
+              </a14:hiddenFill>
+            </a:ext>
+          </a:extLst>
+        </p:spPr>
+      </p:pic>
+    </p:spTree>
+    <p:extLst>
+      <p:ext uri="{BB962C8B-B14F-4D97-AF65-F5344CB8AC3E}">
+        <p14:creationId xmlns:p14="http://schemas.microsoft.com/office/powerpoint/2010/main" val="569117580"/>
+      </p:ext>
+    </p:extLst>
+  </p:cSld>
+  <p:clrMapOvr>
+    <a:masterClrMapping/>
+  </p:clrMapOvr>
+</p:sld>
+</file>
+
+<file path=ppt/slides/slide9.xml><?xml version="1.0" encoding="utf-8"?>
+<p:sld xmlns:a="http://schemas.openxmlformats.org/drawingml/2006/main" xmlns:r="http://schemas.openxmlformats.org/officeDocument/2006/relationships" xmlns:p="http://schemas.openxmlformats.org/presentationml/2006/main">
+  <p:cSld>
+    <p:spTree>
+      <p:nvGrpSpPr>
+        <p:cNvPr id="1" name=""/>
+        <p:cNvGrpSpPr/>
+        <p:nvPr/>
+      </p:nvGrpSpPr>
+      <p:grpSpPr>
+        <a:xfrm>
+          <a:off x="0" y="0"/>
+          <a:ext cx="0" cy="0"/>
+          <a:chOff x="0" y="0"/>
+          <a:chExt cx="0" cy="0"/>
+        </a:xfrm>
+      </p:grpSpPr>
+      <p:sp>
+        <p:nvSpPr>
+          <p:cNvPr id="2" name="Title 1">
+            <a:extLst>
+              <a:ext uri="{FF2B5EF4-FFF2-40B4-BE49-F238E27FC236}">
+                <a16:creationId xmlns:a16="http://schemas.microsoft.com/office/drawing/2014/main" id="{231BAAD8-3C26-8A04-97D7-048EF7F8158D}"/>
+              </a:ext>
+            </a:extLst>
+          </p:cNvPr>
+          <p:cNvSpPr>
+            <a:spLocks noGrp="1"/>
+          </p:cNvSpPr>
+          <p:nvPr>
+            <p:ph type="title"/>
+          </p:nvPr>
+        </p:nvSpPr>
+        <p:spPr>
+          <a:xfrm>
+            <a:off x="1451579" y="804519"/>
+            <a:ext cx="9603275" cy="1049235"/>
+          </a:xfrm>
+        </p:spPr>
+        <p:txBody>
+          <a:bodyPr>
+            <a:normAutofit/>
+          </a:bodyPr>
+          <a:lstStyle/>
+          <a:p>
+            <a:r>
+              <a:rPr lang="en-US" dirty="0"/>
+              <a:t>Visual Vocabulary</a:t>
+            </a:r>
+          </a:p>
+        </p:txBody>
+      </p:sp>
+      <p:pic>
+        <p:nvPicPr>
+          <p:cNvPr id="4" name="Picture 3">
+            <a:extLst>
+              <a:ext uri="{FF2B5EF4-FFF2-40B4-BE49-F238E27FC236}">
+                <a16:creationId xmlns:a16="http://schemas.microsoft.com/office/drawing/2014/main" id="{86D2E3B8-CACB-A93A-3974-9ACD7E0FE2CC}"/>
+              </a:ext>
+            </a:extLst>
+          </p:cNvPr>
+          <p:cNvPicPr>
+            <a:picLocks noChangeAspect="1"/>
+          </p:cNvPicPr>
+          <p:nvPr/>
+        </p:nvPicPr>
+        <p:blipFill>
+          <a:blip r:embed="rId2"/>
+          <a:stretch>
+            <a:fillRect/>
+          </a:stretch>
+        </p:blipFill>
+        <p:spPr>
+          <a:xfrm>
+            <a:off x="156385" y="2221905"/>
+            <a:ext cx="6255637" cy="3831576"/>
+          </a:xfrm>
+          <a:prstGeom prst="rect">
+            <a:avLst/>
+          </a:prstGeom>
+        </p:spPr>
+      </p:pic>
+      <p:sp>
+        <p:nvSpPr>
+          <p:cNvPr id="3" name="Content Placeholder 2">
+            <a:extLst>
+              <a:ext uri="{FF2B5EF4-FFF2-40B4-BE49-F238E27FC236}">
+                <a16:creationId xmlns:a16="http://schemas.microsoft.com/office/drawing/2014/main" id="{6E3A9C4D-9F90-06C4-35A8-70DDC5F26C43}"/>
+              </a:ext>
+            </a:extLst>
+          </p:cNvPr>
+          <p:cNvSpPr>
+            <a:spLocks noGrp="1"/>
+          </p:cNvSpPr>
+          <p:nvPr>
+            <p:ph idx="1"/>
+          </p:nvPr>
+        </p:nvSpPr>
+        <p:spPr>
+          <a:xfrm>
+            <a:off x="6412023" y="2015734"/>
+            <a:ext cx="5779978" cy="4147999"/>
           </a:xfrm>
         </p:spPr>
         <p:txBody>
@@ -7446,16 +11436,8 @@
               </a:lnSpc>
             </a:pPr>
             <a:r>
-              <a:rPr lang="en-US" dirty="0"/>
-              <a:t>Scatter plots are the most coordinate plane-</a:t>
-            </a:r>
-            <a:r>
-              <a:rPr lang="en-US" dirty="0" err="1"/>
-              <a:t>ish</a:t>
-            </a:r>
-            <a:r>
-              <a:rPr lang="en-US" dirty="0"/>
-              <a:t> type of plot. </a:t>
+              <a:rPr lang="en-US" sz="2400" dirty="0"/>
+              <a:t>There’s a link on Brightspace to a visual vocabulary. </a:t>
             </a:r>
           </a:p>
           <a:p>
@@ -7465,8 +11447,8 @@
               </a:lnSpc>
             </a:pPr>
             <a:r>
-              <a:rPr lang="en-US" dirty="0"/>
-              <a:t>Scatter plots are most commonly used to show relationships between numeric variables. </a:t>
+              <a:rPr lang="en-US" sz="2400" dirty="0"/>
+              <a:t>This gives an example of good chart types to display certain things you may want to show. </a:t>
             </a:r>
           </a:p>
           <a:p>
@@ -7476,30 +11458,8 @@
               </a:lnSpc>
             </a:pPr>
             <a:r>
-              <a:rPr lang="en-US" dirty="0"/>
-              <a:t>Scatter plots easily allow other attributes to add density:</a:t>
-            </a:r>
-          </a:p>
-          <a:p>
-            <a:pPr lvl="1">
-              <a:lnSpc>
-                <a:spcPct val="110000"/>
-              </a:lnSpc>
-            </a:pPr>
-            <a:r>
-              <a:rPr lang="en-US" sz="2000" dirty="0"/>
-              <a:t>We can use shape/color/size/pattern to encode other data in addition to position. </a:t>
-            </a:r>
-          </a:p>
-          <a:p>
-            <a:pPr lvl="1">
-              <a:lnSpc>
-                <a:spcPct val="110000"/>
-              </a:lnSpc>
-            </a:pPr>
-            <a:r>
-              <a:rPr lang="en-US" sz="2000" dirty="0"/>
-              <a:t>This makes a plot more dense – same # of charts, more information. </a:t>
+              <a:rPr lang="en-US" sz="2400" dirty="0"/>
+              <a:t>These are good starting points – you can change anything, but these are examples of what we know works well. </a:t>
             </a:r>
           </a:p>
         </p:txBody>
@@ -7507,7 +11467,7 @@
     </p:spTree>
     <p:extLst>
       <p:ext uri="{BB962C8B-B14F-4D97-AF65-F5344CB8AC3E}">
-        <p14:creationId xmlns:p14="http://schemas.microsoft.com/office/powerpoint/2010/main" val="2132236388"/>
+        <p14:creationId xmlns:p14="http://schemas.microsoft.com/office/powerpoint/2010/main" val="3353865672"/>
       </p:ext>
     </p:extLst>
   </p:cSld>

--- a/slides/chapter_3.pptx
+++ b/slides/chapter_3.pptx
@@ -52,6 +52,7 @@
     <p:sldId id="431" r:id="rId46"/>
     <p:sldId id="415" r:id="rId47"/>
     <p:sldId id="557" r:id="rId48"/>
+    <p:sldId id="562" r:id="rId49"/>
   </p:sldIdLst>
   <p:sldSz cx="12192000" cy="6858000"/>
   <p:notesSz cx="6858000" cy="9144000"/>
@@ -234,6 +235,7 @@
             <p14:sldId id="431"/>
             <p14:sldId id="415"/>
             <p14:sldId id="557"/>
+            <p14:sldId id="562"/>
           </p14:sldIdLst>
         </p14:section>
       </p14:sectionLst>
@@ -4034,7 +4036,7 @@
             <a:pPr lvl="2"/>
             <a:r>
               <a:rPr lang="en-US" dirty="0"/>
-              <a:t>Reading:</a:t>
+              <a:t>Reading: Structuring data for analysis. </a:t>
             </a:r>
           </a:p>
           <a:p>
@@ -4048,6 +4050,21 @@
             <a:r>
               <a:rPr lang="en-US" dirty="0"/>
               <a:t>More dashboarding. </a:t>
+            </a:r>
+          </a:p>
+          <a:p>
+            <a:pPr lvl="1"/>
+            <a:r>
+              <a:rPr lang="en-US" dirty="0"/>
+              <a:t>More data cleanup and using some data exploration </a:t>
+            </a:r>
+            <a:r>
+              <a:rPr lang="en-US" dirty="0" err="1"/>
+              <a:t>skillz</a:t>
+            </a:r>
+            <a:r>
+              <a:rPr lang="en-US" dirty="0"/>
+              <a:t>. </a:t>
             </a:r>
           </a:p>
           <a:p>
@@ -4730,15 +4747,7 @@
           <a:p>
             <a:r>
               <a:rPr lang="en-US" dirty="0"/>
-              <a:t>Other charts are similar – things are scaled (num) or grouped </a:t>
-            </a:r>
-            <a:r>
-              <a:rPr lang="en-US"/>
-              <a:t>(cat) along </a:t>
-            </a:r>
-            <a:r>
-              <a:rPr lang="en-US" dirty="0"/>
-              <a:t>that axis. </a:t>
+              <a:t>Other charts are similar – things are scaled (num) or grouped (cat) along that axis. </a:t>
             </a:r>
           </a:p>
         </p:txBody>
@@ -5693,7 +5702,7 @@
 </file>
 
 <file path=ppt/slides/slide19.xml><?xml version="1.0" encoding="utf-8"?>
-<p:sld xmlns:a="http://schemas.openxmlformats.org/drawingml/2006/main" xmlns:r="http://schemas.openxmlformats.org/officeDocument/2006/relationships" xmlns:p="http://schemas.openxmlformats.org/presentationml/2006/main">
+<p:sld xmlns:a="http://schemas.openxmlformats.org/drawingml/2006/main" xmlns:r="http://schemas.openxmlformats.org/officeDocument/2006/relationships" xmlns:p="http://schemas.openxmlformats.org/presentationml/2006/main" show="0">
   <p:cSld>
     <p:spTree>
       <p:nvGrpSpPr>
@@ -10631,6 +10640,189 @@
     <p:extLst>
       <p:ext uri="{BB962C8B-B14F-4D97-AF65-F5344CB8AC3E}">
         <p14:creationId xmlns:p14="http://schemas.microsoft.com/office/powerpoint/2010/main" val="727630042"/>
+      </p:ext>
+    </p:extLst>
+  </p:cSld>
+  <p:clrMapOvr>
+    <a:masterClrMapping/>
+  </p:clrMapOvr>
+</p:sld>
+</file>
+
+<file path=ppt/slides/slide48.xml><?xml version="1.0" encoding="utf-8"?>
+<p:sld xmlns:a="http://schemas.openxmlformats.org/drawingml/2006/main" xmlns:r="http://schemas.openxmlformats.org/officeDocument/2006/relationships" xmlns:p="http://schemas.openxmlformats.org/presentationml/2006/main">
+  <p:cSld>
+    <p:spTree>
+      <p:nvGrpSpPr>
+        <p:cNvPr id="1" name=""/>
+        <p:cNvGrpSpPr/>
+        <p:nvPr/>
+      </p:nvGrpSpPr>
+      <p:grpSpPr>
+        <a:xfrm>
+          <a:off x="0" y="0"/>
+          <a:ext cx="0" cy="0"/>
+          <a:chOff x="0" y="0"/>
+          <a:chExt cx="0" cy="0"/>
+        </a:xfrm>
+      </p:grpSpPr>
+      <p:sp>
+        <p:nvSpPr>
+          <p:cNvPr id="2" name="Title 1">
+            <a:extLst>
+              <a:ext uri="{FF2B5EF4-FFF2-40B4-BE49-F238E27FC236}">
+                <a16:creationId xmlns:a16="http://schemas.microsoft.com/office/drawing/2014/main" id="{A69DBC3E-E17F-5859-3C27-390CA4D41E39}"/>
+              </a:ext>
+            </a:extLst>
+          </p:cNvPr>
+          <p:cNvSpPr>
+            <a:spLocks noGrp="1"/>
+          </p:cNvSpPr>
+          <p:nvPr>
+            <p:ph type="title"/>
+          </p:nvPr>
+        </p:nvSpPr>
+        <p:spPr/>
+        <p:txBody>
+          <a:bodyPr/>
+          <a:lstStyle/>
+          <a:p>
+            <a:r>
+              <a:rPr lang="en-US" dirty="0"/>
+              <a:t>Traffic Disruptions</a:t>
+            </a:r>
+          </a:p>
+        </p:txBody>
+      </p:sp>
+      <p:sp>
+        <p:nvSpPr>
+          <p:cNvPr id="3" name="Content Placeholder 2">
+            <a:extLst>
+              <a:ext uri="{FF2B5EF4-FFF2-40B4-BE49-F238E27FC236}">
+                <a16:creationId xmlns:a16="http://schemas.microsoft.com/office/drawing/2014/main" id="{A42F7682-1B9E-0DF2-49F0-DE4F3EA45A98}"/>
+              </a:ext>
+            </a:extLst>
+          </p:cNvPr>
+          <p:cNvSpPr>
+            <a:spLocks noGrp="1"/>
+          </p:cNvSpPr>
+          <p:nvPr>
+            <p:ph idx="1"/>
+          </p:nvPr>
+        </p:nvSpPr>
+        <p:spPr>
+          <a:xfrm>
+            <a:off x="1451579" y="1853755"/>
+            <a:ext cx="9603275" cy="4199726"/>
+          </a:xfrm>
+        </p:spPr>
+        <p:txBody>
+          <a:bodyPr>
+            <a:normAutofit lnSpcReduction="10000"/>
+          </a:bodyPr>
+          <a:lstStyle/>
+          <a:p>
+            <a:r>
+              <a:rPr lang="en-US" dirty="0"/>
+              <a:t>We’ll use some data on traffic disruptions in Edmonton. </a:t>
+            </a:r>
+          </a:p>
+          <a:p>
+            <a:r>
+              <a:rPr lang="en-US" dirty="0"/>
+              <a:t>Going in, I am going to assume that I want to the impact of construction. </a:t>
+            </a:r>
+          </a:p>
+          <a:p>
+            <a:pPr lvl="1"/>
+            <a:r>
+              <a:rPr lang="en-US" dirty="0"/>
+              <a:t>I’m not 100% certain on the exact thing to look at, I’ll figure it out while exploring. </a:t>
+            </a:r>
+          </a:p>
+          <a:p>
+            <a:pPr lvl="1"/>
+            <a:r>
+              <a:rPr lang="en-US" dirty="0"/>
+              <a:t>Start with where/when do disruptions happen and adjust. </a:t>
+            </a:r>
+          </a:p>
+          <a:p>
+            <a:r>
+              <a:rPr lang="en-US" dirty="0"/>
+              <a:t>Data is in repository or </a:t>
+            </a:r>
+            <a:r>
+              <a:rPr lang="en-US" dirty="0" err="1"/>
+              <a:t>CoE</a:t>
+            </a:r>
+            <a:r>
+              <a:rPr lang="en-US" dirty="0"/>
+              <a:t> site – read the dictionary if you have a moment. </a:t>
+            </a:r>
+          </a:p>
+          <a:p>
+            <a:pPr lvl="1"/>
+            <a:r>
+              <a:rPr lang="en-US" dirty="0"/>
+              <a:t>What is it tracking, what is each row, what information is contained. </a:t>
+            </a:r>
+          </a:p>
+          <a:p>
+            <a:r>
+              <a:rPr lang="en-US" dirty="0"/>
+              <a:t>This is a smaller and simpler assignment like process. </a:t>
+            </a:r>
+          </a:p>
+          <a:p>
+            <a:pPr lvl="1"/>
+            <a:r>
+              <a:rPr lang="en-US" dirty="0"/>
+              <a:t>This is realistic – I know broadly what I want, but I don’t know the details and I’m not totally sure yet that it’ll work out; I may need to adjust or change after starting. </a:t>
+            </a:r>
+          </a:p>
+          <a:p>
+            <a:r>
+              <a:rPr lang="en-US" dirty="0"/>
+              <a:t>Good practice* – download “bylaw infractions” and try to communicate some finding. </a:t>
+            </a:r>
+          </a:p>
+        </p:txBody>
+      </p:sp>
+      <p:pic>
+        <p:nvPicPr>
+          <p:cNvPr id="4" name="Picture 3">
+            <a:extLst>
+              <a:ext uri="{FF2B5EF4-FFF2-40B4-BE49-F238E27FC236}">
+                <a16:creationId xmlns:a16="http://schemas.microsoft.com/office/drawing/2014/main" id="{B8B6A735-4FD2-E7CA-2411-A8C46DF9DC47}"/>
+              </a:ext>
+            </a:extLst>
+          </p:cNvPr>
+          <p:cNvPicPr>
+            <a:picLocks noChangeAspect="1"/>
+          </p:cNvPicPr>
+          <p:nvPr/>
+        </p:nvPicPr>
+        <p:blipFill>
+          <a:blip r:embed="rId2"/>
+          <a:stretch>
+            <a:fillRect/>
+          </a:stretch>
+        </p:blipFill>
+        <p:spPr>
+          <a:xfrm>
+            <a:off x="5956300" y="0"/>
+            <a:ext cx="6235700" cy="1877488"/>
+          </a:xfrm>
+          <a:prstGeom prst="rect">
+            <a:avLst/>
+          </a:prstGeom>
+        </p:spPr>
+      </p:pic>
+    </p:spTree>
+    <p:extLst>
+      <p:ext uri="{BB962C8B-B14F-4D97-AF65-F5344CB8AC3E}">
+        <p14:creationId xmlns:p14="http://schemas.microsoft.com/office/powerpoint/2010/main" val="555573809"/>
       </p:ext>
     </p:extLst>
   </p:cSld>

--- a/slides/chapter_3.pptx
+++ b/slides/chapter_3.pptx
@@ -4049,7 +4049,7 @@
             <a:pPr lvl="1"/>
             <a:r>
               <a:rPr lang="en-US" dirty="0"/>
-              <a:t>More dashboarding. </a:t>
+              <a:t>More dashboarding, in an assignment-y way. </a:t>
             </a:r>
           </a:p>
           <a:p>
